--- a/HP_Proposal_Professional.pptx
+++ b/HP_Proposal_Professional.pptx
@@ -15,6 +15,7 @@
     <p:sldId id="263" r:id="rId14"/>
     <p:sldId id="264" r:id="rId15"/>
     <p:sldId id="265" r:id="rId16"/>
+    <p:sldId id="266" r:id="rId17"/>
   </p:sldIdLst>
   <p:sldSz cx="9144000" cy="6858000" type="screen4x3"/>
   <p:notesSz cx="6858000" cy="9144000"/>
@@ -3105,8 +3106,8 @@
         </p:nvSpPr>
         <p:spPr>
           <a:xfrm>
-            <a:off x="914400" y="1828800"/>
-            <a:ext cx="7315200" cy="1828800"/>
+            <a:off x="914400" y="457200"/>
+            <a:ext cx="7315200" cy="5486400"/>
           </a:xfrm>
           <a:prstGeom prst="rect">
             <a:avLst/>
@@ -3120,14 +3121,14 @@
           <a:lstStyle/>
           <a:p>
             <a:pPr algn="ctr">
-              <a:defRPr b="1" sz="3400">
+              <a:defRPr b="1" sz="3000">
                 <a:solidFill>
                   <a:srgbClr val="004279"/>
                 </a:solidFill>
               </a:defRPr>
             </a:pPr>
             <a:r>
-              <a:t>Introducing the HP ProBook and EliteBook series, combining sleek, lightweight designs with robust performance tailored for professionals. Experience upgradeable RAM and powerful Intel® or AMD technology, ensuring seamless multitasking and reliable performance. With impressive displays and extensive connectivity options, these laptops are perfect for enhancing productivity in any work environment. Elevate your business capabilities with the security and reliability your team deserves.</a:t>
+              <a:t>Introducing the HP ProBook and EliteBook series, designed for the modern business professional. With lightweight designs and upgradeable RAM up to 16 GB, these laptops provide exceptional performance and portability. Optimize your productivity with tailored configurations, including discrete graphics and robust security features. Elevate your work experience with reliable performance on Windows 8 Pro, empowering you to tackle any task with confidence.</a:t>
             </a:r>
           </a:p>
         </p:txBody>
@@ -3193,6 +3194,595 @@
         </p:nvSpPr>
         <p:spPr>
           <a:xfrm>
+            <a:off x="457200" y="182880"/>
+            <a:ext cx="8229600" cy="548640"/>
+          </a:xfrm>
+          <a:prstGeom prst="rect">
+            <a:avLst/>
+          </a:prstGeom>
+          <a:noFill/>
+        </p:spPr>
+        <p:txBody>
+          <a:bodyPr wrap="none">
+            <a:spAutoFit/>
+          </a:bodyPr>
+          <a:lstStyle/>
+          <a:p>
+            <a:pPr>
+              <a:defRPr sz="2800" b="1"/>
+            </a:pPr>
+            <a:r>
+              <a:t>Upsell Recommendations — Page 2</a:t>
+            </a:r>
+          </a:p>
+        </p:txBody>
+      </p:sp>
+      <p:sp>
+        <p:nvSpPr>
+          <p:cNvPr id="3" name="TextBox 2"/>
+          <p:cNvSpPr txBox="1"/>
+          <p:nvPr/>
+        </p:nvSpPr>
+        <p:spPr>
+          <a:xfrm>
+            <a:off x="457200" y="1097280"/>
+            <a:ext cx="2743200" cy="365760"/>
+          </a:xfrm>
+          <a:prstGeom prst="rect">
+            <a:avLst/>
+          </a:prstGeom>
+          <a:noFill/>
+        </p:spPr>
+        <p:txBody>
+          <a:bodyPr wrap="square">
+            <a:spAutoFit/>
+          </a:bodyPr>
+          <a:lstStyle/>
+          <a:p>
+            <a:pPr algn="ctr">
+              <a:defRPr sz="2200" b="1">
+                <a:solidFill>
+                  <a:srgbClr val="000000"/>
+                </a:solidFill>
+              </a:defRPr>
+            </a:pPr>
+            <a:r>
+              <a:t>Sleeve</a:t>
+            </a:r>
+          </a:p>
+        </p:txBody>
+      </p:sp>
+      <p:pic>
+        <p:nvPicPr>
+          <p:cNvPr id="4" name="Picture 3" descr="page_28_img_9.png"/>
+          <p:cNvPicPr>
+            <a:picLocks noChangeAspect="1"/>
+          </p:cNvPicPr>
+          <p:nvPr/>
+        </p:nvPicPr>
+        <p:blipFill>
+          <a:blip r:embed="rId2"/>
+          <a:stretch>
+            <a:fillRect/>
+          </a:stretch>
+        </p:blipFill>
+        <p:spPr>
+          <a:xfrm>
+            <a:off x="1272487" y="1463040"/>
+            <a:ext cx="1112626" cy="914400"/>
+          </a:xfrm>
+          <a:prstGeom prst="rect">
+            <a:avLst/>
+          </a:prstGeom>
+        </p:spPr>
+      </p:pic>
+      <p:sp>
+        <p:nvSpPr>
+          <p:cNvPr id="5" name="TextBox 4"/>
+          <p:cNvSpPr txBox="1"/>
+          <p:nvPr/>
+        </p:nvSpPr>
+        <p:spPr>
+          <a:xfrm>
+            <a:off x="457200" y="2377440"/>
+            <a:ext cx="2743200" cy="329184"/>
+          </a:xfrm>
+          <a:prstGeom prst="rect">
+            <a:avLst/>
+          </a:prstGeom>
+          <a:noFill/>
+        </p:spPr>
+        <p:txBody>
+          <a:bodyPr wrap="square">
+            <a:spAutoFit/>
+          </a:bodyPr>
+          <a:lstStyle/>
+          <a:p>
+            <a:pPr algn="ctr">
+              <a:defRPr sz="1400" b="1">
+                <a:solidFill>
+                  <a:srgbClr val="000000"/>
+                </a:solidFill>
+              </a:defRPr>
+            </a:pPr>
+            <a:r>
+              <a:t>HP ElitePad Case</a:t>
+            </a:r>
+          </a:p>
+        </p:txBody>
+      </p:sp>
+      <p:sp>
+        <p:nvSpPr>
+          <p:cNvPr id="6" name="TextBox 5"/>
+          <p:cNvSpPr txBox="1"/>
+          <p:nvPr/>
+        </p:nvSpPr>
+        <p:spPr>
+          <a:xfrm>
+            <a:off x="457200" y="2706624"/>
+            <a:ext cx="2743200" cy="585216"/>
+          </a:xfrm>
+          <a:prstGeom prst="rect">
+            <a:avLst/>
+          </a:prstGeom>
+          <a:noFill/>
+        </p:spPr>
+        <p:txBody>
+          <a:bodyPr wrap="square">
+            <a:spAutoFit/>
+          </a:bodyPr>
+          <a:lstStyle/>
+          <a:p>
+            <a:pPr algn="l">
+              <a:defRPr sz="1100" b="0">
+                <a:solidFill>
+                  <a:srgbClr val="000000"/>
+                </a:solidFill>
+              </a:defRPr>
+            </a:pPr>
+            <a:r>
+              <a:t>Sophistication. Durability. We've got you covered. Carry your HP Elite</a:t>
+            </a:r>
+          </a:p>
+        </p:txBody>
+      </p:sp>
+      <p:pic>
+        <p:nvPicPr>
+          <p:cNvPr id="7" name="Picture 6" descr="page_28_img_9.png"/>
+          <p:cNvPicPr>
+            <a:picLocks noChangeAspect="1"/>
+          </p:cNvPicPr>
+          <p:nvPr/>
+        </p:nvPicPr>
+        <p:blipFill>
+          <a:blip r:embed="rId2"/>
+          <a:stretch>
+            <a:fillRect/>
+          </a:stretch>
+        </p:blipFill>
+        <p:spPr>
+          <a:xfrm>
+            <a:off x="1272487" y="3291840"/>
+            <a:ext cx="1112626" cy="914400"/>
+          </a:xfrm>
+          <a:prstGeom prst="rect">
+            <a:avLst/>
+          </a:prstGeom>
+        </p:spPr>
+      </p:pic>
+      <p:sp>
+        <p:nvSpPr>
+          <p:cNvPr id="8" name="TextBox 7"/>
+          <p:cNvSpPr txBox="1"/>
+          <p:nvPr/>
+        </p:nvSpPr>
+        <p:spPr>
+          <a:xfrm>
+            <a:off x="457200" y="4206240"/>
+            <a:ext cx="2743200" cy="329184"/>
+          </a:xfrm>
+          <a:prstGeom prst="rect">
+            <a:avLst/>
+          </a:prstGeom>
+          <a:noFill/>
+        </p:spPr>
+        <p:txBody>
+          <a:bodyPr wrap="square">
+            <a:spAutoFit/>
+          </a:bodyPr>
+          <a:lstStyle/>
+          <a:p>
+            <a:pPr algn="ctr">
+              <a:defRPr sz="1400" b="1">
+                <a:solidFill>
+                  <a:srgbClr val="000000"/>
+                </a:solidFill>
+              </a:defRPr>
+            </a:pPr>
+            <a:r>
+              <a:t>HP ElitePad Rugged Case</a:t>
+            </a:r>
+          </a:p>
+        </p:txBody>
+      </p:sp>
+      <p:sp>
+        <p:nvSpPr>
+          <p:cNvPr id="9" name="TextBox 8"/>
+          <p:cNvSpPr txBox="1"/>
+          <p:nvPr/>
+        </p:nvSpPr>
+        <p:spPr>
+          <a:xfrm>
+            <a:off x="457200" y="4535424"/>
+            <a:ext cx="2743200" cy="585216"/>
+          </a:xfrm>
+          <a:prstGeom prst="rect">
+            <a:avLst/>
+          </a:prstGeom>
+          <a:noFill/>
+        </p:spPr>
+        <p:txBody>
+          <a:bodyPr wrap="square">
+            <a:spAutoFit/>
+          </a:bodyPr>
+          <a:lstStyle/>
+          <a:p>
+            <a:pPr algn="l">
+              <a:defRPr sz="1100" b="0">
+                <a:solidFill>
+                  <a:srgbClr val="000000"/>
+                </a:solidFill>
+              </a:defRPr>
+            </a:pPr>
+            <a:r>
+              <a:t>Help protect your HP ElitePad when you work with a business rugged env</a:t>
+            </a:r>
+          </a:p>
+        </p:txBody>
+      </p:sp>
+      <p:sp>
+        <p:nvSpPr>
+          <p:cNvPr id="10" name="TextBox 9"/>
+          <p:cNvSpPr txBox="1"/>
+          <p:nvPr/>
+        </p:nvSpPr>
+        <p:spPr>
+          <a:xfrm>
+            <a:off x="3200400" y="1097280"/>
+            <a:ext cx="2743200" cy="365760"/>
+          </a:xfrm>
+          <a:prstGeom prst="rect">
+            <a:avLst/>
+          </a:prstGeom>
+          <a:noFill/>
+        </p:spPr>
+        <p:txBody>
+          <a:bodyPr wrap="square">
+            <a:spAutoFit/>
+          </a:bodyPr>
+          <a:lstStyle/>
+          <a:p>
+            <a:pPr algn="ctr">
+              <a:defRPr sz="2200" b="1">
+                <a:solidFill>
+                  <a:srgbClr val="000000"/>
+                </a:solidFill>
+              </a:defRPr>
+            </a:pPr>
+            <a:r>
+              <a:t>Docking Station</a:t>
+            </a:r>
+          </a:p>
+        </p:txBody>
+      </p:sp>
+      <p:pic>
+        <p:nvPicPr>
+          <p:cNvPr id="11" name="Picture 10" descr="page_28_img_4.png"/>
+          <p:cNvPicPr>
+            <a:picLocks noChangeAspect="1"/>
+          </p:cNvPicPr>
+          <p:nvPr/>
+        </p:nvPicPr>
+        <p:blipFill>
+          <a:blip r:embed="rId3"/>
+          <a:stretch>
+            <a:fillRect/>
+          </a:stretch>
+        </p:blipFill>
+        <p:spPr>
+          <a:xfrm>
+            <a:off x="3863009" y="1463040"/>
+            <a:ext cx="1417982" cy="914400"/>
+          </a:xfrm>
+          <a:prstGeom prst="rect">
+            <a:avLst/>
+          </a:prstGeom>
+        </p:spPr>
+      </p:pic>
+      <p:sp>
+        <p:nvSpPr>
+          <p:cNvPr id="12" name="TextBox 11"/>
+          <p:cNvSpPr txBox="1"/>
+          <p:nvPr/>
+        </p:nvSpPr>
+        <p:spPr>
+          <a:xfrm>
+            <a:off x="3200400" y="2377440"/>
+            <a:ext cx="2743200" cy="329184"/>
+          </a:xfrm>
+          <a:prstGeom prst="rect">
+            <a:avLst/>
+          </a:prstGeom>
+          <a:noFill/>
+        </p:spPr>
+        <p:txBody>
+          <a:bodyPr wrap="square">
+            <a:spAutoFit/>
+          </a:bodyPr>
+          <a:lstStyle/>
+          <a:p>
+            <a:pPr algn="ctr">
+              <a:defRPr sz="1400" b="1">
+                <a:solidFill>
+                  <a:srgbClr val="000000"/>
+                </a:solidFill>
+              </a:defRPr>
+            </a:pPr>
+            <a:r>
+              <a:t>HP 2012 230W Docking Station</a:t>
+            </a:r>
+          </a:p>
+        </p:txBody>
+      </p:sp>
+      <p:sp>
+        <p:nvSpPr>
+          <p:cNvPr id="13" name="TextBox 12"/>
+          <p:cNvSpPr txBox="1"/>
+          <p:nvPr/>
+        </p:nvSpPr>
+        <p:spPr>
+          <a:xfrm>
+            <a:off x="3200400" y="2706624"/>
+            <a:ext cx="2743200" cy="585216"/>
+          </a:xfrm>
+          <a:prstGeom prst="rect">
+            <a:avLst/>
+          </a:prstGeom>
+          <a:noFill/>
+        </p:spPr>
+        <p:txBody>
+          <a:bodyPr wrap="square">
+            <a:spAutoFit/>
+          </a:bodyPr>
+          <a:lstStyle/>
+          <a:p>
+            <a:pPr algn="l">
+              <a:defRPr sz="1100" b="0">
+                <a:solidFill>
+                  <a:srgbClr val="000000"/>
+                </a:solidFill>
+              </a:defRPr>
+            </a:pPr>
+            <a:r>
+              <a:t>HP offers a full line of docking stations designed exclusively for sel</a:t>
+            </a:r>
+          </a:p>
+        </p:txBody>
+      </p:sp>
+      <p:pic>
+        <p:nvPicPr>
+          <p:cNvPr id="14" name="Picture 13" descr="page_28_img_4.png"/>
+          <p:cNvPicPr>
+            <a:picLocks noChangeAspect="1"/>
+          </p:cNvPicPr>
+          <p:nvPr/>
+        </p:nvPicPr>
+        <p:blipFill>
+          <a:blip r:embed="rId3"/>
+          <a:stretch>
+            <a:fillRect/>
+          </a:stretch>
+        </p:blipFill>
+        <p:spPr>
+          <a:xfrm>
+            <a:off x="3863009" y="3291840"/>
+            <a:ext cx="1417982" cy="914400"/>
+          </a:xfrm>
+          <a:prstGeom prst="rect">
+            <a:avLst/>
+          </a:prstGeom>
+        </p:spPr>
+      </p:pic>
+      <p:sp>
+        <p:nvSpPr>
+          <p:cNvPr id="15" name="TextBox 14"/>
+          <p:cNvSpPr txBox="1"/>
+          <p:nvPr/>
+        </p:nvSpPr>
+        <p:spPr>
+          <a:xfrm>
+            <a:off x="3200400" y="4206240"/>
+            <a:ext cx="2743200" cy="329184"/>
+          </a:xfrm>
+          <a:prstGeom prst="rect">
+            <a:avLst/>
+          </a:prstGeom>
+          <a:noFill/>
+        </p:spPr>
+        <p:txBody>
+          <a:bodyPr wrap="square">
+            <a:spAutoFit/>
+          </a:bodyPr>
+          <a:lstStyle/>
+          <a:p>
+            <a:pPr algn="ctr">
+              <a:defRPr sz="1400" b="1">
+                <a:solidFill>
+                  <a:srgbClr val="000000"/>
+                </a:solidFill>
+              </a:defRPr>
+            </a:pPr>
+            <a:r>
+              <a:t>HP 2012 230W Advanced Docking Station</a:t>
+            </a:r>
+          </a:p>
+        </p:txBody>
+      </p:sp>
+      <p:sp>
+        <p:nvSpPr>
+          <p:cNvPr id="16" name="TextBox 15"/>
+          <p:cNvSpPr txBox="1"/>
+          <p:nvPr/>
+        </p:nvSpPr>
+        <p:spPr>
+          <a:xfrm>
+            <a:off x="3200400" y="4535424"/>
+            <a:ext cx="2743200" cy="585216"/>
+          </a:xfrm>
+          <a:prstGeom prst="rect">
+            <a:avLst/>
+          </a:prstGeom>
+          <a:noFill/>
+        </p:spPr>
+        <p:txBody>
+          <a:bodyPr wrap="square">
+            <a:spAutoFit/>
+          </a:bodyPr>
+          <a:lstStyle/>
+          <a:p>
+            <a:pPr algn="l">
+              <a:defRPr sz="1100" b="0">
+                <a:solidFill>
+                  <a:srgbClr val="000000"/>
+                </a:solidFill>
+              </a:defRPr>
+            </a:pPr>
+            <a:r>
+              <a:t>HP offers a full line of docking stations designed exclusively for sel</a:t>
+            </a:r>
+          </a:p>
+        </p:txBody>
+      </p:sp>
+      <p:pic>
+        <p:nvPicPr>
+          <p:cNvPr id="17" name="Picture 16" descr="page_28_img_3.png"/>
+          <p:cNvPicPr>
+            <a:picLocks noChangeAspect="1"/>
+          </p:cNvPicPr>
+          <p:nvPr/>
+        </p:nvPicPr>
+        <p:blipFill>
+          <a:blip r:embed="rId4"/>
+          <a:stretch>
+            <a:fillRect/>
+          </a:stretch>
+        </p:blipFill>
+        <p:spPr>
+          <a:xfrm>
+            <a:off x="3845257" y="5120640"/>
+            <a:ext cx="1453486" cy="914400"/>
+          </a:xfrm>
+          <a:prstGeom prst="rect">
+            <a:avLst/>
+          </a:prstGeom>
+        </p:spPr>
+      </p:pic>
+      <p:sp>
+        <p:nvSpPr>
+          <p:cNvPr id="18" name="TextBox 17"/>
+          <p:cNvSpPr txBox="1"/>
+          <p:nvPr/>
+        </p:nvSpPr>
+        <p:spPr>
+          <a:xfrm>
+            <a:off x="3200400" y="6035040"/>
+            <a:ext cx="2743200" cy="329184"/>
+          </a:xfrm>
+          <a:prstGeom prst="rect">
+            <a:avLst/>
+          </a:prstGeom>
+          <a:noFill/>
+        </p:spPr>
+        <p:txBody>
+          <a:bodyPr wrap="square">
+            <a:spAutoFit/>
+          </a:bodyPr>
+          <a:lstStyle/>
+          <a:p>
+            <a:pPr algn="ctr">
+              <a:defRPr sz="1400" b="1">
+                <a:solidFill>
+                  <a:srgbClr val="000000"/>
+                </a:solidFill>
+              </a:defRPr>
+            </a:pPr>
+            <a:r>
+              <a:t>HP 2012 120W Advanced Docking Station</a:t>
+            </a:r>
+          </a:p>
+        </p:txBody>
+      </p:sp>
+      <p:sp>
+        <p:nvSpPr>
+          <p:cNvPr id="19" name="TextBox 18"/>
+          <p:cNvSpPr txBox="1"/>
+          <p:nvPr/>
+        </p:nvSpPr>
+        <p:spPr>
+          <a:xfrm>
+            <a:off x="3200400" y="6364224"/>
+            <a:ext cx="2743200" cy="585216"/>
+          </a:xfrm>
+          <a:prstGeom prst="rect">
+            <a:avLst/>
+          </a:prstGeom>
+          <a:noFill/>
+        </p:spPr>
+        <p:txBody>
+          <a:bodyPr wrap="square">
+            <a:spAutoFit/>
+          </a:bodyPr>
+          <a:lstStyle/>
+          <a:p>
+            <a:pPr algn="l">
+              <a:defRPr sz="1100" b="0">
+                <a:solidFill>
+                  <a:srgbClr val="000000"/>
+                </a:solidFill>
+              </a:defRPr>
+            </a:pPr>
+            <a:r>
+              <a:t>HP offers a full line of docking stations designed exclusively for sel</a:t>
+            </a:r>
+          </a:p>
+        </p:txBody>
+      </p:sp>
+    </p:spTree>
+  </p:cSld>
+  <p:clrMapOvr>
+    <a:masterClrMapping/>
+  </p:clrMapOvr>
+</p:sld>
+</file>
+
+<file path=ppt/slides/slide11.xml><?xml version="1.0" encoding="utf-8"?>
+<p:sld xmlns:a="http://schemas.openxmlformats.org/drawingml/2006/main" xmlns:p="http://schemas.openxmlformats.org/presentationml/2006/main" xmlns:r="http://schemas.openxmlformats.org/officeDocument/2006/relationships">
+  <p:cSld>
+    <p:spTree>
+      <p:nvGrpSpPr>
+        <p:cNvPr id="1" name=""/>
+        <p:cNvGrpSpPr/>
+        <p:nvPr/>
+      </p:nvGrpSpPr>
+      <p:grpSpPr/>
+      <p:sp>
+        <p:nvSpPr>
+          <p:cNvPr id="2" name="TextBox 1"/>
+          <p:cNvSpPr txBox="1"/>
+          <p:nvPr/>
+        </p:nvSpPr>
+        <p:spPr>
+          <a:xfrm>
             <a:off x="548640" y="1280160"/>
             <a:ext cx="8229600" cy="3200400"/>
           </a:xfrm>
@@ -3381,6 +3971,50 @@
                 <a:latin typeface="Calibri"/>
               </a:rPr>
               <a:t>Extracted Requirements:</a:t>
+            </a:r>
+          </a:p>
+          <a:p>
+            <a:r>
+              <a:rPr sz="1400" b="0">
+                <a:solidFill>
+                  <a:srgbClr val="222222"/>
+                </a:solidFill>
+                <a:latin typeface="Calibri"/>
+              </a:rPr>
+              <a:t>• product_category</a:t>
+            </a:r>
+          </a:p>
+          <a:p>
+            <a:r>
+              <a:rPr sz="1400" b="0">
+                <a:solidFill>
+                  <a:srgbClr val="222222"/>
+                </a:solidFill>
+                <a:latin typeface="Calibri"/>
+              </a:rPr>
+              <a:t>• quantity</a:t>
+            </a:r>
+          </a:p>
+          <a:p>
+            <a:r>
+              <a:rPr sz="1400" b="0">
+                <a:solidFill>
+                  <a:srgbClr val="222222"/>
+                </a:solidFill>
+                <a:latin typeface="Calibri"/>
+              </a:rPr>
+              <a:t>• budget_per_unit</a:t>
+            </a:r>
+          </a:p>
+          <a:p>
+            <a:r>
+              <a:rPr sz="1400" b="0">
+                <a:solidFill>
+                  <a:srgbClr val="222222"/>
+                </a:solidFill>
+                <a:latin typeface="Calibri"/>
+              </a:rPr>
+              <a:t>• specific_requirements</a:t>
             </a:r>
           </a:p>
         </p:txBody>
@@ -4614,7 +5248,7 @@
                 <a:gridCol w="2468880"/>
                 <a:gridCol w="2468880"/>
               </a:tblGrid>
-              <a:tr h="718457">
+              <a:tr h="628650">
                 <a:tc>
                   <a:txBody>
                     <a:bodyPr/>
@@ -4652,7 +5286,7 @@
                   <a:tcPr/>
                 </a:tc>
               </a:tr>
-              <a:tr h="718457">
+              <a:tr h="628650">
                 <a:tc>
                   <a:txBody>
                     <a:bodyPr/>
@@ -4690,7 +5324,7 @@
                   <a:tcPr/>
                 </a:tc>
               </a:tr>
-              <a:tr h="718457">
+              <a:tr h="628650">
                 <a:tc>
                   <a:txBody>
                     <a:bodyPr/>
@@ -4703,6 +5337,44 @@
                           </a:solidFill>
                           <a:latin typeface="Calibri"/>
                         </a:rPr>
+                        <a:t>Cpu</a:t>
+                      </a:r>
+                    </a:p>
+                  </a:txBody>
+                  <a:tcPr/>
+                </a:tc>
+                <a:tc>
+                  <a:txBody>
+                    <a:bodyPr/>
+                    <a:lstStyle/>
+                    <a:p>
+                      <a:r>
+                        <a:rPr sz="1000" b="0">
+                          <a:solidFill>
+                            <a:srgbClr val="222222"/>
+                          </a:solidFill>
+                          <a:latin typeface="Calibri"/>
+                        </a:rPr>
+                        <a:t>Chipset integrated with processor</a:t>
+                      </a:r>
+                    </a:p>
+                  </a:txBody>
+                  <a:tcPr/>
+                </a:tc>
+              </a:tr>
+              <a:tr h="628650">
+                <a:tc>
+                  <a:txBody>
+                    <a:bodyPr/>
+                    <a:lstStyle/>
+                    <a:p>
+                      <a:r>
+                        <a:rPr sz="1000" b="0">
+                          <a:solidFill>
+                            <a:srgbClr val="222222"/>
+                          </a:solidFill>
+                          <a:latin typeface="Calibri"/>
+                        </a:rPr>
                         <a:t>Display</a:t>
                       </a:r>
                     </a:p>
@@ -4728,7 +5400,7 @@
                   <a:tcPr/>
                 </a:tc>
               </a:tr>
-              <a:tr h="718457">
+              <a:tr h="628650">
                 <a:tc>
                   <a:txBody>
                     <a:bodyPr/>
@@ -4766,7 +5438,7 @@
                   <a:tcPr/>
                 </a:tc>
               </a:tr>
-              <a:tr h="718457">
+              <a:tr h="628650">
                 <a:tc>
                   <a:txBody>
                     <a:bodyPr/>
@@ -4804,7 +5476,7 @@
                   <a:tcPr/>
                 </a:tc>
               </a:tr>
-              <a:tr h="718457">
+              <a:tr h="628650">
                 <a:tc>
                   <a:txBody>
                     <a:bodyPr/>
@@ -4842,7 +5514,7 @@
                   <a:tcPr/>
                 </a:tc>
               </a:tr>
-              <a:tr h="718458">
+              <a:tr h="628650">
                 <a:tc>
                   <a:txBody>
                     <a:bodyPr/>
@@ -5063,7 +5735,7 @@
                 <a:gridCol w="2468880"/>
                 <a:gridCol w="2468880"/>
               </a:tblGrid>
-              <a:tr h="718457">
+              <a:tr h="628650">
                 <a:tc>
                   <a:txBody>
                     <a:bodyPr/>
@@ -5101,7 +5773,7 @@
                   <a:tcPr/>
                 </a:tc>
               </a:tr>
-              <a:tr h="718457">
+              <a:tr h="628650">
                 <a:tc>
                   <a:txBody>
                     <a:bodyPr/>
@@ -5139,7 +5811,7 @@
                   <a:tcPr/>
                 </a:tc>
               </a:tr>
-              <a:tr h="718457">
+              <a:tr h="628650">
                 <a:tc>
                   <a:txBody>
                     <a:bodyPr/>
@@ -5152,6 +5824,44 @@
                           </a:solidFill>
                           <a:latin typeface="Calibri"/>
                         </a:rPr>
+                        <a:t>Cpu</a:t>
+                      </a:r>
+                    </a:p>
+                  </a:txBody>
+                  <a:tcPr/>
+                </a:tc>
+                <a:tc>
+                  <a:txBody>
+                    <a:bodyPr/>
+                    <a:lstStyle/>
+                    <a:p>
+                      <a:r>
+                        <a:rPr sz="1000" b="0">
+                          <a:solidFill>
+                            <a:srgbClr val="222222"/>
+                          </a:solidFill>
+                          <a:latin typeface="Calibri"/>
+                        </a:rPr>
+                        <a:t>Chipset integrated with processor</a:t>
+                      </a:r>
+                    </a:p>
+                  </a:txBody>
+                  <a:tcPr/>
+                </a:tc>
+              </a:tr>
+              <a:tr h="628650">
+                <a:tc>
+                  <a:txBody>
+                    <a:bodyPr/>
+                    <a:lstStyle/>
+                    <a:p>
+                      <a:r>
+                        <a:rPr sz="1000" b="0">
+                          <a:solidFill>
+                            <a:srgbClr val="222222"/>
+                          </a:solidFill>
+                          <a:latin typeface="Calibri"/>
+                        </a:rPr>
                         <a:t>Display</a:t>
                       </a:r>
                     </a:p>
@@ -5177,7 +5887,7 @@
                   <a:tcPr/>
                 </a:tc>
               </a:tr>
-              <a:tr h="718457">
+              <a:tr h="628650">
                 <a:tc>
                   <a:txBody>
                     <a:bodyPr/>
@@ -5215,7 +5925,7 @@
                   <a:tcPr/>
                 </a:tc>
               </a:tr>
-              <a:tr h="718457">
+              <a:tr h="628650">
                 <a:tc>
                   <a:txBody>
                     <a:bodyPr/>
@@ -5253,7 +5963,7 @@
                   <a:tcPr/>
                 </a:tc>
               </a:tr>
-              <a:tr h="718457">
+              <a:tr h="628650">
                 <a:tc>
                   <a:txBody>
                     <a:bodyPr/>
@@ -5291,7 +6001,7 @@
                   <a:tcPr/>
                 </a:tc>
               </a:tr>
-              <a:tr h="718458">
+              <a:tr h="628650">
                 <a:tc>
                   <a:txBody>
                     <a:bodyPr/>
@@ -5415,14 +6125,14 @@
                 </a:solidFill>
                 <a:latin typeface="Calibri"/>
               </a:rPr>
-              <a:t>HP ProBook 645 G1</a:t>
+              <a:t>HP ProBook 655 G1</a:t>
             </a:r>
           </a:p>
         </p:txBody>
       </p:sp>
       <p:pic>
         <p:nvPicPr>
-          <p:cNvPr id="3" name="Picture 2" descr="page_5_img_13.png"/>
+          <p:cNvPr id="3" name="Picture 2" descr="page_5_img_14.png"/>
           <p:cNvPicPr>
             <a:picLocks noChangeAspect="1"/>
           </p:cNvPicPr>
@@ -5485,7 +6195,7 @@
                 </a:solidFill>
                 <a:latin typeface="Calibri"/>
               </a:rPr>
-              <a:t>Challenge the Status Quo. Optimised for Windows 8 Pro. 2 this configurable laptop touts a 35.6 cm diagonal display, UMA graphics and AMD's latest technology. The professional design and HP 3D DriveGuard help protect your data from mobile use.</a:t>
+              <a:t>Challenge the Status Quo. Optimised for Windows 8 Pro. 2 this configurable laptop touts a 39.6 cm diagonal display, UMA graphics and AMD's latest technology. The professional design and HP 3D DriveGuard help protect your data from mobile use.</a:t>
             </a:r>
           </a:p>
         </p:txBody>
@@ -5512,7 +6222,7 @@
                 <a:gridCol w="2468880"/>
                 <a:gridCol w="2468880"/>
               </a:tblGrid>
-              <a:tr h="558800">
+              <a:tr h="502920">
                 <a:tc>
                   <a:txBody>
                     <a:bodyPr/>
@@ -5550,7 +6260,7 @@
                   <a:tcPr/>
                 </a:tc>
               </a:tr>
-              <a:tr h="558800">
+              <a:tr h="502920">
                 <a:tc>
                   <a:txBody>
                     <a:bodyPr/>
@@ -5588,7 +6298,7 @@
                   <a:tcPr/>
                 </a:tc>
               </a:tr>
-              <a:tr h="558800">
+              <a:tr h="502920">
                 <a:tc>
                   <a:txBody>
                     <a:bodyPr/>
@@ -5626,7 +6336,7 @@
                   <a:tcPr/>
                 </a:tc>
               </a:tr>
-              <a:tr h="558800">
+              <a:tr h="502920">
                 <a:tc>
                   <a:txBody>
                     <a:bodyPr/>
@@ -5664,7 +6374,7 @@
                   <a:tcPr/>
                 </a:tc>
               </a:tr>
-              <a:tr h="558800">
+              <a:tr h="502920">
                 <a:tc>
                   <a:txBody>
                     <a:bodyPr/>
@@ -5677,6 +6387,44 @@
                           </a:solidFill>
                           <a:latin typeface="Calibri"/>
                         </a:rPr>
+                        <a:t>Storage</a:t>
+                      </a:r>
+                    </a:p>
+                  </a:txBody>
+                  <a:tcPr/>
+                </a:tc>
+                <a:tc>
+                  <a:txBody>
+                    <a:bodyPr/>
+                    <a:lstStyle/>
+                    <a:p>
+                      <a:r>
+                        <a:rPr sz="1000" b="0">
+                          <a:solidFill>
+                            <a:srgbClr val="222222"/>
+                          </a:solidFill>
+                          <a:latin typeface="Calibri"/>
+                        </a:rPr>
+                        <a:t>HP 3D DriveGuard</a:t>
+                      </a:r>
+                    </a:p>
+                  </a:txBody>
+                  <a:tcPr/>
+                </a:tc>
+              </a:tr>
+              <a:tr h="502920">
+                <a:tc>
+                  <a:txBody>
+                    <a:bodyPr/>
+                    <a:lstStyle/>
+                    <a:p>
+                      <a:r>
+                        <a:rPr sz="1000" b="0">
+                          <a:solidFill>
+                            <a:srgbClr val="222222"/>
+                          </a:solidFill>
+                          <a:latin typeface="Calibri"/>
+                        </a:rPr>
                         <a:t>Display</a:t>
                       </a:r>
                     </a:p>
@@ -5695,14 +6443,14 @@
                           </a:solidFill>
                           <a:latin typeface="Calibri"/>
                         </a:rPr>
-                        <a:t>35.6 cm diagonal</a:t>
+                        <a:t>39.6 cm diagonal</a:t>
                       </a:r>
                     </a:p>
                   </a:txBody>
                   <a:tcPr/>
                 </a:tc>
               </a:tr>
-              <a:tr h="558800">
+              <a:tr h="502920">
                 <a:tc>
                   <a:txBody>
                     <a:bodyPr/>
@@ -5740,7 +6488,7 @@
                   <a:tcPr/>
                 </a:tc>
               </a:tr>
-              <a:tr h="558800">
+              <a:tr h="502920">
                 <a:tc>
                   <a:txBody>
                     <a:bodyPr/>
@@ -5771,14 +6519,14 @@
                           </a:solidFill>
                           <a:latin typeface="Calibri"/>
                         </a:rPr>
-                        <a:t>Starting at 2.0 kg</a:t>
+                        <a:t>Starting at 2.32 kg</a:t>
                       </a:r>
                     </a:p>
                   </a:txBody>
                   <a:tcPr/>
                 </a:tc>
               </a:tr>
-              <a:tr h="558800">
+              <a:tr h="502920">
                 <a:tc>
                   <a:txBody>
                     <a:bodyPr/>
@@ -5816,7 +6564,7 @@
                   <a:tcPr/>
                 </a:tc>
               </a:tr>
-              <a:tr h="558800">
+              <a:tr h="502920">
                 <a:tc>
                   <a:txBody>
                     <a:bodyPr/>
@@ -5888,7 +6636,7 @@
                 </a:solidFill>
                 <a:latin typeface="Calibri"/>
               </a:rPr>
-              <a:t>HP ProBook 645 G1 — Product Details</a:t>
+              <a:t>HP ProBook 655 G1 — Product Details</a:t>
             </a:r>
           </a:p>
         </p:txBody>
@@ -5971,7 +6719,7 @@
                 <a:gridCol w="1432560"/>
                 <a:gridCol w="1432560"/>
               </a:tblGrid>
-              <a:tr h="548640">
+              <a:tr h="493776">
                 <a:tc>
                   <a:txBody>
                     <a:bodyPr/>
@@ -6074,14 +6822,14 @@
                           </a:solidFill>
                           <a:latin typeface="Calibri"/>
                         </a:rPr>
-                        <a:t>HP ProBook 645 G1</a:t>
+                        <a:t>HP ProBook 655 G1</a:t>
                       </a:r>
                     </a:p>
                   </a:txBody>
                   <a:tcPr/>
                 </a:tc>
               </a:tr>
-              <a:tr h="548640">
+              <a:tr h="493776">
                 <a:tc>
                   <a:txBody>
                     <a:bodyPr/>
@@ -6191,7 +6939,7 @@
                   <a:tcPr/>
                 </a:tc>
               </a:tr>
-              <a:tr h="548640">
+              <a:tr h="493776">
                 <a:tc>
                   <a:txBody>
                     <a:bodyPr/>
@@ -6258,6 +7006,226 @@
                           </a:solidFill>
                           <a:latin typeface="Calibri"/>
                         </a:rPr>
+                        <a:t>Chipset integrated with processor</a:t>
+                      </a:r>
+                    </a:p>
+                  </a:txBody>
+                  <a:tcPr/>
+                </a:tc>
+                <a:tc>
+                  <a:txBody>
+                    <a:bodyPr/>
+                    <a:lstStyle/>
+                    <a:p>
+                      <a:r>
+                        <a:rPr sz="900" b="0">
+                          <a:solidFill>
+                            <a:srgbClr val="222222"/>
+                          </a:solidFill>
+                          <a:latin typeface="Calibri"/>
+                        </a:rPr>
+                        <a:t>Chipset integrated with processor</a:t>
+                      </a:r>
+                    </a:p>
+                  </a:txBody>
+                  <a:tcPr/>
+                </a:tc>
+                <a:tc>
+                  <a:txBody>
+                    <a:bodyPr/>
+                    <a:lstStyle/>
+                    <a:p>
+                      <a:r>
+                        <a:rPr sz="900" b="0">
+                          <a:solidFill>
+                            <a:srgbClr val="222222"/>
+                          </a:solidFill>
+                          <a:latin typeface="Calibri"/>
+                        </a:rPr>
+                        <a:t>AMD's latest technology</a:t>
+                      </a:r>
+                    </a:p>
+                  </a:txBody>
+                  <a:tcPr/>
+                </a:tc>
+              </a:tr>
+              <a:tr h="493776">
+                <a:tc>
+                  <a:txBody>
+                    <a:bodyPr/>
+                    <a:lstStyle/>
+                    <a:p>
+                      <a:r>
+                        <a:rPr sz="1000" b="1">
+                          <a:solidFill>
+                            <a:srgbClr val="222222"/>
+                          </a:solidFill>
+                          <a:latin typeface="Calibri"/>
+                        </a:rPr>
+                        <a:t>Display</a:t>
+                      </a:r>
+                    </a:p>
+                  </a:txBody>
+                  <a:tcPr/>
+                </a:tc>
+                <a:tc>
+                  <a:txBody>
+                    <a:bodyPr/>
+                    <a:lstStyle/>
+                    <a:p>
+                      <a:r>
+                        <a:rPr sz="900" b="0">
+                          <a:solidFill>
+                            <a:srgbClr val="222222"/>
+                          </a:solidFill>
+                          <a:latin typeface="Calibri"/>
+                        </a:rPr>
+                        <a:t>35.6 cm diagonal</a:t>
+                      </a:r>
+                    </a:p>
+                  </a:txBody>
+                  <a:tcPr/>
+                </a:tc>
+                <a:tc>
+                  <a:txBody>
+                    <a:bodyPr/>
+                    <a:lstStyle/>
+                    <a:p>
+                      <a:r>
+                        <a:rPr sz="900" b="0">
+                          <a:solidFill>
+                            <a:srgbClr val="222222"/>
+                          </a:solidFill>
+                          <a:latin typeface="Calibri"/>
+                        </a:rPr>
+                        <a:t>39.6 cm diagonal</a:t>
+                      </a:r>
+                    </a:p>
+                  </a:txBody>
+                  <a:tcPr/>
+                </a:tc>
+                <a:tc>
+                  <a:txBody>
+                    <a:bodyPr/>
+                    <a:lstStyle/>
+                    <a:p>
+                      <a:r>
+                        <a:rPr sz="900" b="0">
+                          <a:solidFill>
+                            <a:srgbClr val="222222"/>
+                          </a:solidFill>
+                          <a:latin typeface="Calibri"/>
+                        </a:rPr>
+                        <a:t>39.6 cm (15.6")</a:t>
+                      </a:r>
+                    </a:p>
+                  </a:txBody>
+                  <a:tcPr/>
+                </a:tc>
+                <a:tc>
+                  <a:txBody>
+                    <a:bodyPr/>
+                    <a:lstStyle/>
+                    <a:p>
+                      <a:r>
+                        <a:rPr sz="900" b="0">
+                          <a:solidFill>
+                            <a:srgbClr val="222222"/>
+                          </a:solidFill>
+                          <a:latin typeface="Calibri"/>
+                        </a:rPr>
+                        <a:t>35.6 cm (14")</a:t>
+                      </a:r>
+                    </a:p>
+                  </a:txBody>
+                  <a:tcPr/>
+                </a:tc>
+                <a:tc>
+                  <a:txBody>
+                    <a:bodyPr/>
+                    <a:lstStyle/>
+                    <a:p>
+                      <a:r>
+                        <a:rPr sz="900" b="0">
+                          <a:solidFill>
+                            <a:srgbClr val="222222"/>
+                          </a:solidFill>
+                          <a:latin typeface="Calibri"/>
+                        </a:rPr>
+                        <a:t>39.6 cm diagonal</a:t>
+                      </a:r>
+                    </a:p>
+                  </a:txBody>
+                  <a:tcPr/>
+                </a:tc>
+              </a:tr>
+              <a:tr h="493776">
+                <a:tc>
+                  <a:txBody>
+                    <a:bodyPr/>
+                    <a:lstStyle/>
+                    <a:p>
+                      <a:r>
+                        <a:rPr sz="1000" b="1">
+                          <a:solidFill>
+                            <a:srgbClr val="222222"/>
+                          </a:solidFill>
+                          <a:latin typeface="Calibri"/>
+                        </a:rPr>
+                        <a:t>Gpu</a:t>
+                      </a:r>
+                    </a:p>
+                  </a:txBody>
+                  <a:tcPr/>
+                </a:tc>
+                <a:tc>
+                  <a:txBody>
+                    <a:bodyPr/>
+                    <a:lstStyle/>
+                    <a:p>
+                      <a:r>
+                        <a:rPr sz="900" b="0">
+                          <a:solidFill>
+                            <a:srgbClr val="222222"/>
+                          </a:solidFill>
+                          <a:latin typeface="Calibri"/>
+                        </a:rPr>
+                        <a:t>UMA or discrete graphics</a:t>
+                      </a:r>
+                    </a:p>
+                  </a:txBody>
+                  <a:tcPr/>
+                </a:tc>
+                <a:tc>
+                  <a:txBody>
+                    <a:bodyPr/>
+                    <a:lstStyle/>
+                    <a:p>
+                      <a:r>
+                        <a:rPr sz="900" b="0">
+                          <a:solidFill>
+                            <a:srgbClr val="222222"/>
+                          </a:solidFill>
+                          <a:latin typeface="Calibri"/>
+                        </a:rPr>
+                        <a:t>UMA or discrete graphics</a:t>
+                      </a:r>
+                    </a:p>
+                  </a:txBody>
+                  <a:tcPr/>
+                </a:tc>
+                <a:tc>
+                  <a:txBody>
+                    <a:bodyPr/>
+                    <a:lstStyle/>
+                    <a:p>
+                      <a:r>
+                        <a:rPr sz="900" b="0">
+                          <a:solidFill>
+                            <a:srgbClr val="222222"/>
+                          </a:solidFill>
+                          <a:latin typeface="Calibri"/>
+                        </a:rPr>
                         <a:t>N/A</a:t>
                       </a:r>
                     </a:p>
@@ -6294,14 +7262,14 @@
                           </a:solidFill>
                           <a:latin typeface="Calibri"/>
                         </a:rPr>
-                        <a:t>AMD's latest technology</a:t>
+                        <a:t>UMA graphics</a:t>
                       </a:r>
                     </a:p>
                   </a:txBody>
                   <a:tcPr/>
                 </a:tc>
               </a:tr>
-              <a:tr h="548640">
+              <a:tr h="493776">
                 <a:tc>
                   <a:txBody>
                     <a:bodyPr/>
@@ -6314,7 +7282,7 @@
                           </a:solidFill>
                           <a:latin typeface="Calibri"/>
                         </a:rPr>
-                        <a:t>Display</a:t>
+                        <a:t>Os</a:t>
                       </a:r>
                     </a:p>
                   </a:txBody>
@@ -6332,7 +7300,7 @@
                           </a:solidFill>
                           <a:latin typeface="Calibri"/>
                         </a:rPr>
-                        <a:t>35.6 cm diagonal</a:t>
+                        <a:t>Windows 8 Pro</a:t>
                       </a:r>
                     </a:p>
                   </a:txBody>
@@ -6350,7 +7318,7 @@
                           </a:solidFill>
                           <a:latin typeface="Calibri"/>
                         </a:rPr>
-                        <a:t>39.6 cm diagonal</a:t>
+                        <a:t>Windows 8 Pro</a:t>
                       </a:r>
                     </a:p>
                   </a:txBody>
@@ -6368,7 +7336,7 @@
                           </a:solidFill>
                           <a:latin typeface="Calibri"/>
                         </a:rPr>
-                        <a:t>39.6 cm (15.6")</a:t>
+                        <a:t>Windows 8 Pro or other operating systems available</a:t>
                       </a:r>
                     </a:p>
                   </a:txBody>
@@ -6386,7 +7354,7 @@
                           </a:solidFill>
                           <a:latin typeface="Calibri"/>
                         </a:rPr>
-                        <a:t>35.6 cm (14")</a:t>
+                        <a:t>Windows 8 Pro or other operating systems available</a:t>
                       </a:r>
                     </a:p>
                   </a:txBody>
@@ -6404,14 +7372,14 @@
                           </a:solidFill>
                           <a:latin typeface="Calibri"/>
                         </a:rPr>
-                        <a:t>35.6 cm diagonal</a:t>
+                        <a:t>Windows 8 Pro</a:t>
                       </a:r>
                     </a:p>
                   </a:txBody>
                   <a:tcPr/>
                 </a:tc>
               </a:tr>
-              <a:tr h="548640">
+              <a:tr h="493776">
                 <a:tc>
                   <a:txBody>
                     <a:bodyPr/>
@@ -6424,7 +7392,7 @@
                           </a:solidFill>
                           <a:latin typeface="Calibri"/>
                         </a:rPr>
-                        <a:t>Gpu</a:t>
+                        <a:t>Ports</a:t>
                       </a:r>
                     </a:p>
                   </a:txBody>
@@ -6442,7 +7410,7 @@
                           </a:solidFill>
                           <a:latin typeface="Calibri"/>
                         </a:rPr>
-                        <a:t>UMA or discrete graphics</a:t>
+                        <a:t>1 ExpressCard/54; 1 Secure Digital; 2 USB 3.0; 2 USB 2.0; 1 stereo microphone in; 1 stereo headphone/line-out; 1 1394a; 1 AC power; 1 RJ-45; 1 docking connector; 1 secondary battery connector; 1 VGA; 1 serial; 1 RJ-11 (optional)</a:t>
                       </a:r>
                     </a:p>
                   </a:txBody>
@@ -6460,7 +7428,7 @@
                           </a:solidFill>
                           <a:latin typeface="Calibri"/>
                         </a:rPr>
-                        <a:t>UMA or discrete graphics</a:t>
+                        <a:t>1 ExpressCard/54; 1 Secure Digital; 2 USB 3.0; 2 USB 2.0; 1 stereo microphone in; 1 stereo headphone/line-out; 1 1394a; 1 AC power; 1 RJ-45; 1 docking connector; 1 secondary battery connector; 1 VGA; 1 serial; 1 RJ-11 (optional)</a:t>
                       </a:r>
                     </a:p>
                   </a:txBody>
@@ -6478,6 +7446,190 @@
                           </a:solidFill>
                           <a:latin typeface="Calibri"/>
                         </a:rPr>
+                        <a:t>1 Media Card Reader; 3 USB 3.0; 1 USB 3.0 charging; 1 DisplayPort 1.2; 1 VGA; 1 combo stereo headphone/mic jack; 1 AC power; 1 RJ-45; 1 docking connector; 1 secondary battery connector</a:t>
+                      </a:r>
+                    </a:p>
+                  </a:txBody>
+                  <a:tcPr/>
+                </a:tc>
+                <a:tc>
+                  <a:txBody>
+                    <a:bodyPr/>
+                    <a:lstStyle/>
+                    <a:p>
+                      <a:r>
+                        <a:rPr sz="900" b="0">
+                          <a:solidFill>
+                            <a:srgbClr val="222222"/>
+                          </a:solidFill>
+                          <a:latin typeface="Calibri"/>
+                        </a:rPr>
+                        <a:t>1 Media Card Reader; 3 USB 3.0; 1 USB 3.0 charging; 1 DisplayPort 1.2; 1 VGA; 1 combo stereo headphone/mic jack; 1 AC power; 1 RJ-45; 1 side docking connector</a:t>
+                      </a:r>
+                    </a:p>
+                  </a:txBody>
+                  <a:tcPr/>
+                </a:tc>
+                <a:tc>
+                  <a:txBody>
+                    <a:bodyPr/>
+                    <a:lstStyle/>
+                    <a:p>
+                      <a:r>
+                        <a:rPr sz="900" b="0">
+                          <a:solidFill>
+                            <a:srgbClr val="222222"/>
+                          </a:solidFill>
+                          <a:latin typeface="Calibri"/>
+                        </a:rPr>
+                        <a:t>1 ExpressCard/54; 1 Secure Digital; 2 USB 3.0; 2 USB 2.0; 1 stereo microphone in; 1 stereo headphone/line-out; 1 1394a; 1 AC power; 1 RJ-45; 1 docking connector; 1 secondary battery connector; 1 VGA; 1 serial; 1 RJ-11 (optional)</a:t>
+                      </a:r>
+                    </a:p>
+                  </a:txBody>
+                  <a:tcPr/>
+                </a:tc>
+              </a:tr>
+              <a:tr h="493776">
+                <a:tc>
+                  <a:txBody>
+                    <a:bodyPr/>
+                    <a:lstStyle/>
+                    <a:p>
+                      <a:r>
+                        <a:rPr sz="1000" b="1">
+                          <a:solidFill>
+                            <a:srgbClr val="222222"/>
+                          </a:solidFill>
+                          <a:latin typeface="Calibri"/>
+                        </a:rPr>
+                        <a:t>Ram</a:t>
+                      </a:r>
+                    </a:p>
+                  </a:txBody>
+                  <a:tcPr/>
+                </a:tc>
+                <a:tc>
+                  <a:txBody>
+                    <a:bodyPr/>
+                    <a:lstStyle/>
+                    <a:p>
+                      <a:r>
+                        <a:rPr sz="900" b="0">
+                          <a:solidFill>
+                            <a:srgbClr val="222222"/>
+                          </a:solidFill>
+                          <a:latin typeface="Calibri"/>
+                        </a:rPr>
+                        <a:t>Upgradeable to 16 GB</a:t>
+                      </a:r>
+                    </a:p>
+                  </a:txBody>
+                  <a:tcPr/>
+                </a:tc>
+                <a:tc>
+                  <a:txBody>
+                    <a:bodyPr/>
+                    <a:lstStyle/>
+                    <a:p>
+                      <a:r>
+                        <a:rPr sz="900" b="0">
+                          <a:solidFill>
+                            <a:srgbClr val="222222"/>
+                          </a:solidFill>
+                          <a:latin typeface="Calibri"/>
+                        </a:rPr>
+                        <a:t>Upgradeable to 16 GB</a:t>
+                      </a:r>
+                    </a:p>
+                  </a:txBody>
+                  <a:tcPr/>
+                </a:tc>
+                <a:tc>
+                  <a:txBody>
+                    <a:bodyPr/>
+                    <a:lstStyle/>
+                    <a:p>
+                      <a:r>
+                        <a:rPr sz="900" b="0">
+                          <a:solidFill>
+                            <a:srgbClr val="222222"/>
+                          </a:solidFill>
+                          <a:latin typeface="Calibri"/>
+                        </a:rPr>
+                        <a:t>Upgradeable to 16 GB</a:t>
+                      </a:r>
+                    </a:p>
+                  </a:txBody>
+                  <a:tcPr/>
+                </a:tc>
+                <a:tc>
+                  <a:txBody>
+                    <a:bodyPr/>
+                    <a:lstStyle/>
+                    <a:p>
+                      <a:r>
+                        <a:rPr sz="900" b="0">
+                          <a:solidFill>
+                            <a:srgbClr val="222222"/>
+                          </a:solidFill>
+                          <a:latin typeface="Calibri"/>
+                        </a:rPr>
+                        <a:t>Upgradeable to 16 GB</a:t>
+                      </a:r>
+                    </a:p>
+                  </a:txBody>
+                  <a:tcPr/>
+                </a:tc>
+                <a:tc>
+                  <a:txBody>
+                    <a:bodyPr/>
+                    <a:lstStyle/>
+                    <a:p>
+                      <a:r>
+                        <a:rPr sz="900" b="0">
+                          <a:solidFill>
+                            <a:srgbClr val="222222"/>
+                          </a:solidFill>
+                          <a:latin typeface="Calibri"/>
+                        </a:rPr>
+                        <a:t>Upgradeable to 16 GB</a:t>
+                      </a:r>
+                    </a:p>
+                  </a:txBody>
+                  <a:tcPr/>
+                </a:tc>
+              </a:tr>
+              <a:tr h="493776">
+                <a:tc>
+                  <a:txBody>
+                    <a:bodyPr/>
+                    <a:lstStyle/>
+                    <a:p>
+                      <a:r>
+                        <a:rPr sz="1000" b="1">
+                          <a:solidFill>
+                            <a:srgbClr val="222222"/>
+                          </a:solidFill>
+                          <a:latin typeface="Calibri"/>
+                        </a:rPr>
+                        <a:t>Storage</a:t>
+                      </a:r>
+                    </a:p>
+                  </a:txBody>
+                  <a:tcPr/>
+                </a:tc>
+                <a:tc>
+                  <a:txBody>
+                    <a:bodyPr/>
+                    <a:lstStyle/>
+                    <a:p>
+                      <a:r>
+                        <a:rPr sz="900" b="0">
+                          <a:solidFill>
+                            <a:srgbClr val="222222"/>
+                          </a:solidFill>
+                          <a:latin typeface="Calibri"/>
+                        </a:rPr>
                         <a:t>N/A</a:t>
                       </a:r>
                     </a:p>
@@ -6514,14 +7666,50 @@
                           </a:solidFill>
                           <a:latin typeface="Calibri"/>
                         </a:rPr>
-                        <a:t>UMA graphics</a:t>
+                        <a:t>N/A</a:t>
+                      </a:r>
+                    </a:p>
+                  </a:txBody>
+                  <a:tcPr/>
+                </a:tc>
+                <a:tc>
+                  <a:txBody>
+                    <a:bodyPr/>
+                    <a:lstStyle/>
+                    <a:p>
+                      <a:r>
+                        <a:rPr sz="900" b="0">
+                          <a:solidFill>
+                            <a:srgbClr val="222222"/>
+                          </a:solidFill>
+                          <a:latin typeface="Calibri"/>
+                        </a:rPr>
+                        <a:t>N/A</a:t>
+                      </a:r>
+                    </a:p>
+                  </a:txBody>
+                  <a:tcPr/>
+                </a:tc>
+                <a:tc>
+                  <a:txBody>
+                    <a:bodyPr/>
+                    <a:lstStyle/>
+                    <a:p>
+                      <a:r>
+                        <a:rPr sz="900" b="0">
+                          <a:solidFill>
+                            <a:srgbClr val="222222"/>
+                          </a:solidFill>
+                          <a:latin typeface="Calibri"/>
+                        </a:rPr>
+                        <a:t>HP 3D DriveGuard</a:t>
                       </a:r>
                     </a:p>
                   </a:txBody>
                   <a:tcPr/>
                 </a:tc>
               </a:tr>
-              <a:tr h="548640">
+              <a:tr h="493776">
                 <a:tc>
                   <a:txBody>
                     <a:bodyPr/>
@@ -6534,7 +7722,7 @@
                           </a:solidFill>
                           <a:latin typeface="Calibri"/>
                         </a:rPr>
-                        <a:t>Os</a:t>
+                        <a:t>Weight</a:t>
                       </a:r>
                     </a:p>
                   </a:txBody>
@@ -6552,7 +7740,7 @@
                           </a:solidFill>
                           <a:latin typeface="Calibri"/>
                         </a:rPr>
-                        <a:t>Windows 8 Pro</a:t>
+                        <a:t>Starting at 2.0 kg</a:t>
                       </a:r>
                     </a:p>
                   </a:txBody>
@@ -6570,7 +7758,7 @@
                           </a:solidFill>
                           <a:latin typeface="Calibri"/>
                         </a:rPr>
-                        <a:t>Windows 8 Pro</a:t>
+                        <a:t>Starting at 2.32 kg</a:t>
                       </a:r>
                     </a:p>
                   </a:txBody>
@@ -6588,7 +7776,7 @@
                           </a:solidFill>
                           <a:latin typeface="Calibri"/>
                         </a:rPr>
-                        <a:t>Windows 8 Pro or other operating systems available</a:t>
+                        <a:t>Starting at 1.88 kg</a:t>
                       </a:r>
                     </a:p>
                   </a:txBody>
@@ -6606,7 +7794,7 @@
                           </a:solidFill>
                           <a:latin typeface="Calibri"/>
                         </a:rPr>
-                        <a:t>Windows 8 Pro or other operating systems available</a:t>
+                        <a:t>Starting at 1.58 kg</a:t>
                       </a:r>
                     </a:p>
                   </a:txBody>
@@ -6624,337 +7812,7 @@
                           </a:solidFill>
                           <a:latin typeface="Calibri"/>
                         </a:rPr>
-                        <a:t>Windows 8 Pro</a:t>
-                      </a:r>
-                    </a:p>
-                  </a:txBody>
-                  <a:tcPr/>
-                </a:tc>
-              </a:tr>
-              <a:tr h="548640">
-                <a:tc>
-                  <a:txBody>
-                    <a:bodyPr/>
-                    <a:lstStyle/>
-                    <a:p>
-                      <a:r>
-                        <a:rPr sz="1000" b="1">
-                          <a:solidFill>
-                            <a:srgbClr val="222222"/>
-                          </a:solidFill>
-                          <a:latin typeface="Calibri"/>
-                        </a:rPr>
-                        <a:t>Ports</a:t>
-                      </a:r>
-                    </a:p>
-                  </a:txBody>
-                  <a:tcPr/>
-                </a:tc>
-                <a:tc>
-                  <a:txBody>
-                    <a:bodyPr/>
-                    <a:lstStyle/>
-                    <a:p>
-                      <a:r>
-                        <a:rPr sz="900" b="0">
-                          <a:solidFill>
-                            <a:srgbClr val="222222"/>
-                          </a:solidFill>
-                          <a:latin typeface="Calibri"/>
-                        </a:rPr>
-                        <a:t>1 ExpressCard/54; 1 Secure Digital; 2 USB 3.0; 2 USB 2.0; 1 stereo microphone in; 1 stereo headphone/line-out; 1 1394a; 1 AC power; 1 RJ-45; 1 docking connector; 1 secondary battery connector; 1 VGA; 1 serial; 1 RJ-11 (optional)</a:t>
-                      </a:r>
-                    </a:p>
-                  </a:txBody>
-                  <a:tcPr/>
-                </a:tc>
-                <a:tc>
-                  <a:txBody>
-                    <a:bodyPr/>
-                    <a:lstStyle/>
-                    <a:p>
-                      <a:r>
-                        <a:rPr sz="900" b="0">
-                          <a:solidFill>
-                            <a:srgbClr val="222222"/>
-                          </a:solidFill>
-                          <a:latin typeface="Calibri"/>
-                        </a:rPr>
-                        <a:t>1 ExpressCard/54; 1 Secure Digital; 2 USB 3.0; 2 USB 2.0; 1 stereo microphone in; 1 stereo headphone/line-out; 1 1394a; 1 AC power; 1 RJ-45; 1 docking connector; 1 secondary battery connector; 1 VGA; 1 serial; 1 RJ-11 (optional)</a:t>
-                      </a:r>
-                    </a:p>
-                  </a:txBody>
-                  <a:tcPr/>
-                </a:tc>
-                <a:tc>
-                  <a:txBody>
-                    <a:bodyPr/>
-                    <a:lstStyle/>
-                    <a:p>
-                      <a:r>
-                        <a:rPr sz="900" b="0">
-                          <a:solidFill>
-                            <a:srgbClr val="222222"/>
-                          </a:solidFill>
-                          <a:latin typeface="Calibri"/>
-                        </a:rPr>
-                        <a:t>1 Media Card Reader; 3 USB 3.0; 1 USB 3.0 charging; 1 DisplayPort 1.2; 1 VGA; 1 combo stereo headphone/mic jack; 1 AC power; 1 RJ-45; 1 docking connector; 1 secondary battery connector</a:t>
-                      </a:r>
-                    </a:p>
-                  </a:txBody>
-                  <a:tcPr/>
-                </a:tc>
-                <a:tc>
-                  <a:txBody>
-                    <a:bodyPr/>
-                    <a:lstStyle/>
-                    <a:p>
-                      <a:r>
-                        <a:rPr sz="900" b="0">
-                          <a:solidFill>
-                            <a:srgbClr val="222222"/>
-                          </a:solidFill>
-                          <a:latin typeface="Calibri"/>
-                        </a:rPr>
-                        <a:t>1 Media Card Reader; 3 USB 3.0; 1 USB 3.0 charging; 1 DisplayPort 1.2; 1 VGA; 1 combo stereo headphone/mic jack; 1 AC power; 1 RJ-45; 1 side docking connector</a:t>
-                      </a:r>
-                    </a:p>
-                  </a:txBody>
-                  <a:tcPr/>
-                </a:tc>
-                <a:tc>
-                  <a:txBody>
-                    <a:bodyPr/>
-                    <a:lstStyle/>
-                    <a:p>
-                      <a:r>
-                        <a:rPr sz="900" b="0">
-                          <a:solidFill>
-                            <a:srgbClr val="222222"/>
-                          </a:solidFill>
-                          <a:latin typeface="Calibri"/>
-                        </a:rPr>
-                        <a:t>1 ExpressCard/54; 1 Secure Digital; 2 USB 3.0; 2 USB 2.0; 1 stereo microphone in; 1 stereo headphone/line-out; 1 1394a; 1 AC power; 1 RJ-45; 1 docking connector; 1 secondary battery connector; 1 VGA; 1 serial; 1 RJ-11 (optional)</a:t>
-                      </a:r>
-                    </a:p>
-                  </a:txBody>
-                  <a:tcPr/>
-                </a:tc>
-              </a:tr>
-              <a:tr h="548640">
-                <a:tc>
-                  <a:txBody>
-                    <a:bodyPr/>
-                    <a:lstStyle/>
-                    <a:p>
-                      <a:r>
-                        <a:rPr sz="1000" b="1">
-                          <a:solidFill>
-                            <a:srgbClr val="222222"/>
-                          </a:solidFill>
-                          <a:latin typeface="Calibri"/>
-                        </a:rPr>
-                        <a:t>Ram</a:t>
-                      </a:r>
-                    </a:p>
-                  </a:txBody>
-                  <a:tcPr/>
-                </a:tc>
-                <a:tc>
-                  <a:txBody>
-                    <a:bodyPr/>
-                    <a:lstStyle/>
-                    <a:p>
-                      <a:r>
-                        <a:rPr sz="900" b="0">
-                          <a:solidFill>
-                            <a:srgbClr val="222222"/>
-                          </a:solidFill>
-                          <a:latin typeface="Calibri"/>
-                        </a:rPr>
-                        <a:t>Upgradeable to 16 GB</a:t>
-                      </a:r>
-                    </a:p>
-                  </a:txBody>
-                  <a:tcPr/>
-                </a:tc>
-                <a:tc>
-                  <a:txBody>
-                    <a:bodyPr/>
-                    <a:lstStyle/>
-                    <a:p>
-                      <a:r>
-                        <a:rPr sz="900" b="0">
-                          <a:solidFill>
-                            <a:srgbClr val="222222"/>
-                          </a:solidFill>
-                          <a:latin typeface="Calibri"/>
-                        </a:rPr>
-                        <a:t>Upgradeable to 16 GB</a:t>
-                      </a:r>
-                    </a:p>
-                  </a:txBody>
-                  <a:tcPr/>
-                </a:tc>
-                <a:tc>
-                  <a:txBody>
-                    <a:bodyPr/>
-                    <a:lstStyle/>
-                    <a:p>
-                      <a:r>
-                        <a:rPr sz="900" b="0">
-                          <a:solidFill>
-                            <a:srgbClr val="222222"/>
-                          </a:solidFill>
-                          <a:latin typeface="Calibri"/>
-                        </a:rPr>
-                        <a:t>Upgradeable to 16 GB</a:t>
-                      </a:r>
-                    </a:p>
-                  </a:txBody>
-                  <a:tcPr/>
-                </a:tc>
-                <a:tc>
-                  <a:txBody>
-                    <a:bodyPr/>
-                    <a:lstStyle/>
-                    <a:p>
-                      <a:r>
-                        <a:rPr sz="900" b="0">
-                          <a:solidFill>
-                            <a:srgbClr val="222222"/>
-                          </a:solidFill>
-                          <a:latin typeface="Calibri"/>
-                        </a:rPr>
-                        <a:t>Upgradeable to 16 GB</a:t>
-                      </a:r>
-                    </a:p>
-                  </a:txBody>
-                  <a:tcPr/>
-                </a:tc>
-                <a:tc>
-                  <a:txBody>
-                    <a:bodyPr/>
-                    <a:lstStyle/>
-                    <a:p>
-                      <a:r>
-                        <a:rPr sz="900" b="0">
-                          <a:solidFill>
-                            <a:srgbClr val="222222"/>
-                          </a:solidFill>
-                          <a:latin typeface="Calibri"/>
-                        </a:rPr>
-                        <a:t>Upgradeable to 16 GB</a:t>
-                      </a:r>
-                    </a:p>
-                  </a:txBody>
-                  <a:tcPr/>
-                </a:tc>
-              </a:tr>
-              <a:tr h="548640">
-                <a:tc>
-                  <a:txBody>
-                    <a:bodyPr/>
-                    <a:lstStyle/>
-                    <a:p>
-                      <a:r>
-                        <a:rPr sz="1000" b="1">
-                          <a:solidFill>
-                            <a:srgbClr val="222222"/>
-                          </a:solidFill>
-                          <a:latin typeface="Calibri"/>
-                        </a:rPr>
-                        <a:t>Weight</a:t>
-                      </a:r>
-                    </a:p>
-                  </a:txBody>
-                  <a:tcPr/>
-                </a:tc>
-                <a:tc>
-                  <a:txBody>
-                    <a:bodyPr/>
-                    <a:lstStyle/>
-                    <a:p>
-                      <a:r>
-                        <a:rPr sz="900" b="0">
-                          <a:solidFill>
-                            <a:srgbClr val="222222"/>
-                          </a:solidFill>
-                          <a:latin typeface="Calibri"/>
-                        </a:rPr>
-                        <a:t>Starting at 2.0 kg</a:t>
-                      </a:r>
-                    </a:p>
-                  </a:txBody>
-                  <a:tcPr/>
-                </a:tc>
-                <a:tc>
-                  <a:txBody>
-                    <a:bodyPr/>
-                    <a:lstStyle/>
-                    <a:p>
-                      <a:r>
-                        <a:rPr sz="900" b="0">
-                          <a:solidFill>
-                            <a:srgbClr val="222222"/>
-                          </a:solidFill>
-                          <a:latin typeface="Calibri"/>
-                        </a:rPr>
                         <a:t>Starting at 2.32 kg</a:t>
-                      </a:r>
-                    </a:p>
-                  </a:txBody>
-                  <a:tcPr/>
-                </a:tc>
-                <a:tc>
-                  <a:txBody>
-                    <a:bodyPr/>
-                    <a:lstStyle/>
-                    <a:p>
-                      <a:r>
-                        <a:rPr sz="900" b="0">
-                          <a:solidFill>
-                            <a:srgbClr val="222222"/>
-                          </a:solidFill>
-                          <a:latin typeface="Calibri"/>
-                        </a:rPr>
-                        <a:t>Starting at 1.88 kg</a:t>
-                      </a:r>
-                    </a:p>
-                  </a:txBody>
-                  <a:tcPr/>
-                </a:tc>
-                <a:tc>
-                  <a:txBody>
-                    <a:bodyPr/>
-                    <a:lstStyle/>
-                    <a:p>
-                      <a:r>
-                        <a:rPr sz="900" b="0">
-                          <a:solidFill>
-                            <a:srgbClr val="222222"/>
-                          </a:solidFill>
-                          <a:latin typeface="Calibri"/>
-                        </a:rPr>
-                        <a:t>Starting at 1.58 kg</a:t>
-                      </a:r>
-                    </a:p>
-                  </a:txBody>
-                  <a:tcPr/>
-                </a:tc>
-                <a:tc>
-                  <a:txBody>
-                    <a:bodyPr/>
-                    <a:lstStyle/>
-                    <a:p>
-                      <a:r>
-                        <a:rPr sz="900" b="0">
-                          <a:solidFill>
-                            <a:srgbClr val="222222"/>
-                          </a:solidFill>
-                          <a:latin typeface="Calibri"/>
-                        </a:rPr>
-                        <a:t>Starting at 2.0 kg</a:t>
                       </a:r>
                     </a:p>
                   </a:txBody>
@@ -7026,8 +7884,8 @@
         </p:nvSpPr>
         <p:spPr>
           <a:xfrm>
-            <a:off x="548640" y="457200"/>
-            <a:ext cx="8229600" cy="640080"/>
+            <a:off x="457200" y="182880"/>
+            <a:ext cx="8229600" cy="548640"/>
           </a:xfrm>
           <a:prstGeom prst="rect">
             <a:avLst/>
@@ -7040,14 +7898,11 @@
           </a:bodyPr>
           <a:lstStyle/>
           <a:p>
-            <a:r>
-              <a:rPr sz="2200" b="1">
-                <a:solidFill>
-                  <a:srgbClr val="004279"/>
-                </a:solidFill>
-                <a:latin typeface="Calibri"/>
-              </a:rPr>
-              <a:t>Upsell Options</a:t>
+            <a:pPr>
+              <a:defRPr sz="2800" b="1"/>
+            </a:pPr>
+            <a:r>
+              <a:t>Upsell Recommendations — Page 1</a:t>
             </a:r>
           </a:p>
         </p:txBody>
@@ -7060,8 +7915,8 @@
         </p:nvSpPr>
         <p:spPr>
           <a:xfrm>
-            <a:off x="548640" y="1188720"/>
-            <a:ext cx="7772400" cy="4937760"/>
+            <a:off x="457200" y="1097280"/>
+            <a:ext cx="2743200" cy="365760"/>
           </a:xfrm>
           <a:prstGeom prst="rect">
             <a:avLst/>
@@ -7069,89 +7924,58 @@
           <a:noFill/>
         </p:spPr>
         <p:txBody>
-          <a:bodyPr wrap="none">
+          <a:bodyPr wrap="square">
             <a:spAutoFit/>
           </a:bodyPr>
           <a:lstStyle/>
-          <a:p/>
-          <a:p>
-            <a:r>
-              <a:rPr sz="1400" b="0">
+          <a:p>
+            <a:pPr algn="ctr">
+              <a:defRPr sz="2200" b="1">
                 <a:solidFill>
-                  <a:srgbClr val="222222"/>
+                  <a:srgbClr val="000000"/>
                 </a:solidFill>
-                <a:latin typeface="Calibri"/>
-              </a:rPr>
-              <a:t>• G — N/A</a:t>
-            </a:r>
-          </a:p>
-          <a:p>
-            <a:r>
-              <a:rPr sz="1400" b="0">
-                <a:solidFill>
-                  <a:srgbClr val="222222"/>
-                </a:solidFill>
-                <a:latin typeface="Calibri"/>
-              </a:rPr>
-              <a:t>• i — N/A</a:t>
-            </a:r>
-          </a:p>
-          <a:p>
-            <a:r>
-              <a:rPr sz="1400" b="0">
-                <a:solidFill>
-                  <a:srgbClr val="222222"/>
-                </a:solidFill>
-                <a:latin typeface="Calibri"/>
-              </a:rPr>
-              <a:t>• v — N/A</a:t>
-            </a:r>
-          </a:p>
-          <a:p>
-            <a:r>
-              <a:rPr sz="1400" b="0">
-                <a:solidFill>
-                  <a:srgbClr val="222222"/>
-                </a:solidFill>
-                <a:latin typeface="Calibri"/>
-              </a:rPr>
-              <a:t>• e — N/A</a:t>
-            </a:r>
-          </a:p>
-          <a:p>
-            <a:r>
-              <a:rPr sz="1400" b="0">
-                <a:solidFill>
-                  <a:srgbClr val="222222"/>
-                </a:solidFill>
-                <a:latin typeface="Calibri"/>
-              </a:rPr>
-              <a:t>• n — N/A</a:t>
-            </a:r>
-          </a:p>
-          <a:p>
-            <a:r>
-              <a:rPr sz="1400" b="0">
-                <a:solidFill>
-                  <a:srgbClr val="222222"/>
-                </a:solidFill>
-                <a:latin typeface="Calibri"/>
-              </a:rPr>
-              <a:t>•   — N/A</a:t>
-            </a:r>
-          </a:p>
-        </p:txBody>
-      </p:sp>
-      <p:sp>
-        <p:nvSpPr>
-          <p:cNvPr id="4" name="TextBox 3"/>
+              </a:defRPr>
+            </a:pPr>
+            <a:r>
+              <a:t>Mouse</a:t>
+            </a:r>
+          </a:p>
+        </p:txBody>
+      </p:sp>
+      <p:pic>
+        <p:nvPicPr>
+          <p:cNvPr id="4" name="Picture 3" descr="page_4_img_4.png"/>
+          <p:cNvPicPr>
+            <a:picLocks noChangeAspect="1"/>
+          </p:cNvPicPr>
+          <p:nvPr/>
+        </p:nvPicPr>
+        <p:blipFill>
+          <a:blip r:embed="rId2"/>
+          <a:stretch>
+            <a:fillRect/>
+          </a:stretch>
+        </p:blipFill>
+        <p:spPr>
+          <a:xfrm>
+            <a:off x="1504950" y="1463040"/>
+            <a:ext cx="647700" cy="914400"/>
+          </a:xfrm>
+          <a:prstGeom prst="rect">
+            <a:avLst/>
+          </a:prstGeom>
+        </p:spPr>
+      </p:pic>
+      <p:sp>
+        <p:nvSpPr>
+          <p:cNvPr id="5" name="TextBox 4"/>
           <p:cNvSpPr txBox="1"/>
           <p:nvPr/>
         </p:nvSpPr>
         <p:spPr>
           <a:xfrm>
-            <a:off x="548640" y="6400800"/>
-            <a:ext cx="8229600" cy="365760"/>
+            <a:off x="457200" y="2377440"/>
+            <a:ext cx="2743200" cy="329184"/>
           </a:xfrm>
           <a:prstGeom prst="rect">
             <a:avLst/>
@@ -7159,20 +7983,592 @@
           <a:noFill/>
         </p:spPr>
         <p:txBody>
-          <a:bodyPr wrap="none">
+          <a:bodyPr wrap="square">
             <a:spAutoFit/>
           </a:bodyPr>
           <a:lstStyle/>
           <a:p>
-            <a:pPr algn="l"/>
-            <a:r>
-              <a:rPr sz="900" b="0">
+            <a:pPr algn="ctr">
+              <a:defRPr sz="1400" b="1">
                 <a:solidFill>
-                  <a:srgbClr val="787878"/>
+                  <a:srgbClr val="000000"/>
                 </a:solidFill>
-                <a:latin typeface="Calibri"/>
-              </a:rPr>
-              <a:t>Upsell Suggestions</a:t>
+              </a:defRPr>
+            </a:pPr>
+            <a:r>
+              <a:t>HP X4000b Bluetooth Mouse</a:t>
+            </a:r>
+          </a:p>
+        </p:txBody>
+      </p:sp>
+      <p:sp>
+        <p:nvSpPr>
+          <p:cNvPr id="6" name="TextBox 5"/>
+          <p:cNvSpPr txBox="1"/>
+          <p:nvPr/>
+        </p:nvSpPr>
+        <p:spPr>
+          <a:xfrm>
+            <a:off x="457200" y="2706624"/>
+            <a:ext cx="2743200" cy="585216"/>
+          </a:xfrm>
+          <a:prstGeom prst="rect">
+            <a:avLst/>
+          </a:prstGeom>
+          <a:noFill/>
+        </p:spPr>
+        <p:txBody>
+          <a:bodyPr wrap="square">
+            <a:spAutoFit/>
+          </a:bodyPr>
+          <a:lstStyle/>
+          <a:p>
+            <a:pPr algn="l">
+              <a:defRPr sz="1100" b="0">
+                <a:solidFill>
+                  <a:srgbClr val="000000"/>
+                </a:solidFill>
+              </a:defRPr>
+            </a:pPr>
+            <a:r>
+              <a:t>Be more productive on the go with the sleek, stylish HP X4000b Bluetoo</a:t>
+            </a:r>
+          </a:p>
+        </p:txBody>
+      </p:sp>
+      <p:pic>
+        <p:nvPicPr>
+          <p:cNvPr id="7" name="Picture 6" descr="page_4_img_5.png"/>
+          <p:cNvPicPr>
+            <a:picLocks noChangeAspect="1"/>
+          </p:cNvPicPr>
+          <p:nvPr/>
+        </p:nvPicPr>
+        <p:blipFill>
+          <a:blip r:embed="rId3"/>
+          <a:stretch>
+            <a:fillRect/>
+          </a:stretch>
+        </p:blipFill>
+        <p:spPr>
+          <a:xfrm>
+            <a:off x="1521823" y="3291840"/>
+            <a:ext cx="613954" cy="914400"/>
+          </a:xfrm>
+          <a:prstGeom prst="rect">
+            <a:avLst/>
+          </a:prstGeom>
+        </p:spPr>
+      </p:pic>
+      <p:sp>
+        <p:nvSpPr>
+          <p:cNvPr id="8" name="TextBox 7"/>
+          <p:cNvSpPr txBox="1"/>
+          <p:nvPr/>
+        </p:nvSpPr>
+        <p:spPr>
+          <a:xfrm>
+            <a:off x="457200" y="4206240"/>
+            <a:ext cx="2743200" cy="329184"/>
+          </a:xfrm>
+          <a:prstGeom prst="rect">
+            <a:avLst/>
+          </a:prstGeom>
+          <a:noFill/>
+        </p:spPr>
+        <p:txBody>
+          <a:bodyPr wrap="square">
+            <a:spAutoFit/>
+          </a:bodyPr>
+          <a:lstStyle/>
+          <a:p>
+            <a:pPr algn="ctr">
+              <a:defRPr sz="1400" b="1">
+                <a:solidFill>
+                  <a:srgbClr val="000000"/>
+                </a:solidFill>
+              </a:defRPr>
+            </a:pPr>
+            <a:r>
+              <a:t>HP Bluetooth TTP Mouse</a:t>
+            </a:r>
+          </a:p>
+        </p:txBody>
+      </p:sp>
+      <p:sp>
+        <p:nvSpPr>
+          <p:cNvPr id="9" name="TextBox 8"/>
+          <p:cNvSpPr txBox="1"/>
+          <p:nvPr/>
+        </p:nvSpPr>
+        <p:spPr>
+          <a:xfrm>
+            <a:off x="457200" y="4535424"/>
+            <a:ext cx="2743200" cy="585216"/>
+          </a:xfrm>
+          <a:prstGeom prst="rect">
+            <a:avLst/>
+          </a:prstGeom>
+          <a:noFill/>
+        </p:spPr>
+        <p:txBody>
+          <a:bodyPr wrap="square">
+            <a:spAutoFit/>
+          </a:bodyPr>
+          <a:lstStyle/>
+          <a:p>
+            <a:pPr algn="l">
+              <a:defRPr sz="1100" b="0">
+                <a:solidFill>
+                  <a:srgbClr val="000000"/>
+                </a:solidFill>
+              </a:defRPr>
+            </a:pPr>
+          </a:p>
+        </p:txBody>
+      </p:sp>
+      <p:pic>
+        <p:nvPicPr>
+          <p:cNvPr id="10" name="Picture 9" descr="page_27_img_17.png"/>
+          <p:cNvPicPr>
+            <a:picLocks noChangeAspect="1"/>
+          </p:cNvPicPr>
+          <p:nvPr/>
+        </p:nvPicPr>
+        <p:blipFill>
+          <a:blip r:embed="rId4"/>
+          <a:stretch>
+            <a:fillRect/>
+          </a:stretch>
+        </p:blipFill>
+        <p:spPr>
+          <a:xfrm>
+            <a:off x="1423115" y="5120640"/>
+            <a:ext cx="811369" cy="914400"/>
+          </a:xfrm>
+          <a:prstGeom prst="rect">
+            <a:avLst/>
+          </a:prstGeom>
+        </p:spPr>
+      </p:pic>
+      <p:sp>
+        <p:nvSpPr>
+          <p:cNvPr id="11" name="TextBox 10"/>
+          <p:cNvSpPr txBox="1"/>
+          <p:nvPr/>
+        </p:nvSpPr>
+        <p:spPr>
+          <a:xfrm>
+            <a:off x="457200" y="6035040"/>
+            <a:ext cx="2743200" cy="329184"/>
+          </a:xfrm>
+          <a:prstGeom prst="rect">
+            <a:avLst/>
+          </a:prstGeom>
+          <a:noFill/>
+        </p:spPr>
+        <p:txBody>
+          <a:bodyPr wrap="square">
+            <a:spAutoFit/>
+          </a:bodyPr>
+          <a:lstStyle/>
+          <a:p>
+            <a:pPr algn="ctr">
+              <a:defRPr sz="1400" b="1">
+                <a:solidFill>
+                  <a:srgbClr val="000000"/>
+                </a:solidFill>
+              </a:defRPr>
+            </a:pPr>
+            <a:r>
+              <a:t>HP Comfort Grip Wireless Mouse</a:t>
+            </a:r>
+          </a:p>
+        </p:txBody>
+      </p:sp>
+      <p:sp>
+        <p:nvSpPr>
+          <p:cNvPr id="12" name="TextBox 11"/>
+          <p:cNvSpPr txBox="1"/>
+          <p:nvPr/>
+        </p:nvSpPr>
+        <p:spPr>
+          <a:xfrm>
+            <a:off x="457200" y="6364224"/>
+            <a:ext cx="2743200" cy="585216"/>
+          </a:xfrm>
+          <a:prstGeom prst="rect">
+            <a:avLst/>
+          </a:prstGeom>
+          <a:noFill/>
+        </p:spPr>
+        <p:txBody>
+          <a:bodyPr wrap="square">
+            <a:spAutoFit/>
+          </a:bodyPr>
+          <a:lstStyle/>
+          <a:p>
+            <a:pPr algn="l">
+              <a:defRPr sz="1100" b="0">
+                <a:solidFill>
+                  <a:srgbClr val="000000"/>
+                </a:solidFill>
+              </a:defRPr>
+            </a:pPr>
+            <a:r>
+              <a:t>The HP Comfort Grip Wireless Mouse features a 30-month battery life de</a:t>
+            </a:r>
+          </a:p>
+        </p:txBody>
+      </p:sp>
+      <p:sp>
+        <p:nvSpPr>
+          <p:cNvPr id="13" name="TextBox 12"/>
+          <p:cNvSpPr txBox="1"/>
+          <p:nvPr/>
+        </p:nvSpPr>
+        <p:spPr>
+          <a:xfrm>
+            <a:off x="3200400" y="1097280"/>
+            <a:ext cx="2743200" cy="365760"/>
+          </a:xfrm>
+          <a:prstGeom prst="rect">
+            <a:avLst/>
+          </a:prstGeom>
+          <a:noFill/>
+        </p:spPr>
+        <p:txBody>
+          <a:bodyPr wrap="square">
+            <a:spAutoFit/>
+          </a:bodyPr>
+          <a:lstStyle/>
+          <a:p>
+            <a:pPr algn="ctr">
+              <a:defRPr sz="2200" b="1">
+                <a:solidFill>
+                  <a:srgbClr val="000000"/>
+                </a:solidFill>
+              </a:defRPr>
+            </a:pPr>
+            <a:r>
+              <a:t>Keyboard</a:t>
+            </a:r>
+          </a:p>
+        </p:txBody>
+      </p:sp>
+      <p:pic>
+        <p:nvPicPr>
+          <p:cNvPr id="14" name="Picture 13" descr="page_10_img_5.png"/>
+          <p:cNvPicPr>
+            <a:picLocks noChangeAspect="1"/>
+          </p:cNvPicPr>
+          <p:nvPr/>
+        </p:nvPicPr>
+        <p:blipFill>
+          <a:blip r:embed="rId5"/>
+          <a:stretch>
+            <a:fillRect/>
+          </a:stretch>
+        </p:blipFill>
+        <p:spPr>
+          <a:xfrm>
+            <a:off x="3749040" y="1463040"/>
+            <a:ext cx="1645920" cy="914400"/>
+          </a:xfrm>
+          <a:prstGeom prst="rect">
+            <a:avLst/>
+          </a:prstGeom>
+        </p:spPr>
+      </p:pic>
+      <p:sp>
+        <p:nvSpPr>
+          <p:cNvPr id="15" name="TextBox 14"/>
+          <p:cNvSpPr txBox="1"/>
+          <p:nvPr/>
+        </p:nvSpPr>
+        <p:spPr>
+          <a:xfrm>
+            <a:off x="3200400" y="2377440"/>
+            <a:ext cx="2743200" cy="329184"/>
+          </a:xfrm>
+          <a:prstGeom prst="rect">
+            <a:avLst/>
+          </a:prstGeom>
+          <a:noFill/>
+        </p:spPr>
+        <p:txBody>
+          <a:bodyPr wrap="square">
+            <a:spAutoFit/>
+          </a:bodyPr>
+          <a:lstStyle/>
+          <a:p>
+            <a:pPr algn="ctr">
+              <a:defRPr sz="1400" b="1">
+                <a:solidFill>
+                  <a:srgbClr val="000000"/>
+                </a:solidFill>
+              </a:defRPr>
+            </a:pPr>
+            <a:r>
+              <a:t>HP Slim Bluetooth Keyboard</a:t>
+            </a:r>
+          </a:p>
+        </p:txBody>
+      </p:sp>
+      <p:sp>
+        <p:nvSpPr>
+          <p:cNvPr id="16" name="TextBox 15"/>
+          <p:cNvSpPr txBox="1"/>
+          <p:nvPr/>
+        </p:nvSpPr>
+        <p:spPr>
+          <a:xfrm>
+            <a:off x="3200400" y="2706624"/>
+            <a:ext cx="2743200" cy="585216"/>
+          </a:xfrm>
+          <a:prstGeom prst="rect">
+            <a:avLst/>
+          </a:prstGeom>
+          <a:noFill/>
+        </p:spPr>
+        <p:txBody>
+          <a:bodyPr wrap="square">
+            <a:spAutoFit/>
+          </a:bodyPr>
+          <a:lstStyle/>
+          <a:p>
+            <a:pPr algn="l">
+              <a:defRPr sz="1100" b="0">
+                <a:solidFill>
+                  <a:srgbClr val="000000"/>
+                </a:solidFill>
+              </a:defRPr>
+            </a:pPr>
+            <a:r>
+              <a:t>The HP Slim Bluetooth Keyboard is a thin and light wireless keyboard t</a:t>
+            </a:r>
+          </a:p>
+        </p:txBody>
+      </p:sp>
+      <p:sp>
+        <p:nvSpPr>
+          <p:cNvPr id="17" name="TextBox 16"/>
+          <p:cNvSpPr txBox="1"/>
+          <p:nvPr/>
+        </p:nvSpPr>
+        <p:spPr>
+          <a:xfrm>
+            <a:off x="5943600" y="1097280"/>
+            <a:ext cx="2743200" cy="365760"/>
+          </a:xfrm>
+          <a:prstGeom prst="rect">
+            <a:avLst/>
+          </a:prstGeom>
+          <a:noFill/>
+        </p:spPr>
+        <p:txBody>
+          <a:bodyPr wrap="square">
+            <a:spAutoFit/>
+          </a:bodyPr>
+          <a:lstStyle/>
+          <a:p>
+            <a:pPr algn="ctr">
+              <a:defRPr sz="2200" b="1">
+                <a:solidFill>
+                  <a:srgbClr val="000000"/>
+                </a:solidFill>
+              </a:defRPr>
+            </a:pPr>
+            <a:r>
+              <a:t>Backpack</a:t>
+            </a:r>
+          </a:p>
+        </p:txBody>
+      </p:sp>
+      <p:pic>
+        <p:nvPicPr>
+          <p:cNvPr id="18" name="Picture 17" descr="page_28_img_15.png"/>
+          <p:cNvPicPr>
+            <a:picLocks noChangeAspect="1"/>
+          </p:cNvPicPr>
+          <p:nvPr/>
+        </p:nvPicPr>
+        <p:blipFill>
+          <a:blip r:embed="rId6"/>
+          <a:stretch>
+            <a:fillRect/>
+          </a:stretch>
+        </p:blipFill>
+        <p:spPr>
+          <a:xfrm>
+            <a:off x="6927640" y="1463040"/>
+            <a:ext cx="775120" cy="914400"/>
+          </a:xfrm>
+          <a:prstGeom prst="rect">
+            <a:avLst/>
+          </a:prstGeom>
+        </p:spPr>
+      </p:pic>
+      <p:sp>
+        <p:nvSpPr>
+          <p:cNvPr id="19" name="TextBox 18"/>
+          <p:cNvSpPr txBox="1"/>
+          <p:nvPr/>
+        </p:nvSpPr>
+        <p:spPr>
+          <a:xfrm>
+            <a:off x="5943600" y="2377440"/>
+            <a:ext cx="2743200" cy="329184"/>
+          </a:xfrm>
+          <a:prstGeom prst="rect">
+            <a:avLst/>
+          </a:prstGeom>
+          <a:noFill/>
+        </p:spPr>
+        <p:txBody>
+          <a:bodyPr wrap="square">
+            <a:spAutoFit/>
+          </a:bodyPr>
+          <a:lstStyle/>
+          <a:p>
+            <a:pPr algn="ctr">
+              <a:defRPr sz="1400" b="1">
+                <a:solidFill>
+                  <a:srgbClr val="000000"/>
+                </a:solidFill>
+              </a:defRPr>
+            </a:pPr>
+            <a:r>
+              <a:t>HP Business Nylon Backpack</a:t>
+            </a:r>
+          </a:p>
+        </p:txBody>
+      </p:sp>
+      <p:sp>
+        <p:nvSpPr>
+          <p:cNvPr id="20" name="TextBox 19"/>
+          <p:cNvSpPr txBox="1"/>
+          <p:nvPr/>
+        </p:nvSpPr>
+        <p:spPr>
+          <a:xfrm>
+            <a:off x="5943600" y="2706624"/>
+            <a:ext cx="2743200" cy="585216"/>
+          </a:xfrm>
+          <a:prstGeom prst="rect">
+            <a:avLst/>
+          </a:prstGeom>
+          <a:noFill/>
+        </p:spPr>
+        <p:txBody>
+          <a:bodyPr wrap="square">
+            <a:spAutoFit/>
+          </a:bodyPr>
+          <a:lstStyle/>
+          <a:p>
+            <a:pPr algn="l">
+              <a:defRPr sz="1100" b="0">
+                <a:solidFill>
+                  <a:srgbClr val="000000"/>
+                </a:solidFill>
+              </a:defRPr>
+            </a:pPr>
+            <a:r>
+              <a:t>HP Business Nylon Backpack offers a sturdy, all-purpose backpack for m</a:t>
+            </a:r>
+          </a:p>
+        </p:txBody>
+      </p:sp>
+      <p:pic>
+        <p:nvPicPr>
+          <p:cNvPr id="21" name="Picture 20" descr="page_28_img_6.png"/>
+          <p:cNvPicPr>
+            <a:picLocks noChangeAspect="1"/>
+          </p:cNvPicPr>
+          <p:nvPr/>
+        </p:nvPicPr>
+        <p:blipFill>
+          <a:blip r:embed="rId7"/>
+          <a:stretch>
+            <a:fillRect/>
+          </a:stretch>
+        </p:blipFill>
+        <p:spPr>
+          <a:xfrm>
+            <a:off x="6969125" y="3291840"/>
+            <a:ext cx="692150" cy="914400"/>
+          </a:xfrm>
+          <a:prstGeom prst="rect">
+            <a:avLst/>
+          </a:prstGeom>
+        </p:spPr>
+      </p:pic>
+      <p:sp>
+        <p:nvSpPr>
+          <p:cNvPr id="22" name="TextBox 21"/>
+          <p:cNvSpPr txBox="1"/>
+          <p:nvPr/>
+        </p:nvSpPr>
+        <p:spPr>
+          <a:xfrm>
+            <a:off x="5943600" y="4206240"/>
+            <a:ext cx="2743200" cy="329184"/>
+          </a:xfrm>
+          <a:prstGeom prst="rect">
+            <a:avLst/>
+          </a:prstGeom>
+          <a:noFill/>
+        </p:spPr>
+        <p:txBody>
+          <a:bodyPr wrap="square">
+            <a:spAutoFit/>
+          </a:bodyPr>
+          <a:lstStyle/>
+          <a:p>
+            <a:pPr algn="ctr">
+              <a:defRPr sz="1400" b="1">
+                <a:solidFill>
+                  <a:srgbClr val="000000"/>
+                </a:solidFill>
+              </a:defRPr>
+            </a:pPr>
+            <a:r>
+              <a:t>HP Essential Backpack</a:t>
+            </a:r>
+          </a:p>
+        </p:txBody>
+      </p:sp>
+      <p:sp>
+        <p:nvSpPr>
+          <p:cNvPr id="23" name="TextBox 22"/>
+          <p:cNvSpPr txBox="1"/>
+          <p:nvPr/>
+        </p:nvSpPr>
+        <p:spPr>
+          <a:xfrm>
+            <a:off x="5943600" y="4535424"/>
+            <a:ext cx="2743200" cy="585216"/>
+          </a:xfrm>
+          <a:prstGeom prst="rect">
+            <a:avLst/>
+          </a:prstGeom>
+          <a:noFill/>
+        </p:spPr>
+        <p:txBody>
+          <a:bodyPr wrap="square">
+            <a:spAutoFit/>
+          </a:bodyPr>
+          <a:lstStyle/>
+          <a:p>
+            <a:pPr algn="l">
+              <a:defRPr sz="1100" b="0">
+                <a:solidFill>
+                  <a:srgbClr val="000000"/>
+                </a:solidFill>
+              </a:defRPr>
+            </a:pPr>
+            <a:r>
+              <a:t>The HP Essential Backpack is a great notebook carrying solution for bo</a:t>
             </a:r>
           </a:p>
         </p:txBody>

--- a/HP_Proposal_Professional.pptx
+++ b/HP_Proposal_Professional.pptx
@@ -14,8 +14,6 @@
     <p:sldId id="262" r:id="rId13"/>
     <p:sldId id="263" r:id="rId14"/>
     <p:sldId id="264" r:id="rId15"/>
-    <p:sldId id="265" r:id="rId16"/>
-    <p:sldId id="266" r:id="rId17"/>
   </p:sldIdLst>
   <p:sldSz cx="9144000" cy="6858000" type="screen4x3"/>
   <p:notesSz cx="6858000" cy="9144000"/>
@@ -3116,7 +3114,7 @@
         </p:spPr>
         <p:txBody>
           <a:bodyPr wrap="square">
-            <a:spAutoFit/>
+            <a:normAutofit/>
           </a:bodyPr>
           <a:lstStyle/>
           <a:p>
@@ -3128,7 +3126,7 @@
               </a:defRPr>
             </a:pPr>
             <a:r>
-              <a:t>Introducing the HP EliteBook series, the pinnacle of portable productivity. With ultralight designs ranging from 1.33 kg to 1.88 kg, each model offers RAM upgrades to 16 GB and robust enterprise security features. Perfectly tailored for mobile professionals and designers, our EliteBook laptops provide reliability and performance without compromise. Elevate your work experience with HP.</a:t>
+              <a:t>Introducing the HP ProBook and EliteBook series, designed for professionals who prioritize performance and portability. With models supporting upgradeable 16 GB RAM and UMA or discrete graphics, you can seamlessly tackle demanding tasks. Choose the ultra-lightweight EliteBook 820 G1 for maximum mobility or the ProBook 650 G1 for a larger display and enhanced productivity. Elevate your business efficiency with these stylish and reliable laptops.</a:t>
             </a:r>
           </a:p>
         </p:txBody>
@@ -3164,776 +3162,6 @@
                 <a:latin typeface="Calibri"/>
               </a:rPr>
               <a:t>Generated by HP AI Sales Assistant</a:t>
-            </a:r>
-          </a:p>
-        </p:txBody>
-      </p:sp>
-    </p:spTree>
-  </p:cSld>
-  <p:clrMapOvr>
-    <a:masterClrMapping/>
-  </p:clrMapOvr>
-</p:sld>
-</file>
-
-<file path=ppt/slides/slide10.xml><?xml version="1.0" encoding="utf-8"?>
-<p:sld xmlns:a="http://schemas.openxmlformats.org/drawingml/2006/main" xmlns:p="http://schemas.openxmlformats.org/presentationml/2006/main" xmlns:r="http://schemas.openxmlformats.org/officeDocument/2006/relationships">
-  <p:cSld>
-    <p:spTree>
-      <p:nvGrpSpPr>
-        <p:cNvPr id="1" name=""/>
-        <p:cNvGrpSpPr/>
-        <p:nvPr/>
-      </p:nvGrpSpPr>
-      <p:grpSpPr/>
-      <p:sp>
-        <p:nvSpPr>
-          <p:cNvPr id="2" name="TextBox 1"/>
-          <p:cNvSpPr txBox="1"/>
-          <p:nvPr/>
-        </p:nvSpPr>
-        <p:spPr>
-          <a:xfrm>
-            <a:off x="457200" y="182880"/>
-            <a:ext cx="8229600" cy="548640"/>
-          </a:xfrm>
-          <a:prstGeom prst="rect">
-            <a:avLst/>
-          </a:prstGeom>
-          <a:noFill/>
-        </p:spPr>
-        <p:txBody>
-          <a:bodyPr wrap="none">
-            <a:spAutoFit/>
-          </a:bodyPr>
-          <a:lstStyle/>
-          <a:p>
-            <a:pPr>
-              <a:defRPr sz="2800" b="1"/>
-            </a:pPr>
-            <a:r>
-              <a:t>Upsell Recommendations — Page 2</a:t>
-            </a:r>
-          </a:p>
-        </p:txBody>
-      </p:sp>
-      <p:sp>
-        <p:nvSpPr>
-          <p:cNvPr id="3" name="TextBox 2"/>
-          <p:cNvSpPr txBox="1"/>
-          <p:nvPr/>
-        </p:nvSpPr>
-        <p:spPr>
-          <a:xfrm>
-            <a:off x="457200" y="1097280"/>
-            <a:ext cx="2743200" cy="365760"/>
-          </a:xfrm>
-          <a:prstGeom prst="rect">
-            <a:avLst/>
-          </a:prstGeom>
-          <a:noFill/>
-        </p:spPr>
-        <p:txBody>
-          <a:bodyPr wrap="square">
-            <a:spAutoFit/>
-          </a:bodyPr>
-          <a:lstStyle/>
-          <a:p>
-            <a:pPr algn="ctr">
-              <a:defRPr sz="2200" b="1">
-                <a:solidFill>
-                  <a:srgbClr val="000000"/>
-                </a:solidFill>
-              </a:defRPr>
-            </a:pPr>
-            <a:r>
-              <a:t>Charger</a:t>
-            </a:r>
-          </a:p>
-        </p:txBody>
-      </p:sp>
-      <p:pic>
-        <p:nvPicPr>
-          <p:cNvPr id="4" name="Picture 3" descr="page_26_img_5.png"/>
-          <p:cNvPicPr>
-            <a:picLocks noChangeAspect="1"/>
-          </p:cNvPicPr>
-          <p:nvPr/>
-        </p:nvPicPr>
-        <p:blipFill>
-          <a:blip r:embed="rId2"/>
-          <a:stretch>
-            <a:fillRect/>
-          </a:stretch>
-        </p:blipFill>
-        <p:spPr>
-          <a:xfrm>
-            <a:off x="1117971" y="1463040"/>
-            <a:ext cx="1421658" cy="914400"/>
-          </a:xfrm>
-          <a:prstGeom prst="rect">
-            <a:avLst/>
-          </a:prstGeom>
-        </p:spPr>
-      </p:pic>
-      <p:sp>
-        <p:nvSpPr>
-          <p:cNvPr id="5" name="TextBox 4"/>
-          <p:cNvSpPr txBox="1"/>
-          <p:nvPr/>
-        </p:nvSpPr>
-        <p:spPr>
-          <a:xfrm>
-            <a:off x="457200" y="2377440"/>
-            <a:ext cx="2743200" cy="329184"/>
-          </a:xfrm>
-          <a:prstGeom prst="rect">
-            <a:avLst/>
-          </a:prstGeom>
-          <a:noFill/>
-        </p:spPr>
-        <p:txBody>
-          <a:bodyPr wrap="square">
-            <a:spAutoFit/>
-          </a:bodyPr>
-          <a:lstStyle/>
-          <a:p>
-            <a:pPr algn="ctr">
-              <a:defRPr sz="1400" b="1">
-                <a:solidFill>
-                  <a:srgbClr val="000000"/>
-                </a:solidFill>
-              </a:defRPr>
-            </a:pPr>
-            <a:r>
-              <a:t>HP 230W Slim Adapter</a:t>
-            </a:r>
-          </a:p>
-        </p:txBody>
-      </p:sp>
-      <p:sp>
-        <p:nvSpPr>
-          <p:cNvPr id="6" name="TextBox 5"/>
-          <p:cNvSpPr txBox="1"/>
-          <p:nvPr/>
-        </p:nvSpPr>
-        <p:spPr>
-          <a:xfrm>
-            <a:off x="457200" y="2706624"/>
-            <a:ext cx="2743200" cy="585216"/>
-          </a:xfrm>
-          <a:prstGeom prst="rect">
-            <a:avLst/>
-          </a:prstGeom>
-          <a:noFill/>
-        </p:spPr>
-        <p:txBody>
-          <a:bodyPr wrap="square">
-            <a:spAutoFit/>
-          </a:bodyPr>
-          <a:lstStyle/>
-          <a:p>
-            <a:pPr algn="l">
-              <a:defRPr sz="1100" b="0">
-                <a:solidFill>
-                  <a:srgbClr val="000000"/>
-                </a:solidFill>
-              </a:defRPr>
-            </a:pPr>
-            <a:r>
-              <a:t>HP includes a high quality AC adapter with each HP Business Notebook, </a:t>
-            </a:r>
-          </a:p>
-        </p:txBody>
-      </p:sp>
-      <p:pic>
-        <p:nvPicPr>
-          <p:cNvPr id="7" name="Picture 6" descr="page_26_img_4.png"/>
-          <p:cNvPicPr>
-            <a:picLocks noChangeAspect="1"/>
-          </p:cNvPicPr>
-          <p:nvPr/>
-        </p:nvPicPr>
-        <p:blipFill>
-          <a:blip r:embed="rId3"/>
-          <a:stretch>
-            <a:fillRect/>
-          </a:stretch>
-        </p:blipFill>
-        <p:spPr>
-          <a:xfrm>
-            <a:off x="999893" y="3291840"/>
-            <a:ext cx="1657814" cy="914400"/>
-          </a:xfrm>
-          <a:prstGeom prst="rect">
-            <a:avLst/>
-          </a:prstGeom>
-        </p:spPr>
-      </p:pic>
-      <p:sp>
-        <p:nvSpPr>
-          <p:cNvPr id="8" name="TextBox 7"/>
-          <p:cNvSpPr txBox="1"/>
-          <p:nvPr/>
-        </p:nvSpPr>
-        <p:spPr>
-          <a:xfrm>
-            <a:off x="457200" y="4206240"/>
-            <a:ext cx="2743200" cy="329184"/>
-          </a:xfrm>
-          <a:prstGeom prst="rect">
-            <a:avLst/>
-          </a:prstGeom>
-          <a:noFill/>
-        </p:spPr>
-        <p:txBody>
-          <a:bodyPr wrap="square">
-            <a:spAutoFit/>
-          </a:bodyPr>
-          <a:lstStyle/>
-          <a:p>
-            <a:pPr algn="ctr">
-              <a:defRPr sz="1400" b="1">
-                <a:solidFill>
-                  <a:srgbClr val="000000"/>
-                </a:solidFill>
-              </a:defRPr>
-            </a:pPr>
-            <a:r>
-              <a:t>HP 65W Smart Travel AC Adapter</a:t>
-            </a:r>
-          </a:p>
-        </p:txBody>
-      </p:sp>
-      <p:sp>
-        <p:nvSpPr>
-          <p:cNvPr id="9" name="TextBox 8"/>
-          <p:cNvSpPr txBox="1"/>
-          <p:nvPr/>
-        </p:nvSpPr>
-        <p:spPr>
-          <a:xfrm>
-            <a:off x="457200" y="4535424"/>
-            <a:ext cx="2743200" cy="585216"/>
-          </a:xfrm>
-          <a:prstGeom prst="rect">
-            <a:avLst/>
-          </a:prstGeom>
-          <a:noFill/>
-        </p:spPr>
-        <p:txBody>
-          <a:bodyPr wrap="square">
-            <a:spAutoFit/>
-          </a:bodyPr>
-          <a:lstStyle/>
-          <a:p>
-            <a:pPr algn="l">
-              <a:defRPr sz="1100" b="0">
-                <a:solidFill>
-                  <a:srgbClr val="000000"/>
-                </a:solidFill>
-              </a:defRPr>
-            </a:pPr>
-            <a:r>
-              <a:t>Work smarter on the road and around the world with the HP Smart 65W Tr</a:t>
-            </a:r>
-          </a:p>
-        </p:txBody>
-      </p:sp>
-      <p:pic>
-        <p:nvPicPr>
-          <p:cNvPr id="10" name="Picture 9" descr="page_26_img_3.png"/>
-          <p:cNvPicPr>
-            <a:picLocks noChangeAspect="1"/>
-          </p:cNvPicPr>
-          <p:nvPr/>
-        </p:nvPicPr>
-        <p:blipFill>
-          <a:blip r:embed="rId4"/>
-          <a:stretch>
-            <a:fillRect/>
-          </a:stretch>
-        </p:blipFill>
-        <p:spPr>
-          <a:xfrm>
-            <a:off x="1181378" y="5120640"/>
-            <a:ext cx="1294843" cy="914400"/>
-          </a:xfrm>
-          <a:prstGeom prst="rect">
-            <a:avLst/>
-          </a:prstGeom>
-        </p:spPr>
-      </p:pic>
-      <p:sp>
-        <p:nvSpPr>
-          <p:cNvPr id="11" name="TextBox 10"/>
-          <p:cNvSpPr txBox="1"/>
-          <p:nvPr/>
-        </p:nvSpPr>
-        <p:spPr>
-          <a:xfrm>
-            <a:off x="457200" y="6035040"/>
-            <a:ext cx="2743200" cy="329184"/>
-          </a:xfrm>
-          <a:prstGeom prst="rect">
-            <a:avLst/>
-          </a:prstGeom>
-          <a:noFill/>
-        </p:spPr>
-        <p:txBody>
-          <a:bodyPr wrap="square">
-            <a:spAutoFit/>
-          </a:bodyPr>
-          <a:lstStyle/>
-          <a:p>
-            <a:pPr algn="ctr">
-              <a:defRPr sz="1400" b="1">
-                <a:solidFill>
-                  <a:srgbClr val="000000"/>
-                </a:solidFill>
-              </a:defRPr>
-            </a:pPr>
-            <a:r>
-              <a:t>HP 90W Smart AC/Auto/Air Combo Adapter</a:t>
-            </a:r>
-          </a:p>
-        </p:txBody>
-      </p:sp>
-      <p:sp>
-        <p:nvSpPr>
-          <p:cNvPr id="12" name="TextBox 11"/>
-          <p:cNvSpPr txBox="1"/>
-          <p:nvPr/>
-        </p:nvSpPr>
-        <p:spPr>
-          <a:xfrm>
-            <a:off x="457200" y="6364224"/>
-            <a:ext cx="2743200" cy="585216"/>
-          </a:xfrm>
-          <a:prstGeom prst="rect">
-            <a:avLst/>
-          </a:prstGeom>
-          <a:noFill/>
-        </p:spPr>
-        <p:txBody>
-          <a:bodyPr wrap="square">
-            <a:spAutoFit/>
-          </a:bodyPr>
-          <a:lstStyle/>
-          <a:p>
-            <a:pPr algn="l">
-              <a:defRPr sz="1100" b="0">
-                <a:solidFill>
-                  <a:srgbClr val="000000"/>
-                </a:solidFill>
-              </a:defRPr>
-            </a:pPr>
-            <a:r>
-              <a:t>With the HP 90W AC/Auto/Air Combo Smart Adapter you can experience tru</a:t>
-            </a:r>
-          </a:p>
-        </p:txBody>
-      </p:sp>
-      <p:sp>
-        <p:nvSpPr>
-          <p:cNvPr id="13" name="TextBox 12"/>
-          <p:cNvSpPr txBox="1"/>
-          <p:nvPr/>
-        </p:nvSpPr>
-        <p:spPr>
-          <a:xfrm>
-            <a:off x="3200400" y="1097280"/>
-            <a:ext cx="2743200" cy="365760"/>
-          </a:xfrm>
-          <a:prstGeom prst="rect">
-            <a:avLst/>
-          </a:prstGeom>
-          <a:noFill/>
-        </p:spPr>
-        <p:txBody>
-          <a:bodyPr wrap="square">
-            <a:spAutoFit/>
-          </a:bodyPr>
-          <a:lstStyle/>
-          <a:p>
-            <a:pPr algn="ctr">
-              <a:defRPr sz="2200" b="1">
-                <a:solidFill>
-                  <a:srgbClr val="000000"/>
-                </a:solidFill>
-              </a:defRPr>
-            </a:pPr>
-            <a:r>
-              <a:t>Docking Station</a:t>
-            </a:r>
-          </a:p>
-        </p:txBody>
-      </p:sp>
-      <p:pic>
-        <p:nvPicPr>
-          <p:cNvPr id="14" name="Picture 13" descr="page_28_img_4.png"/>
-          <p:cNvPicPr>
-            <a:picLocks noChangeAspect="1"/>
-          </p:cNvPicPr>
-          <p:nvPr/>
-        </p:nvPicPr>
-        <p:blipFill>
-          <a:blip r:embed="rId5"/>
-          <a:stretch>
-            <a:fillRect/>
-          </a:stretch>
-        </p:blipFill>
-        <p:spPr>
-          <a:xfrm>
-            <a:off x="3863009" y="1463040"/>
-            <a:ext cx="1417982" cy="914400"/>
-          </a:xfrm>
-          <a:prstGeom prst="rect">
-            <a:avLst/>
-          </a:prstGeom>
-        </p:spPr>
-      </p:pic>
-      <p:sp>
-        <p:nvSpPr>
-          <p:cNvPr id="15" name="TextBox 14"/>
-          <p:cNvSpPr txBox="1"/>
-          <p:nvPr/>
-        </p:nvSpPr>
-        <p:spPr>
-          <a:xfrm>
-            <a:off x="3200400" y="2377440"/>
-            <a:ext cx="2743200" cy="329184"/>
-          </a:xfrm>
-          <a:prstGeom prst="rect">
-            <a:avLst/>
-          </a:prstGeom>
-          <a:noFill/>
-        </p:spPr>
-        <p:txBody>
-          <a:bodyPr wrap="square">
-            <a:spAutoFit/>
-          </a:bodyPr>
-          <a:lstStyle/>
-          <a:p>
-            <a:pPr algn="ctr">
-              <a:defRPr sz="1400" b="1">
-                <a:solidFill>
-                  <a:srgbClr val="000000"/>
-                </a:solidFill>
-              </a:defRPr>
-            </a:pPr>
-            <a:r>
-              <a:t>HP 2012 120W Advanced Docking Station</a:t>
-            </a:r>
-          </a:p>
-        </p:txBody>
-      </p:sp>
-      <p:sp>
-        <p:nvSpPr>
-          <p:cNvPr id="16" name="TextBox 15"/>
-          <p:cNvSpPr txBox="1"/>
-          <p:nvPr/>
-        </p:nvSpPr>
-        <p:spPr>
-          <a:xfrm>
-            <a:off x="3200400" y="2706624"/>
-            <a:ext cx="2743200" cy="585216"/>
-          </a:xfrm>
-          <a:prstGeom prst="rect">
-            <a:avLst/>
-          </a:prstGeom>
-          <a:noFill/>
-        </p:spPr>
-        <p:txBody>
-          <a:bodyPr wrap="square">
-            <a:spAutoFit/>
-          </a:bodyPr>
-          <a:lstStyle/>
-          <a:p>
-            <a:pPr algn="l">
-              <a:defRPr sz="1100" b="0">
-                <a:solidFill>
-                  <a:srgbClr val="000000"/>
-                </a:solidFill>
-              </a:defRPr>
-            </a:pPr>
-            <a:r>
-              <a:t>HP offers a full line of docking stations designed exclusively for sel</a:t>
-            </a:r>
-          </a:p>
-        </p:txBody>
-      </p:sp>
-      <p:pic>
-        <p:nvPicPr>
-          <p:cNvPr id="17" name="Picture 16" descr="page_28_img_18.png"/>
-          <p:cNvPicPr>
-            <a:picLocks noChangeAspect="1"/>
-          </p:cNvPicPr>
-          <p:nvPr/>
-        </p:nvPicPr>
-        <p:blipFill>
-          <a:blip r:embed="rId6"/>
-          <a:stretch>
-            <a:fillRect/>
-          </a:stretch>
-        </p:blipFill>
-        <p:spPr>
-          <a:xfrm>
-            <a:off x="3709639" y="3291840"/>
-            <a:ext cx="1724721" cy="914400"/>
-          </a:xfrm>
-          <a:prstGeom prst="rect">
-            <a:avLst/>
-          </a:prstGeom>
-        </p:spPr>
-      </p:pic>
-      <p:sp>
-        <p:nvSpPr>
-          <p:cNvPr id="18" name="TextBox 17"/>
-          <p:cNvSpPr txBox="1"/>
-          <p:nvPr/>
-        </p:nvSpPr>
-        <p:spPr>
-          <a:xfrm>
-            <a:off x="3200400" y="4206240"/>
-            <a:ext cx="2743200" cy="329184"/>
-          </a:xfrm>
-          <a:prstGeom prst="rect">
-            <a:avLst/>
-          </a:prstGeom>
-          <a:noFill/>
-        </p:spPr>
-        <p:txBody>
-          <a:bodyPr wrap="square">
-            <a:spAutoFit/>
-          </a:bodyPr>
-          <a:lstStyle/>
-          <a:p>
-            <a:pPr algn="ctr">
-              <a:defRPr sz="1400" b="1">
-                <a:solidFill>
-                  <a:srgbClr val="000000"/>
-                </a:solidFill>
-              </a:defRPr>
-            </a:pPr>
-            <a:r>
-              <a:t>HP 2012 230W Advanced Docking Station</a:t>
-            </a:r>
-          </a:p>
-        </p:txBody>
-      </p:sp>
-      <p:sp>
-        <p:nvSpPr>
-          <p:cNvPr id="19" name="TextBox 18"/>
-          <p:cNvSpPr txBox="1"/>
-          <p:nvPr/>
-        </p:nvSpPr>
-        <p:spPr>
-          <a:xfrm>
-            <a:off x="3200400" y="4535424"/>
-            <a:ext cx="2743200" cy="585216"/>
-          </a:xfrm>
-          <a:prstGeom prst="rect">
-            <a:avLst/>
-          </a:prstGeom>
-          <a:noFill/>
-        </p:spPr>
-        <p:txBody>
-          <a:bodyPr wrap="square">
-            <a:spAutoFit/>
-          </a:bodyPr>
-          <a:lstStyle/>
-          <a:p>
-            <a:pPr algn="l">
-              <a:defRPr sz="1100" b="0">
-                <a:solidFill>
-                  <a:srgbClr val="000000"/>
-                </a:solidFill>
-              </a:defRPr>
-            </a:pPr>
-            <a:r>
-              <a:t>HP offers a full line of docking stations designed exclusively for sel</a:t>
-            </a:r>
-          </a:p>
-        </p:txBody>
-      </p:sp>
-      <p:pic>
-        <p:nvPicPr>
-          <p:cNvPr id="20" name="Picture 19" descr="page_29_img_11.png"/>
-          <p:cNvPicPr>
-            <a:picLocks noChangeAspect="1"/>
-          </p:cNvPicPr>
-          <p:nvPr/>
-        </p:nvPicPr>
-        <p:blipFill>
-          <a:blip r:embed="rId7"/>
-          <a:stretch>
-            <a:fillRect/>
-          </a:stretch>
-        </p:blipFill>
-        <p:spPr>
-          <a:xfrm>
-            <a:off x="3718056" y="5120640"/>
-            <a:ext cx="1707887" cy="914400"/>
-          </a:xfrm>
-          <a:prstGeom prst="rect">
-            <a:avLst/>
-          </a:prstGeom>
-        </p:spPr>
-      </p:pic>
-      <p:sp>
-        <p:nvSpPr>
-          <p:cNvPr id="21" name="TextBox 20"/>
-          <p:cNvSpPr txBox="1"/>
-          <p:nvPr/>
-        </p:nvSpPr>
-        <p:spPr>
-          <a:xfrm>
-            <a:off x="3200400" y="6035040"/>
-            <a:ext cx="2743200" cy="329184"/>
-          </a:xfrm>
-          <a:prstGeom prst="rect">
-            <a:avLst/>
-          </a:prstGeom>
-          <a:noFill/>
-        </p:spPr>
-        <p:txBody>
-          <a:bodyPr wrap="square">
-            <a:spAutoFit/>
-          </a:bodyPr>
-          <a:lstStyle/>
-          <a:p>
-            <a:pPr algn="ctr">
-              <a:defRPr sz="1400" b="1">
-                <a:solidFill>
-                  <a:srgbClr val="000000"/>
-                </a:solidFill>
-              </a:defRPr>
-            </a:pPr>
-            <a:r>
-              <a:t>HP 2012 90W Docking Station</a:t>
-            </a:r>
-          </a:p>
-        </p:txBody>
-      </p:sp>
-      <p:sp>
-        <p:nvSpPr>
-          <p:cNvPr id="22" name="TextBox 21"/>
-          <p:cNvSpPr txBox="1"/>
-          <p:nvPr/>
-        </p:nvSpPr>
-        <p:spPr>
-          <a:xfrm>
-            <a:off x="3200400" y="6364224"/>
-            <a:ext cx="2743200" cy="585216"/>
-          </a:xfrm>
-          <a:prstGeom prst="rect">
-            <a:avLst/>
-          </a:prstGeom>
-          <a:noFill/>
-        </p:spPr>
-        <p:txBody>
-          <a:bodyPr wrap="square">
-            <a:spAutoFit/>
-          </a:bodyPr>
-          <a:lstStyle/>
-          <a:p>
-            <a:pPr algn="l">
-              <a:defRPr sz="1100" b="0">
-                <a:solidFill>
-                  <a:srgbClr val="000000"/>
-                </a:solidFill>
-              </a:defRPr>
-            </a:pPr>
-            <a:r>
-              <a:t>HP offers a full line of docking stations designed exclusively for sel</a:t>
-            </a:r>
-          </a:p>
-        </p:txBody>
-      </p:sp>
-    </p:spTree>
-  </p:cSld>
-  <p:clrMapOvr>
-    <a:masterClrMapping/>
-  </p:clrMapOvr>
-</p:sld>
-</file>
-
-<file path=ppt/slides/slide11.xml><?xml version="1.0" encoding="utf-8"?>
-<p:sld xmlns:a="http://schemas.openxmlformats.org/drawingml/2006/main" xmlns:p="http://schemas.openxmlformats.org/presentationml/2006/main" xmlns:r="http://schemas.openxmlformats.org/officeDocument/2006/relationships">
-  <p:cSld>
-    <p:spTree>
-      <p:nvGrpSpPr>
-        <p:cNvPr id="1" name=""/>
-        <p:cNvGrpSpPr/>
-        <p:nvPr/>
-      </p:nvGrpSpPr>
-      <p:grpSpPr/>
-      <p:sp>
-        <p:nvSpPr>
-          <p:cNvPr id="2" name="TextBox 1"/>
-          <p:cNvSpPr txBox="1"/>
-          <p:nvPr/>
-        </p:nvSpPr>
-        <p:spPr>
-          <a:xfrm>
-            <a:off x="548640" y="1280160"/>
-            <a:ext cx="8229600" cy="3200400"/>
-          </a:xfrm>
-          <a:prstGeom prst="rect">
-            <a:avLst/>
-          </a:prstGeom>
-          <a:noFill/>
-        </p:spPr>
-        <p:txBody>
-          <a:bodyPr wrap="none">
-            <a:spAutoFit/>
-          </a:bodyPr>
-          <a:lstStyle/>
-          <a:p>
-            <a:r>
-              <a:rPr sz="1800" b="0">
-                <a:solidFill>
-                  <a:srgbClr val="222222"/>
-                </a:solidFill>
-                <a:latin typeface="Calibri"/>
-              </a:rPr>
-              <a:t>Recommended next steps</a:t>
-            </a:r>
-          </a:p>
-        </p:txBody>
-      </p:sp>
-      <p:sp>
-        <p:nvSpPr>
-          <p:cNvPr id="3" name="TextBox 2"/>
-          <p:cNvSpPr txBox="1"/>
-          <p:nvPr/>
-        </p:nvSpPr>
-        <p:spPr>
-          <a:xfrm>
-            <a:off x="548640" y="6400800"/>
-            <a:ext cx="8229600" cy="365760"/>
-          </a:xfrm>
-          <a:prstGeom prst="rect">
-            <a:avLst/>
-          </a:prstGeom>
-          <a:noFill/>
-        </p:spPr>
-        <p:txBody>
-          <a:bodyPr wrap="none">
-            <a:spAutoFit/>
-          </a:bodyPr>
-          <a:lstStyle/>
-          <a:p>
-            <a:pPr algn="l"/>
-            <a:r>
-              <a:rPr sz="900" b="0">
-                <a:solidFill>
-                  <a:srgbClr val="787878"/>
-                </a:solidFill>
-                <a:latin typeface="Calibri"/>
-              </a:rPr>
-              <a:t>Thank You — HP Sales Team</a:t>
             </a:r>
           </a:p>
         </p:txBody>
@@ -4168,6 +3396,980 @@
 </file>
 
 <file path=ppt/slides/slide3.xml><?xml version="1.0" encoding="utf-8"?>
+<p:sld xmlns:a="http://schemas.openxmlformats.org/drawingml/2006/main" xmlns:p="http://schemas.openxmlformats.org/presentationml/2006/main" xmlns:r="http://schemas.openxmlformats.org/officeDocument/2006/relationships">
+  <p:cSld>
+    <p:spTree>
+      <p:nvGrpSpPr>
+        <p:cNvPr id="1" name=""/>
+        <p:cNvGrpSpPr/>
+        <p:nvPr/>
+      </p:nvGrpSpPr>
+      <p:grpSpPr/>
+      <p:sp>
+        <p:nvSpPr>
+          <p:cNvPr id="2" name="TextBox 1"/>
+          <p:cNvSpPr txBox="1"/>
+          <p:nvPr/>
+        </p:nvSpPr>
+        <p:spPr>
+          <a:xfrm>
+            <a:off x="548640" y="457200"/>
+            <a:ext cx="8229600" cy="640080"/>
+          </a:xfrm>
+          <a:prstGeom prst="rect">
+            <a:avLst/>
+          </a:prstGeom>
+          <a:noFill/>
+        </p:spPr>
+        <p:txBody>
+          <a:bodyPr wrap="none">
+            <a:spAutoFit/>
+          </a:bodyPr>
+          <a:lstStyle/>
+          <a:p>
+            <a:r>
+              <a:rPr sz="2200" b="1">
+                <a:solidFill>
+                  <a:srgbClr val="004279"/>
+                </a:solidFill>
+                <a:latin typeface="Calibri"/>
+              </a:rPr>
+              <a:t>HP ProBook 640 G1</a:t>
+            </a:r>
+          </a:p>
+        </p:txBody>
+      </p:sp>
+      <p:pic>
+        <p:nvPicPr>
+          <p:cNvPr id="3" name="Picture 2" descr="image.png"/>
+          <p:cNvPicPr>
+            <a:picLocks noChangeAspect="1"/>
+          </p:cNvPicPr>
+          <p:nvPr/>
+        </p:nvPicPr>
+        <p:blipFill>
+          <a:blip r:embed="rId2"/>
+          <a:stretch>
+            <a:fillRect/>
+          </a:stretch>
+        </p:blipFill>
+        <p:spPr>
+          <a:xfrm>
+            <a:off x="548640" y="1280160"/>
+            <a:ext cx="2743200" cy="3108960"/>
+          </a:xfrm>
+          <a:prstGeom prst="rect">
+            <a:avLst/>
+          </a:prstGeom>
+        </p:spPr>
+      </p:pic>
+      <p:sp>
+        <p:nvSpPr>
+          <p:cNvPr id="4" name="TextBox 3"/>
+          <p:cNvSpPr txBox="1"/>
+          <p:nvPr/>
+        </p:nvSpPr>
+        <p:spPr>
+          <a:xfrm>
+            <a:off x="548640" y="4206240"/>
+            <a:ext cx="2743200" cy="2286000"/>
+          </a:xfrm>
+          <a:prstGeom prst="rect">
+            <a:avLst/>
+          </a:prstGeom>
+          <a:noFill/>
+        </p:spPr>
+        <p:txBody>
+          <a:bodyPr wrap="square">
+            <a:spAutoFit/>
+          </a:bodyPr>
+          <a:lstStyle/>
+          <a:p>
+            <a:r>
+              <a:rPr sz="1400" b="1">
+                <a:solidFill>
+                  <a:srgbClr val="0084B4"/>
+                </a:solidFill>
+                <a:latin typeface="Calibri"/>
+              </a:rPr>
+              <a:t>Description:</a:t>
+            </a:r>
+          </a:p>
+          <a:p>
+            <a:pPr lvl="1"/>
+            <a:r>
+              <a:rPr sz="1200" b="0">
+                <a:solidFill>
+                  <a:srgbClr val="222222"/>
+                </a:solidFill>
+                <a:latin typeface="Calibri"/>
+              </a:rPr>
+              <a:t>Tailored for business. Optimised for Windows 8 Pro, 2 this configurable notebook features a 35.5 cm diagonal display and UMA or discrete graphics. From the professional design to Intel® technology, you're ready for business.</a:t>
+            </a:r>
+          </a:p>
+        </p:txBody>
+      </p:sp>
+      <p:graphicFrame>
+        <p:nvGraphicFramePr>
+          <p:cNvPr id="5" name="Table 4"/>
+          <p:cNvGraphicFramePr>
+            <a:graphicFrameLocks noGrp="1"/>
+          </p:cNvGraphicFramePr>
+          <p:nvPr/>
+        </p:nvGraphicFramePr>
+        <p:xfrm>
+          <a:off x="3657600" y="1188720"/>
+          <a:ext cx="4937760" cy="5029200"/>
+        </p:xfrm>
+        <a:graphic>
+          <a:graphicData uri="http://schemas.openxmlformats.org/drawingml/2006/table">
+            <a:tbl>
+              <a:tblPr firstRow="1" bandRow="1">
+                <a:tableStyleId>{5C22544A-7EE6-4342-B048-85BDC9FD1C3A}</a:tableStyleId>
+              </a:tblPr>
+              <a:tblGrid>
+                <a:gridCol w="2468880"/>
+                <a:gridCol w="2468880"/>
+              </a:tblGrid>
+              <a:tr h="628650">
+                <a:tc>
+                  <a:txBody>
+                    <a:bodyPr/>
+                    <a:lstStyle/>
+                    <a:p>
+                      <a:r>
+                        <a:rPr sz="1200" b="1">
+                          <a:solidFill>
+                            <a:srgbClr val="222222"/>
+                          </a:solidFill>
+                          <a:latin typeface="Calibri"/>
+                        </a:rPr>
+                        <a:t>Specification</a:t>
+                      </a:r>
+                    </a:p>
+                  </a:txBody>
+                  <a:tcPr/>
+                </a:tc>
+                <a:tc>
+                  <a:txBody>
+                    <a:bodyPr/>
+                    <a:lstStyle/>
+                    <a:p>
+                      <a:r>
+                        <a:rPr sz="1200" b="1">
+                          <a:solidFill>
+                            <a:srgbClr val="222222"/>
+                          </a:solidFill>
+                          <a:latin typeface="Calibri"/>
+                        </a:rPr>
+                        <a:t>Details</a:t>
+                      </a:r>
+                    </a:p>
+                  </a:txBody>
+                  <a:tcPr/>
+                </a:tc>
+              </a:tr>
+              <a:tr h="628650">
+                <a:tc>
+                  <a:txBody>
+                    <a:bodyPr/>
+                    <a:lstStyle/>
+                    <a:p>
+                      <a:r>
+                        <a:rPr sz="1000" b="0">
+                          <a:solidFill>
+                            <a:srgbClr val="222222"/>
+                          </a:solidFill>
+                          <a:latin typeface="Calibri"/>
+                        </a:rPr>
+                        <a:t>Ram</a:t>
+                      </a:r>
+                    </a:p>
+                  </a:txBody>
+                  <a:tcPr/>
+                </a:tc>
+                <a:tc>
+                  <a:txBody>
+                    <a:bodyPr/>
+                    <a:lstStyle/>
+                    <a:p>
+                      <a:r>
+                        <a:rPr sz="1000" b="0">
+                          <a:solidFill>
+                            <a:srgbClr val="222222"/>
+                          </a:solidFill>
+                          <a:latin typeface="Calibri"/>
+                        </a:rPr>
+                        <a:t>Upgradeable to 16 GB</a:t>
+                      </a:r>
+                    </a:p>
+                  </a:txBody>
+                  <a:tcPr/>
+                </a:tc>
+              </a:tr>
+              <a:tr h="628650">
+                <a:tc>
+                  <a:txBody>
+                    <a:bodyPr/>
+                    <a:lstStyle/>
+                    <a:p>
+                      <a:r>
+                        <a:rPr sz="1000" b="0">
+                          <a:solidFill>
+                            <a:srgbClr val="222222"/>
+                          </a:solidFill>
+                          <a:latin typeface="Calibri"/>
+                        </a:rPr>
+                        <a:t>Cpu</a:t>
+                      </a:r>
+                    </a:p>
+                  </a:txBody>
+                  <a:tcPr/>
+                </a:tc>
+                <a:tc>
+                  <a:txBody>
+                    <a:bodyPr/>
+                    <a:lstStyle/>
+                    <a:p>
+                      <a:r>
+                        <a:rPr sz="1000" b="0">
+                          <a:solidFill>
+                            <a:srgbClr val="222222"/>
+                          </a:solidFill>
+                          <a:latin typeface="Calibri"/>
+                        </a:rPr>
+                        <a:t>Intel® technology</a:t>
+                      </a:r>
+                    </a:p>
+                  </a:txBody>
+                  <a:tcPr/>
+                </a:tc>
+              </a:tr>
+              <a:tr h="628650">
+                <a:tc>
+                  <a:txBody>
+                    <a:bodyPr/>
+                    <a:lstStyle/>
+                    <a:p>
+                      <a:r>
+                        <a:rPr sz="1000" b="0">
+                          <a:solidFill>
+                            <a:srgbClr val="222222"/>
+                          </a:solidFill>
+                          <a:latin typeface="Calibri"/>
+                        </a:rPr>
+                        <a:t>Gpu</a:t>
+                      </a:r>
+                    </a:p>
+                  </a:txBody>
+                  <a:tcPr/>
+                </a:tc>
+                <a:tc>
+                  <a:txBody>
+                    <a:bodyPr/>
+                    <a:lstStyle/>
+                    <a:p>
+                      <a:r>
+                        <a:rPr sz="1000" b="0">
+                          <a:solidFill>
+                            <a:srgbClr val="222222"/>
+                          </a:solidFill>
+                          <a:latin typeface="Calibri"/>
+                        </a:rPr>
+                        <a:t>UMA or discrete graphics</a:t>
+                      </a:r>
+                    </a:p>
+                  </a:txBody>
+                  <a:tcPr/>
+                </a:tc>
+              </a:tr>
+              <a:tr h="628650">
+                <a:tc>
+                  <a:txBody>
+                    <a:bodyPr/>
+                    <a:lstStyle/>
+                    <a:p>
+                      <a:r>
+                        <a:rPr sz="1000" b="0">
+                          <a:solidFill>
+                            <a:srgbClr val="222222"/>
+                          </a:solidFill>
+                          <a:latin typeface="Calibri"/>
+                        </a:rPr>
+                        <a:t>Display</a:t>
+                      </a:r>
+                    </a:p>
+                  </a:txBody>
+                  <a:tcPr/>
+                </a:tc>
+                <a:tc>
+                  <a:txBody>
+                    <a:bodyPr/>
+                    <a:lstStyle/>
+                    <a:p>
+                      <a:r>
+                        <a:rPr sz="1000" b="0">
+                          <a:solidFill>
+                            <a:srgbClr val="222222"/>
+                          </a:solidFill>
+                          <a:latin typeface="Calibri"/>
+                        </a:rPr>
+                        <a:t>35.5 cm diagonal</a:t>
+                      </a:r>
+                    </a:p>
+                  </a:txBody>
+                  <a:tcPr/>
+                </a:tc>
+              </a:tr>
+              <a:tr h="628650">
+                <a:tc>
+                  <a:txBody>
+                    <a:bodyPr/>
+                    <a:lstStyle/>
+                    <a:p>
+                      <a:r>
+                        <a:rPr sz="1000" b="0">
+                          <a:solidFill>
+                            <a:srgbClr val="222222"/>
+                          </a:solidFill>
+                          <a:latin typeface="Calibri"/>
+                        </a:rPr>
+                        <a:t>Weight</a:t>
+                      </a:r>
+                    </a:p>
+                  </a:txBody>
+                  <a:tcPr/>
+                </a:tc>
+                <a:tc>
+                  <a:txBody>
+                    <a:bodyPr/>
+                    <a:lstStyle/>
+                    <a:p>
+                      <a:r>
+                        <a:rPr sz="1000" b="0">
+                          <a:solidFill>
+                            <a:srgbClr val="222222"/>
+                          </a:solidFill>
+                          <a:latin typeface="Calibri"/>
+                        </a:rPr>
+                        <a:t>Starting at 2.0 kg</a:t>
+                      </a:r>
+                    </a:p>
+                  </a:txBody>
+                  <a:tcPr/>
+                </a:tc>
+              </a:tr>
+              <a:tr h="628650">
+                <a:tc>
+                  <a:txBody>
+                    <a:bodyPr/>
+                    <a:lstStyle/>
+                    <a:p>
+                      <a:r>
+                        <a:rPr sz="1000" b="0">
+                          <a:solidFill>
+                            <a:srgbClr val="222222"/>
+                          </a:solidFill>
+                          <a:latin typeface="Calibri"/>
+                        </a:rPr>
+                        <a:t>Ports</a:t>
+                      </a:r>
+                    </a:p>
+                  </a:txBody>
+                  <a:tcPr/>
+                </a:tc>
+                <a:tc>
+                  <a:txBody>
+                    <a:bodyPr/>
+                    <a:lstStyle/>
+                    <a:p>
+                      <a:r>
+                        <a:rPr sz="1000" b="0">
+                          <a:solidFill>
+                            <a:srgbClr val="222222"/>
+                          </a:solidFill>
+                          <a:latin typeface="Calibri"/>
+                        </a:rPr>
+                        <a:t>2 USB 3.0; 2 USB 2.0; 1 DisplayPort; 1 stereo microphone in; 1 stereo headphone/line-out; 1 1394a; 1 AC power; 1 RJ-45; 1 docking connector; 1 secondary battery connector; 1 VGA; 1 serial; 1 RJ-11 (optional)</a:t>
+                      </a:r>
+                    </a:p>
+                  </a:txBody>
+                  <a:tcPr/>
+                </a:tc>
+              </a:tr>
+              <a:tr h="628650">
+                <a:tc>
+                  <a:txBody>
+                    <a:bodyPr/>
+                    <a:lstStyle/>
+                    <a:p>
+                      <a:r>
+                        <a:rPr sz="1000" b="0">
+                          <a:solidFill>
+                            <a:srgbClr val="222222"/>
+                          </a:solidFill>
+                          <a:latin typeface="Calibri"/>
+                        </a:rPr>
+                        <a:t>Os</a:t>
+                      </a:r>
+                    </a:p>
+                  </a:txBody>
+                  <a:tcPr/>
+                </a:tc>
+                <a:tc>
+                  <a:txBody>
+                    <a:bodyPr/>
+                    <a:lstStyle/>
+                    <a:p>
+                      <a:r>
+                        <a:rPr sz="1000" b="0">
+                          <a:solidFill>
+                            <a:srgbClr val="222222"/>
+                          </a:solidFill>
+                          <a:latin typeface="Calibri"/>
+                        </a:rPr>
+                        <a:t>Windows 8 Pro</a:t>
+                      </a:r>
+                    </a:p>
+                  </a:txBody>
+                  <a:tcPr/>
+                </a:tc>
+              </a:tr>
+            </a:tbl>
+          </a:graphicData>
+        </a:graphic>
+      </p:graphicFrame>
+      <p:sp>
+        <p:nvSpPr>
+          <p:cNvPr id="6" name="TextBox 5"/>
+          <p:cNvSpPr txBox="1"/>
+          <p:nvPr/>
+        </p:nvSpPr>
+        <p:spPr>
+          <a:xfrm>
+            <a:off x="548640" y="6400800"/>
+            <a:ext cx="8229600" cy="365760"/>
+          </a:xfrm>
+          <a:prstGeom prst="rect">
+            <a:avLst/>
+          </a:prstGeom>
+          <a:noFill/>
+        </p:spPr>
+        <p:txBody>
+          <a:bodyPr wrap="none">
+            <a:spAutoFit/>
+          </a:bodyPr>
+          <a:lstStyle/>
+          <a:p>
+            <a:pPr algn="l"/>
+            <a:r>
+              <a:rPr sz="900" b="0">
+                <a:solidFill>
+                  <a:srgbClr val="787878"/>
+                </a:solidFill>
+                <a:latin typeface="Calibri"/>
+              </a:rPr>
+              <a:t>HP ProBook 640 G1 — Product Details</a:t>
+            </a:r>
+          </a:p>
+        </p:txBody>
+      </p:sp>
+    </p:spTree>
+  </p:cSld>
+  <p:clrMapOvr>
+    <a:masterClrMapping/>
+  </p:clrMapOvr>
+</p:sld>
+</file>
+
+<file path=ppt/slides/slide4.xml><?xml version="1.0" encoding="utf-8"?>
+<p:sld xmlns:a="http://schemas.openxmlformats.org/drawingml/2006/main" xmlns:p="http://schemas.openxmlformats.org/presentationml/2006/main" xmlns:r="http://schemas.openxmlformats.org/officeDocument/2006/relationships">
+  <p:cSld>
+    <p:spTree>
+      <p:nvGrpSpPr>
+        <p:cNvPr id="1" name=""/>
+        <p:cNvGrpSpPr/>
+        <p:nvPr/>
+      </p:nvGrpSpPr>
+      <p:grpSpPr/>
+      <p:sp>
+        <p:nvSpPr>
+          <p:cNvPr id="2" name="TextBox 1"/>
+          <p:cNvSpPr txBox="1"/>
+          <p:nvPr/>
+        </p:nvSpPr>
+        <p:spPr>
+          <a:xfrm>
+            <a:off x="548640" y="457200"/>
+            <a:ext cx="8229600" cy="640080"/>
+          </a:xfrm>
+          <a:prstGeom prst="rect">
+            <a:avLst/>
+          </a:prstGeom>
+          <a:noFill/>
+        </p:spPr>
+        <p:txBody>
+          <a:bodyPr wrap="none">
+            <a:spAutoFit/>
+          </a:bodyPr>
+          <a:lstStyle/>
+          <a:p>
+            <a:r>
+              <a:rPr sz="2200" b="1">
+                <a:solidFill>
+                  <a:srgbClr val="004279"/>
+                </a:solidFill>
+                <a:latin typeface="Calibri"/>
+              </a:rPr>
+              <a:t>HP ProBook 650 G1</a:t>
+            </a:r>
+          </a:p>
+        </p:txBody>
+      </p:sp>
+      <p:pic>
+        <p:nvPicPr>
+          <p:cNvPr id="3" name="Picture 2" descr="image.png"/>
+          <p:cNvPicPr>
+            <a:picLocks noChangeAspect="1"/>
+          </p:cNvPicPr>
+          <p:nvPr/>
+        </p:nvPicPr>
+        <p:blipFill>
+          <a:blip r:embed="rId2"/>
+          <a:stretch>
+            <a:fillRect/>
+          </a:stretch>
+        </p:blipFill>
+        <p:spPr>
+          <a:xfrm>
+            <a:off x="548640" y="1280160"/>
+            <a:ext cx="2743200" cy="3108960"/>
+          </a:xfrm>
+          <a:prstGeom prst="rect">
+            <a:avLst/>
+          </a:prstGeom>
+        </p:spPr>
+      </p:pic>
+      <p:sp>
+        <p:nvSpPr>
+          <p:cNvPr id="4" name="TextBox 3"/>
+          <p:cNvSpPr txBox="1"/>
+          <p:nvPr/>
+        </p:nvSpPr>
+        <p:spPr>
+          <a:xfrm>
+            <a:off x="548640" y="4206240"/>
+            <a:ext cx="2743200" cy="2286000"/>
+          </a:xfrm>
+          <a:prstGeom prst="rect">
+            <a:avLst/>
+          </a:prstGeom>
+          <a:noFill/>
+        </p:spPr>
+        <p:txBody>
+          <a:bodyPr wrap="square">
+            <a:spAutoFit/>
+          </a:bodyPr>
+          <a:lstStyle/>
+          <a:p>
+            <a:r>
+              <a:rPr sz="1400" b="1">
+                <a:solidFill>
+                  <a:srgbClr val="0084B4"/>
+                </a:solidFill>
+                <a:latin typeface="Calibri"/>
+              </a:rPr>
+              <a:t>Description:</a:t>
+            </a:r>
+          </a:p>
+          <a:p>
+            <a:pPr lvl="1"/>
+            <a:r>
+              <a:rPr sz="1200" b="0">
+                <a:solidFill>
+                  <a:srgbClr val="222222"/>
+                </a:solidFill>
+                <a:latin typeface="Calibri"/>
+              </a:rPr>
+              <a:t>Tailored for business. Optimised for Windows 8 Pro, 2 this configurable notebook features a 39.6 cm diagonal display and UMA or discrete graphics. From the professional design to Intel® technology, you're ready for business.</a:t>
+            </a:r>
+          </a:p>
+        </p:txBody>
+      </p:sp>
+      <p:graphicFrame>
+        <p:nvGraphicFramePr>
+          <p:cNvPr id="5" name="Table 4"/>
+          <p:cNvGraphicFramePr>
+            <a:graphicFrameLocks noGrp="1"/>
+          </p:cNvGraphicFramePr>
+          <p:nvPr/>
+        </p:nvGraphicFramePr>
+        <p:xfrm>
+          <a:off x="3657600" y="1188720"/>
+          <a:ext cx="4937760" cy="5029200"/>
+        </p:xfrm>
+        <a:graphic>
+          <a:graphicData uri="http://schemas.openxmlformats.org/drawingml/2006/table">
+            <a:tbl>
+              <a:tblPr firstRow="1" bandRow="1">
+                <a:tableStyleId>{5C22544A-7EE6-4342-B048-85BDC9FD1C3A}</a:tableStyleId>
+              </a:tblPr>
+              <a:tblGrid>
+                <a:gridCol w="2468880"/>
+                <a:gridCol w="2468880"/>
+              </a:tblGrid>
+              <a:tr h="628650">
+                <a:tc>
+                  <a:txBody>
+                    <a:bodyPr/>
+                    <a:lstStyle/>
+                    <a:p>
+                      <a:r>
+                        <a:rPr sz="1200" b="1">
+                          <a:solidFill>
+                            <a:srgbClr val="222222"/>
+                          </a:solidFill>
+                          <a:latin typeface="Calibri"/>
+                        </a:rPr>
+                        <a:t>Specification</a:t>
+                      </a:r>
+                    </a:p>
+                  </a:txBody>
+                  <a:tcPr/>
+                </a:tc>
+                <a:tc>
+                  <a:txBody>
+                    <a:bodyPr/>
+                    <a:lstStyle/>
+                    <a:p>
+                      <a:r>
+                        <a:rPr sz="1200" b="1">
+                          <a:solidFill>
+                            <a:srgbClr val="222222"/>
+                          </a:solidFill>
+                          <a:latin typeface="Calibri"/>
+                        </a:rPr>
+                        <a:t>Details</a:t>
+                      </a:r>
+                    </a:p>
+                  </a:txBody>
+                  <a:tcPr/>
+                </a:tc>
+              </a:tr>
+              <a:tr h="628650">
+                <a:tc>
+                  <a:txBody>
+                    <a:bodyPr/>
+                    <a:lstStyle/>
+                    <a:p>
+                      <a:r>
+                        <a:rPr sz="1000" b="0">
+                          <a:solidFill>
+                            <a:srgbClr val="222222"/>
+                          </a:solidFill>
+                          <a:latin typeface="Calibri"/>
+                        </a:rPr>
+                        <a:t>Ram</a:t>
+                      </a:r>
+                    </a:p>
+                  </a:txBody>
+                  <a:tcPr/>
+                </a:tc>
+                <a:tc>
+                  <a:txBody>
+                    <a:bodyPr/>
+                    <a:lstStyle/>
+                    <a:p>
+                      <a:r>
+                        <a:rPr sz="1000" b="0">
+                          <a:solidFill>
+                            <a:srgbClr val="222222"/>
+                          </a:solidFill>
+                          <a:latin typeface="Calibri"/>
+                        </a:rPr>
+                        <a:t>Upgradeable to 16 GB</a:t>
+                      </a:r>
+                    </a:p>
+                  </a:txBody>
+                  <a:tcPr/>
+                </a:tc>
+              </a:tr>
+              <a:tr h="628650">
+                <a:tc>
+                  <a:txBody>
+                    <a:bodyPr/>
+                    <a:lstStyle/>
+                    <a:p>
+                      <a:r>
+                        <a:rPr sz="1000" b="0">
+                          <a:solidFill>
+                            <a:srgbClr val="222222"/>
+                          </a:solidFill>
+                          <a:latin typeface="Calibri"/>
+                        </a:rPr>
+                        <a:t>Cpu</a:t>
+                      </a:r>
+                    </a:p>
+                  </a:txBody>
+                  <a:tcPr/>
+                </a:tc>
+                <a:tc>
+                  <a:txBody>
+                    <a:bodyPr/>
+                    <a:lstStyle/>
+                    <a:p>
+                      <a:r>
+                        <a:rPr sz="1000" b="0">
+                          <a:solidFill>
+                            <a:srgbClr val="222222"/>
+                          </a:solidFill>
+                          <a:latin typeface="Calibri"/>
+                        </a:rPr>
+                        <a:t>Intel® technology</a:t>
+                      </a:r>
+                    </a:p>
+                  </a:txBody>
+                  <a:tcPr/>
+                </a:tc>
+              </a:tr>
+              <a:tr h="628650">
+                <a:tc>
+                  <a:txBody>
+                    <a:bodyPr/>
+                    <a:lstStyle/>
+                    <a:p>
+                      <a:r>
+                        <a:rPr sz="1000" b="0">
+                          <a:solidFill>
+                            <a:srgbClr val="222222"/>
+                          </a:solidFill>
+                          <a:latin typeface="Calibri"/>
+                        </a:rPr>
+                        <a:t>Gpu</a:t>
+                      </a:r>
+                    </a:p>
+                  </a:txBody>
+                  <a:tcPr/>
+                </a:tc>
+                <a:tc>
+                  <a:txBody>
+                    <a:bodyPr/>
+                    <a:lstStyle/>
+                    <a:p>
+                      <a:r>
+                        <a:rPr sz="1000" b="0">
+                          <a:solidFill>
+                            <a:srgbClr val="222222"/>
+                          </a:solidFill>
+                          <a:latin typeface="Calibri"/>
+                        </a:rPr>
+                        <a:t>UMA or discrete graphics</a:t>
+                      </a:r>
+                    </a:p>
+                  </a:txBody>
+                  <a:tcPr/>
+                </a:tc>
+              </a:tr>
+              <a:tr h="628650">
+                <a:tc>
+                  <a:txBody>
+                    <a:bodyPr/>
+                    <a:lstStyle/>
+                    <a:p>
+                      <a:r>
+                        <a:rPr sz="1000" b="0">
+                          <a:solidFill>
+                            <a:srgbClr val="222222"/>
+                          </a:solidFill>
+                          <a:latin typeface="Calibri"/>
+                        </a:rPr>
+                        <a:t>Display</a:t>
+                      </a:r>
+                    </a:p>
+                  </a:txBody>
+                  <a:tcPr/>
+                </a:tc>
+                <a:tc>
+                  <a:txBody>
+                    <a:bodyPr/>
+                    <a:lstStyle/>
+                    <a:p>
+                      <a:r>
+                        <a:rPr sz="1000" b="0">
+                          <a:solidFill>
+                            <a:srgbClr val="222222"/>
+                          </a:solidFill>
+                          <a:latin typeface="Calibri"/>
+                        </a:rPr>
+                        <a:t>39.6 cm diagonal</a:t>
+                      </a:r>
+                    </a:p>
+                  </a:txBody>
+                  <a:tcPr/>
+                </a:tc>
+              </a:tr>
+              <a:tr h="628650">
+                <a:tc>
+                  <a:txBody>
+                    <a:bodyPr/>
+                    <a:lstStyle/>
+                    <a:p>
+                      <a:r>
+                        <a:rPr sz="1000" b="0">
+                          <a:solidFill>
+                            <a:srgbClr val="222222"/>
+                          </a:solidFill>
+                          <a:latin typeface="Calibri"/>
+                        </a:rPr>
+                        <a:t>Weight</a:t>
+                      </a:r>
+                    </a:p>
+                  </a:txBody>
+                  <a:tcPr/>
+                </a:tc>
+                <a:tc>
+                  <a:txBody>
+                    <a:bodyPr/>
+                    <a:lstStyle/>
+                    <a:p>
+                      <a:r>
+                        <a:rPr sz="1000" b="0">
+                          <a:solidFill>
+                            <a:srgbClr val="222222"/>
+                          </a:solidFill>
+                          <a:latin typeface="Calibri"/>
+                        </a:rPr>
+                        <a:t>Starting at 2.32 kg</a:t>
+                      </a:r>
+                    </a:p>
+                  </a:txBody>
+                  <a:tcPr/>
+                </a:tc>
+              </a:tr>
+              <a:tr h="628650">
+                <a:tc>
+                  <a:txBody>
+                    <a:bodyPr/>
+                    <a:lstStyle/>
+                    <a:p>
+                      <a:r>
+                        <a:rPr sz="1000" b="0">
+                          <a:solidFill>
+                            <a:srgbClr val="222222"/>
+                          </a:solidFill>
+                          <a:latin typeface="Calibri"/>
+                        </a:rPr>
+                        <a:t>Ports</a:t>
+                      </a:r>
+                    </a:p>
+                  </a:txBody>
+                  <a:tcPr/>
+                </a:tc>
+                <a:tc>
+                  <a:txBody>
+                    <a:bodyPr/>
+                    <a:lstStyle/>
+                    <a:p>
+                      <a:r>
+                        <a:rPr sz="1000" b="0">
+                          <a:solidFill>
+                            <a:srgbClr val="222222"/>
+                          </a:solidFill>
+                          <a:latin typeface="Calibri"/>
+                        </a:rPr>
+                        <a:t>2 USB 3.0; 2 USB 2.0; 1 DisplayPort; 1 stereo microphone in; 1 stereo headphone/line-out; 1 1394a; 1 AC power; 1 RJ-45; 1 docking connector; 1 secondary battery connector; 1 VGA; 1 serial; 1 RJ-11 (optional)</a:t>
+                      </a:r>
+                    </a:p>
+                  </a:txBody>
+                  <a:tcPr/>
+                </a:tc>
+              </a:tr>
+              <a:tr h="628650">
+                <a:tc>
+                  <a:txBody>
+                    <a:bodyPr/>
+                    <a:lstStyle/>
+                    <a:p>
+                      <a:r>
+                        <a:rPr sz="1000" b="0">
+                          <a:solidFill>
+                            <a:srgbClr val="222222"/>
+                          </a:solidFill>
+                          <a:latin typeface="Calibri"/>
+                        </a:rPr>
+                        <a:t>Os</a:t>
+                      </a:r>
+                    </a:p>
+                  </a:txBody>
+                  <a:tcPr/>
+                </a:tc>
+                <a:tc>
+                  <a:txBody>
+                    <a:bodyPr/>
+                    <a:lstStyle/>
+                    <a:p>
+                      <a:r>
+                        <a:rPr sz="1000" b="0">
+                          <a:solidFill>
+                            <a:srgbClr val="222222"/>
+                          </a:solidFill>
+                          <a:latin typeface="Calibri"/>
+                        </a:rPr>
+                        <a:t>Windows 8 Pro</a:t>
+                      </a:r>
+                    </a:p>
+                  </a:txBody>
+                  <a:tcPr/>
+                </a:tc>
+              </a:tr>
+            </a:tbl>
+          </a:graphicData>
+        </a:graphic>
+      </p:graphicFrame>
+      <p:sp>
+        <p:nvSpPr>
+          <p:cNvPr id="6" name="TextBox 5"/>
+          <p:cNvSpPr txBox="1"/>
+          <p:nvPr/>
+        </p:nvSpPr>
+        <p:spPr>
+          <a:xfrm>
+            <a:off x="548640" y="6400800"/>
+            <a:ext cx="8229600" cy="365760"/>
+          </a:xfrm>
+          <a:prstGeom prst="rect">
+            <a:avLst/>
+          </a:prstGeom>
+          <a:noFill/>
+        </p:spPr>
+        <p:txBody>
+          <a:bodyPr wrap="none">
+            <a:spAutoFit/>
+          </a:bodyPr>
+          <a:lstStyle/>
+          <a:p>
+            <a:pPr algn="l"/>
+            <a:r>
+              <a:rPr sz="900" b="0">
+                <a:solidFill>
+                  <a:srgbClr val="787878"/>
+                </a:solidFill>
+                <a:latin typeface="Calibri"/>
+              </a:rPr>
+              <a:t>HP ProBook 650 G1 — Product Details</a:t>
+            </a:r>
+          </a:p>
+        </p:txBody>
+      </p:sp>
+    </p:spTree>
+  </p:cSld>
+  <p:clrMapOvr>
+    <a:masterClrMapping/>
+  </p:clrMapOvr>
+</p:sld>
+</file>
+
+<file path=ppt/slides/slide5.xml><?xml version="1.0" encoding="utf-8"?>
 <p:sld xmlns:a="http://schemas.openxmlformats.org/drawingml/2006/main" xmlns:p="http://schemas.openxmlformats.org/presentationml/2006/main" xmlns:r="http://schemas.openxmlformats.org/officeDocument/2006/relationships">
   <p:cSld>
     <p:spTree>
@@ -4448,7 +4650,7 @@
                           </a:solidFill>
                           <a:latin typeface="Calibri"/>
                         </a:rPr>
-                        <a:t>Primary Battery: 3-cell (26 WHr) HP Long Life; 3-cell (46 WHr) HP Long Life; Integrated: 45W Smart AC adapter; Discrete: 65W Smart AC adapter</a:t>
+                        <a:t>3-cell (26 WHr) HP Long Life; 3-cell (46 WHr) HP Long Life</a:t>
                       </a:r>
                     </a:p>
                   </a:txBody>
@@ -4524,7 +4726,7 @@
                           </a:solidFill>
                           <a:latin typeface="Calibri"/>
                         </a:rPr>
-                        <a:t>1 Media Card Reader; 2 USB 3.0; 1 USB 3.0 charging; 1 DisplayPort 1.2; 1 VGA; 1 combo stereo headphone/mic jack; 1 AC power; 1 RJ-45; 1 side docking connector</a:t>
+                        <a:t>2 USB 3.0; 1 USB 3.0 charging; 1 DisplayPort 1.2; 1 VGA; 1 combo stereo headphone/mic jack; 1 AC power; 1 RJ-45; 1 side docking connector</a:t>
                       </a:r>
                     </a:p>
                   </a:txBody>
@@ -4604,904 +4806,6 @@
                 <a:latin typeface="Calibri"/>
               </a:rPr>
               <a:t>HP EliteBook 820 G1 — Product Details</a:t>
-            </a:r>
-          </a:p>
-        </p:txBody>
-      </p:sp>
-    </p:spTree>
-  </p:cSld>
-  <p:clrMapOvr>
-    <a:masterClrMapping/>
-  </p:clrMapOvr>
-</p:sld>
-</file>
-
-<file path=ppt/slides/slide4.xml><?xml version="1.0" encoding="utf-8"?>
-<p:sld xmlns:a="http://schemas.openxmlformats.org/drawingml/2006/main" xmlns:p="http://schemas.openxmlformats.org/presentationml/2006/main" xmlns:r="http://schemas.openxmlformats.org/officeDocument/2006/relationships">
-  <p:cSld>
-    <p:spTree>
-      <p:nvGrpSpPr>
-        <p:cNvPr id="1" name=""/>
-        <p:cNvGrpSpPr/>
-        <p:nvPr/>
-      </p:nvGrpSpPr>
-      <p:grpSpPr/>
-      <p:sp>
-        <p:nvSpPr>
-          <p:cNvPr id="2" name="TextBox 1"/>
-          <p:cNvSpPr txBox="1"/>
-          <p:nvPr/>
-        </p:nvSpPr>
-        <p:spPr>
-          <a:xfrm>
-            <a:off x="548640" y="457200"/>
-            <a:ext cx="8229600" cy="640080"/>
-          </a:xfrm>
-          <a:prstGeom prst="rect">
-            <a:avLst/>
-          </a:prstGeom>
-          <a:noFill/>
-        </p:spPr>
-        <p:txBody>
-          <a:bodyPr wrap="none">
-            <a:spAutoFit/>
-          </a:bodyPr>
-          <a:lstStyle/>
-          <a:p>
-            <a:r>
-              <a:rPr sz="2200" b="1">
-                <a:solidFill>
-                  <a:srgbClr val="004279"/>
-                </a:solidFill>
-                <a:latin typeface="Calibri"/>
-              </a:rPr>
-              <a:t>HP EliteBook 840 G1</a:t>
-            </a:r>
-          </a:p>
-        </p:txBody>
-      </p:sp>
-      <p:pic>
-        <p:nvPicPr>
-          <p:cNvPr id="3" name="Picture 2" descr="image.png"/>
-          <p:cNvPicPr>
-            <a:picLocks noChangeAspect="1"/>
-          </p:cNvPicPr>
-          <p:nvPr/>
-        </p:nvPicPr>
-        <p:blipFill>
-          <a:blip r:embed="rId2"/>
-          <a:stretch>
-            <a:fillRect/>
-          </a:stretch>
-        </p:blipFill>
-        <p:spPr>
-          <a:xfrm>
-            <a:off x="548640" y="1280160"/>
-            <a:ext cx="2743200" cy="3108960"/>
-          </a:xfrm>
-          <a:prstGeom prst="rect">
-            <a:avLst/>
-          </a:prstGeom>
-        </p:spPr>
-      </p:pic>
-      <p:sp>
-        <p:nvSpPr>
-          <p:cNvPr id="4" name="TextBox 3"/>
-          <p:cNvSpPr txBox="1"/>
-          <p:nvPr/>
-        </p:nvSpPr>
-        <p:spPr>
-          <a:xfrm>
-            <a:off x="548640" y="4206240"/>
-            <a:ext cx="2743200" cy="2286000"/>
-          </a:xfrm>
-          <a:prstGeom prst="rect">
-            <a:avLst/>
-          </a:prstGeom>
-          <a:noFill/>
-        </p:spPr>
-        <p:txBody>
-          <a:bodyPr wrap="square">
-            <a:spAutoFit/>
-          </a:bodyPr>
-          <a:lstStyle/>
-          <a:p>
-            <a:r>
-              <a:rPr sz="1400" b="1">
-                <a:solidFill>
-                  <a:srgbClr val="0084B4"/>
-                </a:solidFill>
-                <a:latin typeface="Calibri"/>
-              </a:rPr>
-              <a:t>Description:</a:t>
-            </a:r>
-          </a:p>
-          <a:p>
-            <a:pPr lvl="1"/>
-            <a:r>
-              <a:rPr sz="1200" b="0">
-                <a:solidFill>
-                  <a:srgbClr val="222222"/>
-                </a:solidFill>
-                <a:latin typeface="Calibri"/>
-              </a:rPr>
-              <a:t>Now employees can hit the road with a travel pro. The HP EliteBook 840 industry leading Ultrabook™ 21 is ultra-productive in and out of the office. Work with confidence thanks to proven enterprise technologies and enterprise security, performance and management features.</a:t>
-            </a:r>
-          </a:p>
-        </p:txBody>
-      </p:sp>
-      <p:graphicFrame>
-        <p:nvGraphicFramePr>
-          <p:cNvPr id="5" name="Table 4"/>
-          <p:cNvGraphicFramePr>
-            <a:graphicFrameLocks noGrp="1"/>
-          </p:cNvGraphicFramePr>
-          <p:nvPr/>
-        </p:nvGraphicFramePr>
-        <p:xfrm>
-          <a:off x="3657600" y="1188720"/>
-          <a:ext cx="4937760" cy="5029200"/>
-        </p:xfrm>
-        <a:graphic>
-          <a:graphicData uri="http://schemas.openxmlformats.org/drawingml/2006/table">
-            <a:tbl>
-              <a:tblPr firstRow="1" bandRow="1">
-                <a:tableStyleId>{5C22544A-7EE6-4342-B048-85BDC9FD1C3A}</a:tableStyleId>
-              </a:tblPr>
-              <a:tblGrid>
-                <a:gridCol w="2468880"/>
-                <a:gridCol w="2468880"/>
-              </a:tblGrid>
-              <a:tr h="718457">
-                <a:tc>
-                  <a:txBody>
-                    <a:bodyPr/>
-                    <a:lstStyle/>
-                    <a:p>
-                      <a:r>
-                        <a:rPr sz="1200" b="1">
-                          <a:solidFill>
-                            <a:srgbClr val="222222"/>
-                          </a:solidFill>
-                          <a:latin typeface="Calibri"/>
-                        </a:rPr>
-                        <a:t>Specification</a:t>
-                      </a:r>
-                    </a:p>
-                  </a:txBody>
-                  <a:tcPr/>
-                </a:tc>
-                <a:tc>
-                  <a:txBody>
-                    <a:bodyPr/>
-                    <a:lstStyle/>
-                    <a:p>
-                      <a:r>
-                        <a:rPr sz="1200" b="1">
-                          <a:solidFill>
-                            <a:srgbClr val="222222"/>
-                          </a:solidFill>
-                          <a:latin typeface="Calibri"/>
-                        </a:rPr>
-                        <a:t>Details</a:t>
-                      </a:r>
-                    </a:p>
-                  </a:txBody>
-                  <a:tcPr/>
-                </a:tc>
-              </a:tr>
-              <a:tr h="718457">
-                <a:tc>
-                  <a:txBody>
-                    <a:bodyPr/>
-                    <a:lstStyle/>
-                    <a:p>
-                      <a:r>
-                        <a:rPr sz="1000" b="0">
-                          <a:solidFill>
-                            <a:srgbClr val="222222"/>
-                          </a:solidFill>
-                          <a:latin typeface="Calibri"/>
-                        </a:rPr>
-                        <a:t>Ram</a:t>
-                      </a:r>
-                    </a:p>
-                  </a:txBody>
-                  <a:tcPr/>
-                </a:tc>
-                <a:tc>
-                  <a:txBody>
-                    <a:bodyPr/>
-                    <a:lstStyle/>
-                    <a:p>
-                      <a:r>
-                        <a:rPr sz="1000" b="0">
-                          <a:solidFill>
-                            <a:srgbClr val="222222"/>
-                          </a:solidFill>
-                          <a:latin typeface="Calibri"/>
-                        </a:rPr>
-                        <a:t>Upgradeable to 16 GB</a:t>
-                      </a:r>
-                    </a:p>
-                  </a:txBody>
-                  <a:tcPr/>
-                </a:tc>
-              </a:tr>
-              <a:tr h="718457">
-                <a:tc>
-                  <a:txBody>
-                    <a:bodyPr/>
-                    <a:lstStyle/>
-                    <a:p>
-                      <a:r>
-                        <a:rPr sz="1000" b="0">
-                          <a:solidFill>
-                            <a:srgbClr val="222222"/>
-                          </a:solidFill>
-                          <a:latin typeface="Calibri"/>
-                        </a:rPr>
-                        <a:t>Display</a:t>
-                      </a:r>
-                    </a:p>
-                  </a:txBody>
-                  <a:tcPr/>
-                </a:tc>
-                <a:tc>
-                  <a:txBody>
-                    <a:bodyPr/>
-                    <a:lstStyle/>
-                    <a:p>
-                      <a:r>
-                        <a:rPr sz="1000" b="0">
-                          <a:solidFill>
-                            <a:srgbClr val="222222"/>
-                          </a:solidFill>
-                          <a:latin typeface="Calibri"/>
-                        </a:rPr>
-                        <a:t>35.6 cm (14")</a:t>
-                      </a:r>
-                    </a:p>
-                  </a:txBody>
-                  <a:tcPr/>
-                </a:tc>
-              </a:tr>
-              <a:tr h="718457">
-                <a:tc>
-                  <a:txBody>
-                    <a:bodyPr/>
-                    <a:lstStyle/>
-                    <a:p>
-                      <a:r>
-                        <a:rPr sz="1000" b="0">
-                          <a:solidFill>
-                            <a:srgbClr val="222222"/>
-                          </a:solidFill>
-                          <a:latin typeface="Calibri"/>
-                        </a:rPr>
-                        <a:t>Battery</a:t>
-                      </a:r>
-                    </a:p>
-                  </a:txBody>
-                  <a:tcPr/>
-                </a:tc>
-                <a:tc>
-                  <a:txBody>
-                    <a:bodyPr/>
-                    <a:lstStyle/>
-                    <a:p>
-                      <a:r>
-                        <a:rPr sz="1000" b="0">
-                          <a:solidFill>
-                            <a:srgbClr val="222222"/>
-                          </a:solidFill>
-                          <a:latin typeface="Calibri"/>
-                        </a:rPr>
-                        <a:t>Primary Battery: 3-cell (26 WHr) HP Long Life; 3-cell (46 WHr) HP Long Life; Secondary 6-cell (60 WHr) HP Long Life optional; Integrated: 45W Smart AC adapter; Discrete: 65W Smart AC adapter</a:t>
-                      </a:r>
-                    </a:p>
-                  </a:txBody>
-                  <a:tcPr/>
-                </a:tc>
-              </a:tr>
-              <a:tr h="718457">
-                <a:tc>
-                  <a:txBody>
-                    <a:bodyPr/>
-                    <a:lstStyle/>
-                    <a:p>
-                      <a:r>
-                        <a:rPr sz="1000" b="0">
-                          <a:solidFill>
-                            <a:srgbClr val="222222"/>
-                          </a:solidFill>
-                          <a:latin typeface="Calibri"/>
-                        </a:rPr>
-                        <a:t>Weight</a:t>
-                      </a:r>
-                    </a:p>
-                  </a:txBody>
-                  <a:tcPr/>
-                </a:tc>
-                <a:tc>
-                  <a:txBody>
-                    <a:bodyPr/>
-                    <a:lstStyle/>
-                    <a:p>
-                      <a:r>
-                        <a:rPr sz="1000" b="0">
-                          <a:solidFill>
-                            <a:srgbClr val="222222"/>
-                          </a:solidFill>
-                          <a:latin typeface="Calibri"/>
-                        </a:rPr>
-                        <a:t>Starting at 1.58 kg</a:t>
-                      </a:r>
-                    </a:p>
-                  </a:txBody>
-                  <a:tcPr/>
-                </a:tc>
-              </a:tr>
-              <a:tr h="718457">
-                <a:tc>
-                  <a:txBody>
-                    <a:bodyPr/>
-                    <a:lstStyle/>
-                    <a:p>
-                      <a:r>
-                        <a:rPr sz="1000" b="0">
-                          <a:solidFill>
-                            <a:srgbClr val="222222"/>
-                          </a:solidFill>
-                          <a:latin typeface="Calibri"/>
-                        </a:rPr>
-                        <a:t>Ports</a:t>
-                      </a:r>
-                    </a:p>
-                  </a:txBody>
-                  <a:tcPr/>
-                </a:tc>
-                <a:tc>
-                  <a:txBody>
-                    <a:bodyPr/>
-                    <a:lstStyle/>
-                    <a:p>
-                      <a:r>
-                        <a:rPr sz="1000" b="0">
-                          <a:solidFill>
-                            <a:srgbClr val="222222"/>
-                          </a:solidFill>
-                          <a:latin typeface="Calibri"/>
-                        </a:rPr>
-                        <a:t>1 Media Card Reader; 2 USB 3.0; 1 USB 3.0 charging; 1 DisplayPort 1.2; 1 VGA; 1 combo stereo headphone/mic jack; 1 AC power; 1 RJ-45; 1 side docking connector</a:t>
-                      </a:r>
-                    </a:p>
-                  </a:txBody>
-                  <a:tcPr/>
-                </a:tc>
-              </a:tr>
-              <a:tr h="718458">
-                <a:tc>
-                  <a:txBody>
-                    <a:bodyPr/>
-                    <a:lstStyle/>
-                    <a:p>
-                      <a:r>
-                        <a:rPr sz="1000" b="0">
-                          <a:solidFill>
-                            <a:srgbClr val="222222"/>
-                          </a:solidFill>
-                          <a:latin typeface="Calibri"/>
-                        </a:rPr>
-                        <a:t>Os</a:t>
-                      </a:r>
-                    </a:p>
-                  </a:txBody>
-                  <a:tcPr/>
-                </a:tc>
-                <a:tc>
-                  <a:txBody>
-                    <a:bodyPr/>
-                    <a:lstStyle/>
-                    <a:p>
-                      <a:r>
-                        <a:rPr sz="1000" b="0">
-                          <a:solidFill>
-                            <a:srgbClr val="222222"/>
-                          </a:solidFill>
-                          <a:latin typeface="Calibri"/>
-                        </a:rPr>
-                        <a:t>Windows 8 Pro or other operating systems available</a:t>
-                      </a:r>
-                    </a:p>
-                  </a:txBody>
-                  <a:tcPr/>
-                </a:tc>
-              </a:tr>
-            </a:tbl>
-          </a:graphicData>
-        </a:graphic>
-      </p:graphicFrame>
-      <p:sp>
-        <p:nvSpPr>
-          <p:cNvPr id="6" name="TextBox 5"/>
-          <p:cNvSpPr txBox="1"/>
-          <p:nvPr/>
-        </p:nvSpPr>
-        <p:spPr>
-          <a:xfrm>
-            <a:off x="548640" y="6400800"/>
-            <a:ext cx="8229600" cy="365760"/>
-          </a:xfrm>
-          <a:prstGeom prst="rect">
-            <a:avLst/>
-          </a:prstGeom>
-          <a:noFill/>
-        </p:spPr>
-        <p:txBody>
-          <a:bodyPr wrap="none">
-            <a:spAutoFit/>
-          </a:bodyPr>
-          <a:lstStyle/>
-          <a:p>
-            <a:pPr algn="l"/>
-            <a:r>
-              <a:rPr sz="900" b="0">
-                <a:solidFill>
-                  <a:srgbClr val="787878"/>
-                </a:solidFill>
-                <a:latin typeface="Calibri"/>
-              </a:rPr>
-              <a:t>HP EliteBook 840 G1 — Product Details</a:t>
-            </a:r>
-          </a:p>
-        </p:txBody>
-      </p:sp>
-    </p:spTree>
-  </p:cSld>
-  <p:clrMapOvr>
-    <a:masterClrMapping/>
-  </p:clrMapOvr>
-</p:sld>
-</file>
-
-<file path=ppt/slides/slide5.xml><?xml version="1.0" encoding="utf-8"?>
-<p:sld xmlns:a="http://schemas.openxmlformats.org/drawingml/2006/main" xmlns:p="http://schemas.openxmlformats.org/presentationml/2006/main" xmlns:r="http://schemas.openxmlformats.org/officeDocument/2006/relationships">
-  <p:cSld>
-    <p:spTree>
-      <p:nvGrpSpPr>
-        <p:cNvPr id="1" name=""/>
-        <p:cNvGrpSpPr/>
-        <p:nvPr/>
-      </p:nvGrpSpPr>
-      <p:grpSpPr/>
-      <p:sp>
-        <p:nvSpPr>
-          <p:cNvPr id="2" name="TextBox 1"/>
-          <p:cNvSpPr txBox="1"/>
-          <p:nvPr/>
-        </p:nvSpPr>
-        <p:spPr>
-          <a:xfrm>
-            <a:off x="548640" y="457200"/>
-            <a:ext cx="8229600" cy="640080"/>
-          </a:xfrm>
-          <a:prstGeom prst="rect">
-            <a:avLst/>
-          </a:prstGeom>
-          <a:noFill/>
-        </p:spPr>
-        <p:txBody>
-          <a:bodyPr wrap="none">
-            <a:spAutoFit/>
-          </a:bodyPr>
-          <a:lstStyle/>
-          <a:p>
-            <a:r>
-              <a:rPr sz="2200" b="1">
-                <a:solidFill>
-                  <a:srgbClr val="004279"/>
-                </a:solidFill>
-                <a:latin typeface="Calibri"/>
-              </a:rPr>
-              <a:t>HP ProBook 430 G2</a:t>
-            </a:r>
-          </a:p>
-        </p:txBody>
-      </p:sp>
-      <p:pic>
-        <p:nvPicPr>
-          <p:cNvPr id="3" name="Picture 2" descr="image.png"/>
-          <p:cNvPicPr>
-            <a:picLocks noChangeAspect="1"/>
-          </p:cNvPicPr>
-          <p:nvPr/>
-        </p:nvPicPr>
-        <p:blipFill>
-          <a:blip r:embed="rId2"/>
-          <a:stretch>
-            <a:fillRect/>
-          </a:stretch>
-        </p:blipFill>
-        <p:spPr>
-          <a:xfrm>
-            <a:off x="548640" y="1280160"/>
-            <a:ext cx="2743200" cy="3108960"/>
-          </a:xfrm>
-          <a:prstGeom prst="rect">
-            <a:avLst/>
-          </a:prstGeom>
-        </p:spPr>
-      </p:pic>
-      <p:sp>
-        <p:nvSpPr>
-          <p:cNvPr id="4" name="TextBox 3"/>
-          <p:cNvSpPr txBox="1"/>
-          <p:nvPr/>
-        </p:nvSpPr>
-        <p:spPr>
-          <a:xfrm>
-            <a:off x="548640" y="4206240"/>
-            <a:ext cx="2743200" cy="2286000"/>
-          </a:xfrm>
-          <a:prstGeom prst="rect">
-            <a:avLst/>
-          </a:prstGeom>
-          <a:noFill/>
-        </p:spPr>
-        <p:txBody>
-          <a:bodyPr wrap="square">
-            <a:spAutoFit/>
-          </a:bodyPr>
-          <a:lstStyle/>
-          <a:p>
-            <a:r>
-              <a:rPr sz="1400" b="1">
-                <a:solidFill>
-                  <a:srgbClr val="0084B4"/>
-                </a:solidFill>
-                <a:latin typeface="Calibri"/>
-              </a:rPr>
-              <a:t>Description:</a:t>
-            </a:r>
-          </a:p>
-          <a:p>
-            <a:pPr lvl="1"/>
-            <a:r>
-              <a:rPr sz="1200" b="0">
-                <a:solidFill>
-                  <a:srgbClr val="222222"/>
-                </a:solidFill>
-                <a:latin typeface="Calibri"/>
-              </a:rPr>
-              <a:t>Meet the demands of your work. Work smarter—and look good doing it—with an HP ProBook built to perform wherever business takes you. Count on a durable design inside and out, with integrated security and a spill-resistant keyboard. Plus, there's less bulk to bring with you, thanks to thin, stylish construction.</a:t>
-            </a:r>
-          </a:p>
-        </p:txBody>
-      </p:sp>
-      <p:graphicFrame>
-        <p:nvGraphicFramePr>
-          <p:cNvPr id="5" name="Table 4"/>
-          <p:cNvGraphicFramePr>
-            <a:graphicFrameLocks noGrp="1"/>
-          </p:cNvGraphicFramePr>
-          <p:nvPr/>
-        </p:nvGraphicFramePr>
-        <p:xfrm>
-          <a:off x="3657600" y="1188720"/>
-          <a:ext cx="4937760" cy="5029200"/>
-        </p:xfrm>
-        <a:graphic>
-          <a:graphicData uri="http://schemas.openxmlformats.org/drawingml/2006/table">
-            <a:tbl>
-              <a:tblPr firstRow="1" bandRow="1">
-                <a:tableStyleId>{5C22544A-7EE6-4342-B048-85BDC9FD1C3A}</a:tableStyleId>
-              </a:tblPr>
-              <a:tblGrid>
-                <a:gridCol w="2468880"/>
-                <a:gridCol w="2468880"/>
-              </a:tblGrid>
-              <a:tr h="718457">
-                <a:tc>
-                  <a:txBody>
-                    <a:bodyPr/>
-                    <a:lstStyle/>
-                    <a:p>
-                      <a:r>
-                        <a:rPr sz="1200" b="1">
-                          <a:solidFill>
-                            <a:srgbClr val="222222"/>
-                          </a:solidFill>
-                          <a:latin typeface="Calibri"/>
-                        </a:rPr>
-                        <a:t>Specification</a:t>
-                      </a:r>
-                    </a:p>
-                  </a:txBody>
-                  <a:tcPr/>
-                </a:tc>
-                <a:tc>
-                  <a:txBody>
-                    <a:bodyPr/>
-                    <a:lstStyle/>
-                    <a:p>
-                      <a:r>
-                        <a:rPr sz="1200" b="1">
-                          <a:solidFill>
-                            <a:srgbClr val="222222"/>
-                          </a:solidFill>
-                          <a:latin typeface="Calibri"/>
-                        </a:rPr>
-                        <a:t>Details</a:t>
-                      </a:r>
-                    </a:p>
-                  </a:txBody>
-                  <a:tcPr/>
-                </a:tc>
-              </a:tr>
-              <a:tr h="718457">
-                <a:tc>
-                  <a:txBody>
-                    <a:bodyPr/>
-                    <a:lstStyle/>
-                    <a:p>
-                      <a:r>
-                        <a:rPr sz="1000" b="0">
-                          <a:solidFill>
-                            <a:srgbClr val="222222"/>
-                          </a:solidFill>
-                          <a:latin typeface="Calibri"/>
-                        </a:rPr>
-                        <a:t>Ram</a:t>
-                      </a:r>
-                    </a:p>
-                  </a:txBody>
-                  <a:tcPr/>
-                </a:tc>
-                <a:tc>
-                  <a:txBody>
-                    <a:bodyPr/>
-                    <a:lstStyle/>
-                    <a:p>
-                      <a:r>
-                        <a:rPr sz="1000" b="0">
-                          <a:solidFill>
-                            <a:srgbClr val="222222"/>
-                          </a:solidFill>
-                          <a:latin typeface="Calibri"/>
-                        </a:rPr>
-                        <a:t>Upgradeable to 16 GB; 2 SODIMM</a:t>
-                      </a:r>
-                    </a:p>
-                  </a:txBody>
-                  <a:tcPr/>
-                </a:tc>
-              </a:tr>
-              <a:tr h="718457">
-                <a:tc>
-                  <a:txBody>
-                    <a:bodyPr/>
-                    <a:lstStyle/>
-                    <a:p>
-                      <a:r>
-                        <a:rPr sz="1000" b="0">
-                          <a:solidFill>
-                            <a:srgbClr val="222222"/>
-                          </a:solidFill>
-                          <a:latin typeface="Calibri"/>
-                        </a:rPr>
-                        <a:t>Cpu</a:t>
-                      </a:r>
-                    </a:p>
-                  </a:txBody>
-                  <a:tcPr/>
-                </a:tc>
-                <a:tc>
-                  <a:txBody>
-                    <a:bodyPr/>
-                    <a:lstStyle/>
-                    <a:p>
-                      <a:r>
-                        <a:rPr sz="1000" b="0">
-                          <a:solidFill>
-                            <a:srgbClr val="222222"/>
-                          </a:solidFill>
-                          <a:latin typeface="Calibri"/>
-                        </a:rPr>
-                        <a:t>Mobile Intel® HM87 Express</a:t>
-                      </a:r>
-                    </a:p>
-                  </a:txBody>
-                  <a:tcPr/>
-                </a:tc>
-              </a:tr>
-              <a:tr h="718457">
-                <a:tc>
-                  <a:txBody>
-                    <a:bodyPr/>
-                    <a:lstStyle/>
-                    <a:p>
-                      <a:r>
-                        <a:rPr sz="1000" b="0">
-                          <a:solidFill>
-                            <a:srgbClr val="222222"/>
-                          </a:solidFill>
-                          <a:latin typeface="Calibri"/>
-                        </a:rPr>
-                        <a:t>Display</a:t>
-                      </a:r>
-                    </a:p>
-                  </a:txBody>
-                  <a:tcPr/>
-                </a:tc>
-                <a:tc>
-                  <a:txBody>
-                    <a:bodyPr/>
-                    <a:lstStyle/>
-                    <a:p>
-                      <a:r>
-                        <a:rPr sz="1000" b="0">
-                          <a:solidFill>
-                            <a:srgbClr val="222222"/>
-                          </a:solidFill>
-                          <a:latin typeface="Calibri"/>
-                        </a:rPr>
-                        <a:t>33.8 cm (13.3")</a:t>
-                      </a:r>
-                    </a:p>
-                  </a:txBody>
-                  <a:tcPr/>
-                </a:tc>
-              </a:tr>
-              <a:tr h="718457">
-                <a:tc>
-                  <a:txBody>
-                    <a:bodyPr/>
-                    <a:lstStyle/>
-                    <a:p>
-                      <a:r>
-                        <a:rPr sz="1000" b="0">
-                          <a:solidFill>
-                            <a:srgbClr val="222222"/>
-                          </a:solidFill>
-                          <a:latin typeface="Calibri"/>
-                        </a:rPr>
-                        <a:t>Weight</a:t>
-                      </a:r>
-                    </a:p>
-                  </a:txBody>
-                  <a:tcPr/>
-                </a:tc>
-                <a:tc>
-                  <a:txBody>
-                    <a:bodyPr/>
-                    <a:lstStyle/>
-                    <a:p>
-                      <a:r>
-                        <a:rPr sz="1000" b="0">
-                          <a:solidFill>
-                            <a:srgbClr val="222222"/>
-                          </a:solidFill>
-                          <a:latin typeface="Calibri"/>
-                        </a:rPr>
-                        <a:t>Starting at 1.5 kg</a:t>
-                      </a:r>
-                    </a:p>
-                  </a:txBody>
-                  <a:tcPr/>
-                </a:tc>
-              </a:tr>
-              <a:tr h="718457">
-                <a:tc>
-                  <a:txBody>
-                    <a:bodyPr/>
-                    <a:lstStyle/>
-                    <a:p>
-                      <a:r>
-                        <a:rPr sz="1000" b="0">
-                          <a:solidFill>
-                            <a:srgbClr val="222222"/>
-                          </a:solidFill>
-                          <a:latin typeface="Calibri"/>
-                        </a:rPr>
-                        <a:t>Ports</a:t>
-                      </a:r>
-                    </a:p>
-                  </a:txBody>
-                  <a:tcPr/>
-                </a:tc>
-                <a:tc>
-                  <a:txBody>
-                    <a:bodyPr/>
-                    <a:lstStyle/>
-                    <a:p>
-                      <a:r>
-                        <a:rPr sz="1000" b="0">
-                          <a:solidFill>
-                            <a:srgbClr val="222222"/>
-                          </a:solidFill>
-                          <a:latin typeface="Calibri"/>
-                        </a:rPr>
-                        <a:t>2 USB 3.0; 2 USB 2.0; 1 HDMI; 1 stereo microphone in; 1 headphone/line-out; 1 RJ-45; 1 power; 1 VGA</a:t>
-                      </a:r>
-                    </a:p>
-                  </a:txBody>
-                  <a:tcPr/>
-                </a:tc>
-              </a:tr>
-              <a:tr h="718458">
-                <a:tc>
-                  <a:txBody>
-                    <a:bodyPr/>
-                    <a:lstStyle/>
-                    <a:p>
-                      <a:r>
-                        <a:rPr sz="1000" b="0">
-                          <a:solidFill>
-                            <a:srgbClr val="222222"/>
-                          </a:solidFill>
-                          <a:latin typeface="Calibri"/>
-                        </a:rPr>
-                        <a:t>Os</a:t>
-                      </a:r>
-                    </a:p>
-                  </a:txBody>
-                  <a:tcPr/>
-                </a:tc>
-                <a:tc>
-                  <a:txBody>
-                    <a:bodyPr/>
-                    <a:lstStyle/>
-                    <a:p>
-                      <a:r>
-                        <a:rPr sz="1000" b="0">
-                          <a:solidFill>
-                            <a:srgbClr val="222222"/>
-                          </a:solidFill>
-                          <a:latin typeface="Calibri"/>
-                        </a:rPr>
-                        <a:t>Windows 8 Pro or other operating systems available</a:t>
-                      </a:r>
-                    </a:p>
-                  </a:txBody>
-                  <a:tcPr/>
-                </a:tc>
-              </a:tr>
-            </a:tbl>
-          </a:graphicData>
-        </a:graphic>
-      </p:graphicFrame>
-      <p:sp>
-        <p:nvSpPr>
-          <p:cNvPr id="6" name="TextBox 5"/>
-          <p:cNvSpPr txBox="1"/>
-          <p:nvPr/>
-        </p:nvSpPr>
-        <p:spPr>
-          <a:xfrm>
-            <a:off x="548640" y="6400800"/>
-            <a:ext cx="8229600" cy="365760"/>
-          </a:xfrm>
-          <a:prstGeom prst="rect">
-            <a:avLst/>
-          </a:prstGeom>
-          <a:noFill/>
-        </p:spPr>
-        <p:txBody>
-          <a:bodyPr wrap="none">
-            <a:spAutoFit/>
-          </a:bodyPr>
-          <a:lstStyle/>
-          <a:p>
-            <a:pPr algn="l"/>
-            <a:r>
-              <a:rPr sz="900" b="0">
-                <a:solidFill>
-                  <a:srgbClr val="787878"/>
-                </a:solidFill>
-                <a:latin typeface="Calibri"/>
-              </a:rPr>
-              <a:t>HP ProBook 430 G2 — Product Details</a:t>
             </a:r>
           </a:p>
         </p:txBody>
@@ -5515,942 +4819,6 @@
 </file>
 
 <file path=ppt/slides/slide6.xml><?xml version="1.0" encoding="utf-8"?>
-<p:sld xmlns:a="http://schemas.openxmlformats.org/drawingml/2006/main" xmlns:p="http://schemas.openxmlformats.org/presentationml/2006/main" xmlns:r="http://schemas.openxmlformats.org/officeDocument/2006/relationships">
-  <p:cSld>
-    <p:spTree>
-      <p:nvGrpSpPr>
-        <p:cNvPr id="1" name=""/>
-        <p:cNvGrpSpPr/>
-        <p:nvPr/>
-      </p:nvGrpSpPr>
-      <p:grpSpPr/>
-      <p:sp>
-        <p:nvSpPr>
-          <p:cNvPr id="2" name="TextBox 1"/>
-          <p:cNvSpPr txBox="1"/>
-          <p:nvPr/>
-        </p:nvSpPr>
-        <p:spPr>
-          <a:xfrm>
-            <a:off x="548640" y="457200"/>
-            <a:ext cx="8229600" cy="640080"/>
-          </a:xfrm>
-          <a:prstGeom prst="rect">
-            <a:avLst/>
-          </a:prstGeom>
-          <a:noFill/>
-        </p:spPr>
-        <p:txBody>
-          <a:bodyPr wrap="none">
-            <a:spAutoFit/>
-          </a:bodyPr>
-          <a:lstStyle/>
-          <a:p>
-            <a:r>
-              <a:rPr sz="2200" b="1">
-                <a:solidFill>
-                  <a:srgbClr val="004279"/>
-                </a:solidFill>
-                <a:latin typeface="Calibri"/>
-              </a:rPr>
-              <a:t>HP EliteBook 850 G1</a:t>
-            </a:r>
-          </a:p>
-        </p:txBody>
-      </p:sp>
-      <p:pic>
-        <p:nvPicPr>
-          <p:cNvPr id="3" name="Picture 2" descr="image.png"/>
-          <p:cNvPicPr>
-            <a:picLocks noChangeAspect="1"/>
-          </p:cNvPicPr>
-          <p:nvPr/>
-        </p:nvPicPr>
-        <p:blipFill>
-          <a:blip r:embed="rId2"/>
-          <a:stretch>
-            <a:fillRect/>
-          </a:stretch>
-        </p:blipFill>
-        <p:spPr>
-          <a:xfrm>
-            <a:off x="548640" y="1280160"/>
-            <a:ext cx="2743200" cy="3108960"/>
-          </a:xfrm>
-          <a:prstGeom prst="rect">
-            <a:avLst/>
-          </a:prstGeom>
-        </p:spPr>
-      </p:pic>
-      <p:sp>
-        <p:nvSpPr>
-          <p:cNvPr id="4" name="TextBox 3"/>
-          <p:cNvSpPr txBox="1"/>
-          <p:nvPr/>
-        </p:nvSpPr>
-        <p:spPr>
-          <a:xfrm>
-            <a:off x="548640" y="4206240"/>
-            <a:ext cx="2743200" cy="2286000"/>
-          </a:xfrm>
-          <a:prstGeom prst="rect">
-            <a:avLst/>
-          </a:prstGeom>
-          <a:noFill/>
-        </p:spPr>
-        <p:txBody>
-          <a:bodyPr wrap="square">
-            <a:spAutoFit/>
-          </a:bodyPr>
-          <a:lstStyle/>
-          <a:p>
-            <a:r>
-              <a:rPr sz="1400" b="1">
-                <a:solidFill>
-                  <a:srgbClr val="0084B4"/>
-                </a:solidFill>
-                <a:latin typeface="Calibri"/>
-              </a:rPr>
-              <a:t>Description:</a:t>
-            </a:r>
-          </a:p>
-          <a:p>
-            <a:pPr lvl="1"/>
-            <a:r>
-              <a:rPr sz="1200" b="0">
-                <a:solidFill>
-                  <a:srgbClr val="222222"/>
-                </a:solidFill>
-                <a:latin typeface="Calibri"/>
-              </a:rPr>
-              <a:t>Now employees can hit the road with a travel pro. The HP EliteBook 850 industry leading Ultrabook™ 21 is ultra-productive in and out of the office. Work with confidence thanks to proven enterprise technologies and enterprise security, performance and management features.</a:t>
-            </a:r>
-          </a:p>
-        </p:txBody>
-      </p:sp>
-      <p:graphicFrame>
-        <p:nvGraphicFramePr>
-          <p:cNvPr id="5" name="Table 4"/>
-          <p:cNvGraphicFramePr>
-            <a:graphicFrameLocks noGrp="1"/>
-          </p:cNvGraphicFramePr>
-          <p:nvPr/>
-        </p:nvGraphicFramePr>
-        <p:xfrm>
-          <a:off x="3657600" y="1188720"/>
-          <a:ext cx="4937760" cy="5029200"/>
-        </p:xfrm>
-        <a:graphic>
-          <a:graphicData uri="http://schemas.openxmlformats.org/drawingml/2006/table">
-            <a:tbl>
-              <a:tblPr firstRow="1" bandRow="1">
-                <a:tableStyleId>{5C22544A-7EE6-4342-B048-85BDC9FD1C3A}</a:tableStyleId>
-              </a:tblPr>
-              <a:tblGrid>
-                <a:gridCol w="2468880"/>
-                <a:gridCol w="2468880"/>
-              </a:tblGrid>
-              <a:tr h="718457">
-                <a:tc>
-                  <a:txBody>
-                    <a:bodyPr/>
-                    <a:lstStyle/>
-                    <a:p>
-                      <a:r>
-                        <a:rPr sz="1200" b="1">
-                          <a:solidFill>
-                            <a:srgbClr val="222222"/>
-                          </a:solidFill>
-                          <a:latin typeface="Calibri"/>
-                        </a:rPr>
-                        <a:t>Specification</a:t>
-                      </a:r>
-                    </a:p>
-                  </a:txBody>
-                  <a:tcPr/>
-                </a:tc>
-                <a:tc>
-                  <a:txBody>
-                    <a:bodyPr/>
-                    <a:lstStyle/>
-                    <a:p>
-                      <a:r>
-                        <a:rPr sz="1200" b="1">
-                          <a:solidFill>
-                            <a:srgbClr val="222222"/>
-                          </a:solidFill>
-                          <a:latin typeface="Calibri"/>
-                        </a:rPr>
-                        <a:t>Details</a:t>
-                      </a:r>
-                    </a:p>
-                  </a:txBody>
-                  <a:tcPr/>
-                </a:tc>
-              </a:tr>
-              <a:tr h="718457">
-                <a:tc>
-                  <a:txBody>
-                    <a:bodyPr/>
-                    <a:lstStyle/>
-                    <a:p>
-                      <a:r>
-                        <a:rPr sz="1000" b="0">
-                          <a:solidFill>
-                            <a:srgbClr val="222222"/>
-                          </a:solidFill>
-                          <a:latin typeface="Calibri"/>
-                        </a:rPr>
-                        <a:t>Ram</a:t>
-                      </a:r>
-                    </a:p>
-                  </a:txBody>
-                  <a:tcPr/>
-                </a:tc>
-                <a:tc>
-                  <a:txBody>
-                    <a:bodyPr/>
-                    <a:lstStyle/>
-                    <a:p>
-                      <a:r>
-                        <a:rPr sz="1000" b="0">
-                          <a:solidFill>
-                            <a:srgbClr val="222222"/>
-                          </a:solidFill>
-                          <a:latin typeface="Calibri"/>
-                        </a:rPr>
-                        <a:t>Upgradeable to 16 GB</a:t>
-                      </a:r>
-                    </a:p>
-                  </a:txBody>
-                  <a:tcPr/>
-                </a:tc>
-              </a:tr>
-              <a:tr h="718457">
-                <a:tc>
-                  <a:txBody>
-                    <a:bodyPr/>
-                    <a:lstStyle/>
-                    <a:p>
-                      <a:r>
-                        <a:rPr sz="1000" b="0">
-                          <a:solidFill>
-                            <a:srgbClr val="222222"/>
-                          </a:solidFill>
-                          <a:latin typeface="Calibri"/>
-                        </a:rPr>
-                        <a:t>Display</a:t>
-                      </a:r>
-                    </a:p>
-                  </a:txBody>
-                  <a:tcPr/>
-                </a:tc>
-                <a:tc>
-                  <a:txBody>
-                    <a:bodyPr/>
-                    <a:lstStyle/>
-                    <a:p>
-                      <a:r>
-                        <a:rPr sz="1000" b="0">
-                          <a:solidFill>
-                            <a:srgbClr val="222222"/>
-                          </a:solidFill>
-                          <a:latin typeface="Calibri"/>
-                        </a:rPr>
-                        <a:t>39.6 cm (15.6")</a:t>
-                      </a:r>
-                    </a:p>
-                  </a:txBody>
-                  <a:tcPr/>
-                </a:tc>
-              </a:tr>
-              <a:tr h="718457">
-                <a:tc>
-                  <a:txBody>
-                    <a:bodyPr/>
-                    <a:lstStyle/>
-                    <a:p>
-                      <a:r>
-                        <a:rPr sz="1000" b="0">
-                          <a:solidFill>
-                            <a:srgbClr val="222222"/>
-                          </a:solidFill>
-                          <a:latin typeface="Calibri"/>
-                        </a:rPr>
-                        <a:t>Battery</a:t>
-                      </a:r>
-                    </a:p>
-                  </a:txBody>
-                  <a:tcPr/>
-                </a:tc>
-                <a:tc>
-                  <a:txBody>
-                    <a:bodyPr/>
-                    <a:lstStyle/>
-                    <a:p>
-                      <a:r>
-                        <a:rPr sz="1000" b="0">
-                          <a:solidFill>
-                            <a:srgbClr val="222222"/>
-                          </a:solidFill>
-                          <a:latin typeface="Calibri"/>
-                        </a:rPr>
-                        <a:t>Primary Battery: 3-cell (24 WHr) HP Long Life; 3-cell (50 WHr) HP Long Life; Integrated: 45W Smart AC adapter; Discrete: 65W Smart AC adapter</a:t>
-                      </a:r>
-                    </a:p>
-                  </a:txBody>
-                  <a:tcPr/>
-                </a:tc>
-              </a:tr>
-              <a:tr h="718457">
-                <a:tc>
-                  <a:txBody>
-                    <a:bodyPr/>
-                    <a:lstStyle/>
-                    <a:p>
-                      <a:r>
-                        <a:rPr sz="1000" b="0">
-                          <a:solidFill>
-                            <a:srgbClr val="222222"/>
-                          </a:solidFill>
-                          <a:latin typeface="Calibri"/>
-                        </a:rPr>
-                        <a:t>Weight</a:t>
-                      </a:r>
-                    </a:p>
-                  </a:txBody>
-                  <a:tcPr/>
-                </a:tc>
-                <a:tc>
-                  <a:txBody>
-                    <a:bodyPr/>
-                    <a:lstStyle/>
-                    <a:p>
-                      <a:r>
-                        <a:rPr sz="1000" b="0">
-                          <a:solidFill>
-                            <a:srgbClr val="222222"/>
-                          </a:solidFill>
-                          <a:latin typeface="Calibri"/>
-                        </a:rPr>
-                        <a:t>Starting at 1.88 kg</a:t>
-                      </a:r>
-                    </a:p>
-                  </a:txBody>
-                  <a:tcPr/>
-                </a:tc>
-              </a:tr>
-              <a:tr h="718457">
-                <a:tc>
-                  <a:txBody>
-                    <a:bodyPr/>
-                    <a:lstStyle/>
-                    <a:p>
-                      <a:r>
-                        <a:rPr sz="1000" b="0">
-                          <a:solidFill>
-                            <a:srgbClr val="222222"/>
-                          </a:solidFill>
-                          <a:latin typeface="Calibri"/>
-                        </a:rPr>
-                        <a:t>Ports</a:t>
-                      </a:r>
-                    </a:p>
-                  </a:txBody>
-                  <a:tcPr/>
-                </a:tc>
-                <a:tc>
-                  <a:txBody>
-                    <a:bodyPr/>
-                    <a:lstStyle/>
-                    <a:p>
-                      <a:r>
-                        <a:rPr sz="1000" b="0">
-                          <a:solidFill>
-                            <a:srgbClr val="222222"/>
-                          </a:solidFill>
-                          <a:latin typeface="Calibri"/>
-                        </a:rPr>
-                        <a:t>1 Media Card Reader; 3 USB 3.0; 1 USB 3.0 charging; 1 DisplayPort 1.2; 1 VGA; 1 combo stereo headphone/mic jack; 1 AC power; 1 RJ-45; 1 side docking connector</a:t>
-                      </a:r>
-                    </a:p>
-                  </a:txBody>
-                  <a:tcPr/>
-                </a:tc>
-              </a:tr>
-              <a:tr h="718458">
-                <a:tc>
-                  <a:txBody>
-                    <a:bodyPr/>
-                    <a:lstStyle/>
-                    <a:p>
-                      <a:r>
-                        <a:rPr sz="1000" b="0">
-                          <a:solidFill>
-                            <a:srgbClr val="222222"/>
-                          </a:solidFill>
-                          <a:latin typeface="Calibri"/>
-                        </a:rPr>
-                        <a:t>Os</a:t>
-                      </a:r>
-                    </a:p>
-                  </a:txBody>
-                  <a:tcPr/>
-                </a:tc>
-                <a:tc>
-                  <a:txBody>
-                    <a:bodyPr/>
-                    <a:lstStyle/>
-                    <a:p>
-                      <a:r>
-                        <a:rPr sz="1000" b="0">
-                          <a:solidFill>
-                            <a:srgbClr val="222222"/>
-                          </a:solidFill>
-                          <a:latin typeface="Calibri"/>
-                        </a:rPr>
-                        <a:t>Windows 8 Pro or other operating systems available</a:t>
-                      </a:r>
-                    </a:p>
-                  </a:txBody>
-                  <a:tcPr/>
-                </a:tc>
-              </a:tr>
-            </a:tbl>
-          </a:graphicData>
-        </a:graphic>
-      </p:graphicFrame>
-      <p:sp>
-        <p:nvSpPr>
-          <p:cNvPr id="6" name="TextBox 5"/>
-          <p:cNvSpPr txBox="1"/>
-          <p:nvPr/>
-        </p:nvSpPr>
-        <p:spPr>
-          <a:xfrm>
-            <a:off x="548640" y="6400800"/>
-            <a:ext cx="8229600" cy="365760"/>
-          </a:xfrm>
-          <a:prstGeom prst="rect">
-            <a:avLst/>
-          </a:prstGeom>
-          <a:noFill/>
-        </p:spPr>
-        <p:txBody>
-          <a:bodyPr wrap="none">
-            <a:spAutoFit/>
-          </a:bodyPr>
-          <a:lstStyle/>
-          <a:p>
-            <a:pPr algn="l"/>
-            <a:r>
-              <a:rPr sz="900" b="0">
-                <a:solidFill>
-                  <a:srgbClr val="787878"/>
-                </a:solidFill>
-                <a:latin typeface="Calibri"/>
-              </a:rPr>
-              <a:t>HP EliteBook 850 G1 — Product Details</a:t>
-            </a:r>
-          </a:p>
-        </p:txBody>
-      </p:sp>
-    </p:spTree>
-  </p:cSld>
-  <p:clrMapOvr>
-    <a:masterClrMapping/>
-  </p:clrMapOvr>
-</p:sld>
-</file>
-
-<file path=ppt/slides/slide7.xml><?xml version="1.0" encoding="utf-8"?>
-<p:sld xmlns:a="http://schemas.openxmlformats.org/drawingml/2006/main" xmlns:p="http://schemas.openxmlformats.org/presentationml/2006/main" xmlns:r="http://schemas.openxmlformats.org/officeDocument/2006/relationships">
-  <p:cSld>
-    <p:spTree>
-      <p:nvGrpSpPr>
-        <p:cNvPr id="1" name=""/>
-        <p:cNvGrpSpPr/>
-        <p:nvPr/>
-      </p:nvGrpSpPr>
-      <p:grpSpPr/>
-      <p:sp>
-        <p:nvSpPr>
-          <p:cNvPr id="2" name="TextBox 1"/>
-          <p:cNvSpPr txBox="1"/>
-          <p:nvPr/>
-        </p:nvSpPr>
-        <p:spPr>
-          <a:xfrm>
-            <a:off x="548640" y="457200"/>
-            <a:ext cx="8229600" cy="640080"/>
-          </a:xfrm>
-          <a:prstGeom prst="rect">
-            <a:avLst/>
-          </a:prstGeom>
-          <a:noFill/>
-        </p:spPr>
-        <p:txBody>
-          <a:bodyPr wrap="none">
-            <a:spAutoFit/>
-          </a:bodyPr>
-          <a:lstStyle/>
-          <a:p>
-            <a:r>
-              <a:rPr sz="2200" b="1">
-                <a:solidFill>
-                  <a:srgbClr val="004279"/>
-                </a:solidFill>
-                <a:latin typeface="Calibri"/>
-              </a:rPr>
-              <a:t>HP 250 G3</a:t>
-            </a:r>
-          </a:p>
-        </p:txBody>
-      </p:sp>
-      <p:pic>
-        <p:nvPicPr>
-          <p:cNvPr id="3" name="Picture 2" descr="image.png"/>
-          <p:cNvPicPr>
-            <a:picLocks noChangeAspect="1"/>
-          </p:cNvPicPr>
-          <p:nvPr/>
-        </p:nvPicPr>
-        <p:blipFill>
-          <a:blip r:embed="rId2"/>
-          <a:stretch>
-            <a:fillRect/>
-          </a:stretch>
-        </p:blipFill>
-        <p:spPr>
-          <a:xfrm>
-            <a:off x="548640" y="1280160"/>
-            <a:ext cx="2743200" cy="3108960"/>
-          </a:xfrm>
-          <a:prstGeom prst="rect">
-            <a:avLst/>
-          </a:prstGeom>
-        </p:spPr>
-      </p:pic>
-      <p:sp>
-        <p:nvSpPr>
-          <p:cNvPr id="4" name="TextBox 3"/>
-          <p:cNvSpPr txBox="1"/>
-          <p:nvPr/>
-        </p:nvSpPr>
-        <p:spPr>
-          <a:xfrm>
-            <a:off x="548640" y="4206240"/>
-            <a:ext cx="2743200" cy="2286000"/>
-          </a:xfrm>
-          <a:prstGeom prst="rect">
-            <a:avLst/>
-          </a:prstGeom>
-          <a:noFill/>
-        </p:spPr>
-        <p:txBody>
-          <a:bodyPr wrap="square">
-            <a:spAutoFit/>
-          </a:bodyPr>
-          <a:lstStyle/>
-          <a:p>
-            <a:r>
-              <a:rPr sz="1400" b="1">
-                <a:solidFill>
-                  <a:srgbClr val="0084B4"/>
-                </a:solidFill>
-                <a:latin typeface="Calibri"/>
-              </a:rPr>
-              <a:t>Description:</a:t>
-            </a:r>
-          </a:p>
-          <a:p>
-            <a:pPr lvl="1"/>
-            <a:r>
-              <a:rPr sz="1200" b="0">
-                <a:solidFill>
-                  <a:srgbClr val="222222"/>
-                </a:solidFill>
-                <a:latin typeface="Calibri"/>
-              </a:rPr>
-              <a:t>Designed to complete business tasks with Intel® technology, essential multimedia tools, and Windows 8.1. The durable chassis in a matte charcoal color protects the notebook from daily rigors.</a:t>
-            </a:r>
-          </a:p>
-        </p:txBody>
-      </p:sp>
-      <p:graphicFrame>
-        <p:nvGraphicFramePr>
-          <p:cNvPr id="5" name="Table 4"/>
-          <p:cNvGraphicFramePr>
-            <a:graphicFrameLocks noGrp="1"/>
-          </p:cNvGraphicFramePr>
-          <p:nvPr/>
-        </p:nvGraphicFramePr>
-        <p:xfrm>
-          <a:off x="3657600" y="1188720"/>
-          <a:ext cx="4937760" cy="5029200"/>
-        </p:xfrm>
-        <a:graphic>
-          <a:graphicData uri="http://schemas.openxmlformats.org/drawingml/2006/table">
-            <a:tbl>
-              <a:tblPr firstRow="1" bandRow="1">
-                <a:tableStyleId>{5C22544A-7EE6-4342-B048-85BDC9FD1C3A}</a:tableStyleId>
-              </a:tblPr>
-              <a:tblGrid>
-                <a:gridCol w="2468880"/>
-                <a:gridCol w="2468880"/>
-              </a:tblGrid>
-              <a:tr h="628650">
-                <a:tc>
-                  <a:txBody>
-                    <a:bodyPr/>
-                    <a:lstStyle/>
-                    <a:p>
-                      <a:r>
-                        <a:rPr sz="1200" b="1">
-                          <a:solidFill>
-                            <a:srgbClr val="222222"/>
-                          </a:solidFill>
-                          <a:latin typeface="Calibri"/>
-                        </a:rPr>
-                        <a:t>Specification</a:t>
-                      </a:r>
-                    </a:p>
-                  </a:txBody>
-                  <a:tcPr/>
-                </a:tc>
-                <a:tc>
-                  <a:txBody>
-                    <a:bodyPr/>
-                    <a:lstStyle/>
-                    <a:p>
-                      <a:r>
-                        <a:rPr sz="1200" b="1">
-                          <a:solidFill>
-                            <a:srgbClr val="222222"/>
-                          </a:solidFill>
-                          <a:latin typeface="Calibri"/>
-                        </a:rPr>
-                        <a:t>Details</a:t>
-                      </a:r>
-                    </a:p>
-                  </a:txBody>
-                  <a:tcPr/>
-                </a:tc>
-              </a:tr>
-              <a:tr h="628650">
-                <a:tc>
-                  <a:txBody>
-                    <a:bodyPr/>
-                    <a:lstStyle/>
-                    <a:p>
-                      <a:r>
-                        <a:rPr sz="1000" b="0">
-                          <a:solidFill>
-                            <a:srgbClr val="222222"/>
-                          </a:solidFill>
-                          <a:latin typeface="Calibri"/>
-                        </a:rPr>
-                        <a:t>Ram</a:t>
-                      </a:r>
-                    </a:p>
-                  </a:txBody>
-                  <a:tcPr/>
-                </a:tc>
-                <a:tc>
-                  <a:txBody>
-                    <a:bodyPr/>
-                    <a:lstStyle/>
-                    <a:p>
-                      <a:r>
-                        <a:rPr sz="1000" b="0">
-                          <a:solidFill>
-                            <a:srgbClr val="222222"/>
-                          </a:solidFill>
-                          <a:latin typeface="Calibri"/>
-                        </a:rPr>
-                        <a:t>Standard memory up to 8,192MB; 1 SODIMM</a:t>
-                      </a:r>
-                    </a:p>
-                  </a:txBody>
-                  <a:tcPr/>
-                </a:tc>
-              </a:tr>
-              <a:tr h="628650">
-                <a:tc>
-                  <a:txBody>
-                    <a:bodyPr/>
-                    <a:lstStyle/>
-                    <a:p>
-                      <a:r>
-                        <a:rPr sz="1000" b="0">
-                          <a:solidFill>
-                            <a:srgbClr val="222222"/>
-                          </a:solidFill>
-                          <a:latin typeface="Calibri"/>
-                        </a:rPr>
-                        <a:t>Cpu</a:t>
-                      </a:r>
-                    </a:p>
-                  </a:txBody>
-                  <a:tcPr/>
-                </a:tc>
-                <a:tc>
-                  <a:txBody>
-                    <a:bodyPr/>
-                    <a:lstStyle/>
-                    <a:p>
-                      <a:r>
-                        <a:rPr sz="1000" b="0">
-                          <a:solidFill>
-                            <a:srgbClr val="222222"/>
-                          </a:solidFill>
-                          <a:latin typeface="Calibri"/>
-                        </a:rPr>
-                        <a:t>Intel® technology</a:t>
-                      </a:r>
-                    </a:p>
-                  </a:txBody>
-                  <a:tcPr/>
-                </a:tc>
-              </a:tr>
-              <a:tr h="628650">
-                <a:tc>
-                  <a:txBody>
-                    <a:bodyPr/>
-                    <a:lstStyle/>
-                    <a:p>
-                      <a:r>
-                        <a:rPr sz="1000" b="0">
-                          <a:solidFill>
-                            <a:srgbClr val="222222"/>
-                          </a:solidFill>
-                          <a:latin typeface="Calibri"/>
-                        </a:rPr>
-                        <a:t>Display</a:t>
-                      </a:r>
-                    </a:p>
-                  </a:txBody>
-                  <a:tcPr/>
-                </a:tc>
-                <a:tc>
-                  <a:txBody>
-                    <a:bodyPr/>
-                    <a:lstStyle/>
-                    <a:p>
-                      <a:r>
-                        <a:rPr sz="1000" b="0">
-                          <a:solidFill>
-                            <a:srgbClr val="222222"/>
-                          </a:solidFill>
-                          <a:latin typeface="Calibri"/>
-                        </a:rPr>
-                        <a:t>39.6 cm (15.6")</a:t>
-                      </a:r>
-                    </a:p>
-                  </a:txBody>
-                  <a:tcPr/>
-                </a:tc>
-              </a:tr>
-              <a:tr h="628650">
-                <a:tc>
-                  <a:txBody>
-                    <a:bodyPr/>
-                    <a:lstStyle/>
-                    <a:p>
-                      <a:r>
-                        <a:rPr sz="1000" b="0">
-                          <a:solidFill>
-                            <a:srgbClr val="222222"/>
-                          </a:solidFill>
-                          <a:latin typeface="Calibri"/>
-                        </a:rPr>
-                        <a:t>Battery</a:t>
-                      </a:r>
-                    </a:p>
-                  </a:txBody>
-                  <a:tcPr/>
-                </a:tc>
-                <a:tc>
-                  <a:txBody>
-                    <a:bodyPr/>
-                    <a:lstStyle/>
-                    <a:p>
-                      <a:r>
-                        <a:rPr sz="1000" b="0">
-                          <a:solidFill>
-                            <a:srgbClr val="222222"/>
-                          </a:solidFill>
-                          <a:latin typeface="Calibri"/>
-                        </a:rPr>
-                        <a:t>HP 3-cell (31 WHr) polymer battery; HP 4-cell (41 WHr) polymer battery</a:t>
-                      </a:r>
-                    </a:p>
-                  </a:txBody>
-                  <a:tcPr/>
-                </a:tc>
-              </a:tr>
-              <a:tr h="628650">
-                <a:tc>
-                  <a:txBody>
-                    <a:bodyPr/>
-                    <a:lstStyle/>
-                    <a:p>
-                      <a:r>
-                        <a:rPr sz="1000" b="0">
-                          <a:solidFill>
-                            <a:srgbClr val="222222"/>
-                          </a:solidFill>
-                          <a:latin typeface="Calibri"/>
-                        </a:rPr>
-                        <a:t>Weight</a:t>
-                      </a:r>
-                    </a:p>
-                  </a:txBody>
-                  <a:tcPr/>
-                </a:tc>
-                <a:tc>
-                  <a:txBody>
-                    <a:bodyPr/>
-                    <a:lstStyle/>
-                    <a:p>
-                      <a:r>
-                        <a:rPr sz="1000" b="0">
-                          <a:solidFill>
-                            <a:srgbClr val="222222"/>
-                          </a:solidFill>
-                          <a:latin typeface="Calibri"/>
-                        </a:rPr>
-                        <a:t>Starting at &lt; 2 kg (Non-Touch); Starting at &lt; 2.4 kg (Touch)</a:t>
-                      </a:r>
-                    </a:p>
-                  </a:txBody>
-                  <a:tcPr/>
-                </a:tc>
-              </a:tr>
-              <a:tr h="628650">
-                <a:tc>
-                  <a:txBody>
-                    <a:bodyPr/>
-                    <a:lstStyle/>
-                    <a:p>
-                      <a:r>
-                        <a:rPr sz="1000" b="0">
-                          <a:solidFill>
-                            <a:srgbClr val="222222"/>
-                          </a:solidFill>
-                          <a:latin typeface="Calibri"/>
-                        </a:rPr>
-                        <a:t>Ports</a:t>
-                      </a:r>
-                    </a:p>
-                  </a:txBody>
-                  <a:tcPr/>
-                </a:tc>
-                <a:tc>
-                  <a:txBody>
-                    <a:bodyPr/>
-                    <a:lstStyle/>
-                    <a:p>
-                      <a:r>
-                        <a:rPr sz="1000" b="0">
-                          <a:solidFill>
-                            <a:srgbClr val="222222"/>
-                          </a:solidFill>
-                          <a:latin typeface="Calibri"/>
-                        </a:rPr>
-                        <a:t>1 USB 3.0; 2 USB 2.0; 1 HDMI; 1 VGA; 1 stereo microphone-in combo jack; 1 AC power; 1 RJ-45 (Ethernet)</a:t>
-                      </a:r>
-                    </a:p>
-                  </a:txBody>
-                  <a:tcPr/>
-                </a:tc>
-              </a:tr>
-              <a:tr h="628650">
-                <a:tc>
-                  <a:txBody>
-                    <a:bodyPr/>
-                    <a:lstStyle/>
-                    <a:p>
-                      <a:r>
-                        <a:rPr sz="1000" b="0">
-                          <a:solidFill>
-                            <a:srgbClr val="222222"/>
-                          </a:solidFill>
-                          <a:latin typeface="Calibri"/>
-                        </a:rPr>
-                        <a:t>Os</a:t>
-                      </a:r>
-                    </a:p>
-                  </a:txBody>
-                  <a:tcPr/>
-                </a:tc>
-                <a:tc>
-                  <a:txBody>
-                    <a:bodyPr/>
-                    <a:lstStyle/>
-                    <a:p>
-                      <a:r>
-                        <a:rPr sz="1000" b="0">
-                          <a:solidFill>
-                            <a:srgbClr val="222222"/>
-                          </a:solidFill>
-                          <a:latin typeface="Calibri"/>
-                        </a:rPr>
-                        <a:t>Windows 8.1</a:t>
-                      </a:r>
-                    </a:p>
-                  </a:txBody>
-                  <a:tcPr/>
-                </a:tc>
-              </a:tr>
-            </a:tbl>
-          </a:graphicData>
-        </a:graphic>
-      </p:graphicFrame>
-      <p:sp>
-        <p:nvSpPr>
-          <p:cNvPr id="6" name="TextBox 5"/>
-          <p:cNvSpPr txBox="1"/>
-          <p:nvPr/>
-        </p:nvSpPr>
-        <p:spPr>
-          <a:xfrm>
-            <a:off x="548640" y="6400800"/>
-            <a:ext cx="8229600" cy="365760"/>
-          </a:xfrm>
-          <a:prstGeom prst="rect">
-            <a:avLst/>
-          </a:prstGeom>
-          <a:noFill/>
-        </p:spPr>
-        <p:txBody>
-          <a:bodyPr wrap="none">
-            <a:spAutoFit/>
-          </a:bodyPr>
-          <a:lstStyle/>
-          <a:p>
-            <a:pPr algn="l"/>
-            <a:r>
-              <a:rPr sz="900" b="0">
-                <a:solidFill>
-                  <a:srgbClr val="787878"/>
-                </a:solidFill>
-                <a:latin typeface="Calibri"/>
-              </a:rPr>
-              <a:t>HP 250 G3 — Product Details</a:t>
-            </a:r>
-          </a:p>
-        </p:txBody>
-      </p:sp>
-    </p:spTree>
-  </p:cSld>
-  <p:clrMapOvr>
-    <a:masterClrMapping/>
-  </p:clrMapOvr>
-</p:sld>
-</file>
-
-<file path=ppt/slides/slide8.xml><?xml version="1.0" encoding="utf-8"?>
 <p:sld xmlns:a="http://schemas.openxmlformats.org/drawingml/2006/main" xmlns:p="http://schemas.openxmlformats.org/presentationml/2006/main" xmlns:r="http://schemas.openxmlformats.org/officeDocument/2006/relationships">
   <p:cSld>
     <p:spTree>
@@ -6513,14 +4881,12 @@
                 <a:tableStyleId>{5C22544A-7EE6-4342-B048-85BDC9FD1C3A}</a:tableStyleId>
               </a:tblPr>
               <a:tblGrid>
-                <a:gridCol w="1432560"/>
-                <a:gridCol w="1432560"/>
-                <a:gridCol w="1432560"/>
-                <a:gridCol w="1432560"/>
-                <a:gridCol w="1432560"/>
-                <a:gridCol w="1432560"/>
+                <a:gridCol w="2148840"/>
+                <a:gridCol w="2148840"/>
+                <a:gridCol w="2148840"/>
+                <a:gridCol w="2148840"/>
               </a:tblGrid>
-              <a:tr h="617220">
+              <a:tr h="548640">
                 <a:tc>
                   <a:txBody>
                     <a:bodyPr/>
@@ -6551,86 +4917,50 @@
                           </a:solidFill>
                           <a:latin typeface="Calibri"/>
                         </a:rPr>
+                        <a:t>HP ProBook 640 G1</a:t>
+                      </a:r>
+                    </a:p>
+                  </a:txBody>
+                  <a:tcPr/>
+                </a:tc>
+                <a:tc>
+                  <a:txBody>
+                    <a:bodyPr/>
+                    <a:lstStyle/>
+                    <a:p>
+                      <a:r>
+                        <a:rPr sz="1100" b="1">
+                          <a:solidFill>
+                            <a:srgbClr val="222222"/>
+                          </a:solidFill>
+                          <a:latin typeface="Calibri"/>
+                        </a:rPr>
+                        <a:t>HP ProBook 650 G1</a:t>
+                      </a:r>
+                    </a:p>
+                  </a:txBody>
+                  <a:tcPr/>
+                </a:tc>
+                <a:tc>
+                  <a:txBody>
+                    <a:bodyPr/>
+                    <a:lstStyle/>
+                    <a:p>
+                      <a:r>
+                        <a:rPr sz="1100" b="1">
+                          <a:solidFill>
+                            <a:srgbClr val="222222"/>
+                          </a:solidFill>
+                          <a:latin typeface="Calibri"/>
+                        </a:rPr>
                         <a:t>HP EliteBook 820 G1</a:t>
                       </a:r>
                     </a:p>
                   </a:txBody>
                   <a:tcPr/>
                 </a:tc>
-                <a:tc>
-                  <a:txBody>
-                    <a:bodyPr/>
-                    <a:lstStyle/>
-                    <a:p>
-                      <a:r>
-                        <a:rPr sz="1100" b="1">
-                          <a:solidFill>
-                            <a:srgbClr val="222222"/>
-                          </a:solidFill>
-                          <a:latin typeface="Calibri"/>
-                        </a:rPr>
-                        <a:t>HP EliteBook 840 G1</a:t>
-                      </a:r>
-                    </a:p>
-                  </a:txBody>
-                  <a:tcPr/>
-                </a:tc>
-                <a:tc>
-                  <a:txBody>
-                    <a:bodyPr/>
-                    <a:lstStyle/>
-                    <a:p>
-                      <a:r>
-                        <a:rPr sz="1100" b="1">
-                          <a:solidFill>
-                            <a:srgbClr val="222222"/>
-                          </a:solidFill>
-                          <a:latin typeface="Calibri"/>
-                        </a:rPr>
-                        <a:t>HP ProBook 430 G2</a:t>
-                      </a:r>
-                    </a:p>
-                  </a:txBody>
-                  <a:tcPr/>
-                </a:tc>
-                <a:tc>
-                  <a:txBody>
-                    <a:bodyPr/>
-                    <a:lstStyle/>
-                    <a:p>
-                      <a:r>
-                        <a:rPr sz="1100" b="1">
-                          <a:solidFill>
-                            <a:srgbClr val="222222"/>
-                          </a:solidFill>
-                          <a:latin typeface="Calibri"/>
-                        </a:rPr>
-                        <a:t>HP EliteBook 850 G1</a:t>
-                      </a:r>
-                    </a:p>
-                  </a:txBody>
-                  <a:tcPr/>
-                </a:tc>
-                <a:tc>
-                  <a:txBody>
-                    <a:bodyPr/>
-                    <a:lstStyle/>
-                    <a:p>
-                      <a:r>
-                        <a:rPr sz="1100" b="1">
-                          <a:solidFill>
-                            <a:srgbClr val="222222"/>
-                          </a:solidFill>
-                          <a:latin typeface="Calibri"/>
-                        </a:rPr>
-                        <a:t>HP 250 G3</a:t>
-                      </a:r>
-                    </a:p>
-                  </a:txBody>
-                  <a:tcPr/>
-                </a:tc>
               </a:tr>
-              <a:tr h="617220">
+              <a:tr h="548640">
                 <a:tc>
                   <a:txBody>
                     <a:bodyPr/>
@@ -6661,7 +4991,7 @@
                           </a:solidFill>
                           <a:latin typeface="Calibri"/>
                         </a:rPr>
-                        <a:t>Primary Battery: 3-cell (26 WHr) HP Long Life; 3-cell (46 WHr) HP Long Life; Integrated: 45W Smart AC adapter; Discrete: 65W Smart AC adapter</a:t>
+                        <a:t>N/A</a:t>
                       </a:r>
                     </a:p>
                   </a:txBody>
@@ -6679,7 +5009,7 @@
                           </a:solidFill>
                           <a:latin typeface="Calibri"/>
                         </a:rPr>
-                        <a:t>Primary Battery: 3-cell (26 WHr) HP Long Life; 3-cell (46 WHr) HP Long Life; Secondary 6-cell (60 WHr) HP Long Life optional; Integrated: 45W Smart AC adapter; Discrete: 65W Smart AC adapter</a:t>
+                        <a:t>N/A</a:t>
                       </a:r>
                     </a:p>
                   </a:txBody>
@@ -6697,12 +5027,106 @@
                           </a:solidFill>
                           <a:latin typeface="Calibri"/>
                         </a:rPr>
+                        <a:t>3-cell (26 WHr) HP Long Life; 3-cell (46 WHr) HP Long Life</a:t>
+                      </a:r>
+                    </a:p>
+                  </a:txBody>
+                  <a:tcPr/>
+                </a:tc>
+              </a:tr>
+              <a:tr h="548640">
+                <a:tc>
+                  <a:txBody>
+                    <a:bodyPr/>
+                    <a:lstStyle/>
+                    <a:p>
+                      <a:r>
+                        <a:rPr sz="1000" b="1">
+                          <a:solidFill>
+                            <a:srgbClr val="222222"/>
+                          </a:solidFill>
+                          <a:latin typeface="Calibri"/>
+                        </a:rPr>
+                        <a:t>Cpu</a:t>
+                      </a:r>
+                    </a:p>
+                  </a:txBody>
+                  <a:tcPr/>
+                </a:tc>
+                <a:tc>
+                  <a:txBody>
+                    <a:bodyPr/>
+                    <a:lstStyle/>
+                    <a:p>
+                      <a:r>
+                        <a:rPr sz="900" b="0">
+                          <a:solidFill>
+                            <a:srgbClr val="222222"/>
+                          </a:solidFill>
+                          <a:latin typeface="Calibri"/>
+                        </a:rPr>
+                        <a:t>Intel® technology</a:t>
+                      </a:r>
+                    </a:p>
+                  </a:txBody>
+                  <a:tcPr/>
+                </a:tc>
+                <a:tc>
+                  <a:txBody>
+                    <a:bodyPr/>
+                    <a:lstStyle/>
+                    <a:p>
+                      <a:r>
+                        <a:rPr sz="900" b="0">
+                          <a:solidFill>
+                            <a:srgbClr val="222222"/>
+                          </a:solidFill>
+                          <a:latin typeface="Calibri"/>
+                        </a:rPr>
+                        <a:t>Intel® technology</a:t>
+                      </a:r>
+                    </a:p>
+                  </a:txBody>
+                  <a:tcPr/>
+                </a:tc>
+                <a:tc>
+                  <a:txBody>
+                    <a:bodyPr/>
+                    <a:lstStyle/>
+                    <a:p>
+                      <a:r>
+                        <a:rPr sz="900" b="0">
+                          <a:solidFill>
+                            <a:srgbClr val="222222"/>
+                          </a:solidFill>
+                          <a:latin typeface="Calibri"/>
+                        </a:rPr>
                         <a:t>N/A</a:t>
                       </a:r>
                     </a:p>
                   </a:txBody>
                   <a:tcPr/>
                 </a:tc>
+              </a:tr>
+              <a:tr h="548640">
+                <a:tc>
+                  <a:txBody>
+                    <a:bodyPr/>
+                    <a:lstStyle/>
+                    <a:p>
+                      <a:r>
+                        <a:rPr sz="1000" b="1">
+                          <a:solidFill>
+                            <a:srgbClr val="222222"/>
+                          </a:solidFill>
+                          <a:latin typeface="Calibri"/>
+                        </a:rPr>
+                        <a:t>Display</a:t>
+                      </a:r>
+                    </a:p>
+                  </a:txBody>
+                  <a:tcPr/>
+                </a:tc>
                 <a:tc>
                   <a:txBody>
                     <a:bodyPr/>
@@ -6715,7 +5139,7 @@
                           </a:solidFill>
                           <a:latin typeface="Calibri"/>
                         </a:rPr>
-                        <a:t>Primary Battery: 3-cell (24 WHr) HP Long Life; 3-cell (50 WHr) HP Long Life; Integrated: 45W Smart AC adapter; Discrete: 65W Smart AC adapter</a:t>
+                        <a:t>35.5 cm diagonal</a:t>
                       </a:r>
                     </a:p>
                   </a:txBody>
@@ -6733,14 +5157,32 @@
                           </a:solidFill>
                           <a:latin typeface="Calibri"/>
                         </a:rPr>
-                        <a:t>HP 3-cell (31 WHr) polymer battery; HP 4-cell (41 WHr) polymer battery</a:t>
+                        <a:t>39.6 cm diagonal</a:t>
+                      </a:r>
+                    </a:p>
+                  </a:txBody>
+                  <a:tcPr/>
+                </a:tc>
+                <a:tc>
+                  <a:txBody>
+                    <a:bodyPr/>
+                    <a:lstStyle/>
+                    <a:p>
+                      <a:r>
+                        <a:rPr sz="900" b="0">
+                          <a:solidFill>
+                            <a:srgbClr val="222222"/>
+                          </a:solidFill>
+                          <a:latin typeface="Calibri"/>
+                        </a:rPr>
+                        <a:t>31.8 cm (12.5")</a:t>
                       </a:r>
                     </a:p>
                   </a:txBody>
                   <a:tcPr/>
                 </a:tc>
               </a:tr>
-              <a:tr h="617220">
+              <a:tr h="548640">
                 <a:tc>
                   <a:txBody>
                     <a:bodyPr/>
@@ -6753,7 +5195,7 @@
                           </a:solidFill>
                           <a:latin typeface="Calibri"/>
                         </a:rPr>
-                        <a:t>Cpu</a:t>
+                        <a:t>Gpu</a:t>
                       </a:r>
                     </a:p>
                   </a:txBody>
@@ -6771,12 +5213,68 @@
                           </a:solidFill>
                           <a:latin typeface="Calibri"/>
                         </a:rPr>
+                        <a:t>UMA or discrete graphics</a:t>
+                      </a:r>
+                    </a:p>
+                  </a:txBody>
+                  <a:tcPr/>
+                </a:tc>
+                <a:tc>
+                  <a:txBody>
+                    <a:bodyPr/>
+                    <a:lstStyle/>
+                    <a:p>
+                      <a:r>
+                        <a:rPr sz="900" b="0">
+                          <a:solidFill>
+                            <a:srgbClr val="222222"/>
+                          </a:solidFill>
+                          <a:latin typeface="Calibri"/>
+                        </a:rPr>
+                        <a:t>UMA or discrete graphics</a:t>
+                      </a:r>
+                    </a:p>
+                  </a:txBody>
+                  <a:tcPr/>
+                </a:tc>
+                <a:tc>
+                  <a:txBody>
+                    <a:bodyPr/>
+                    <a:lstStyle/>
+                    <a:p>
+                      <a:r>
+                        <a:rPr sz="900" b="0">
+                          <a:solidFill>
+                            <a:srgbClr val="222222"/>
+                          </a:solidFill>
+                          <a:latin typeface="Calibri"/>
+                        </a:rPr>
                         <a:t>N/A</a:t>
                       </a:r>
                     </a:p>
                   </a:txBody>
                   <a:tcPr/>
                 </a:tc>
+              </a:tr>
+              <a:tr h="548640">
+                <a:tc>
+                  <a:txBody>
+                    <a:bodyPr/>
+                    <a:lstStyle/>
+                    <a:p>
+                      <a:r>
+                        <a:rPr sz="1000" b="1">
+                          <a:solidFill>
+                            <a:srgbClr val="222222"/>
+                          </a:solidFill>
+                          <a:latin typeface="Calibri"/>
+                        </a:rPr>
+                        <a:t>Os</a:t>
+                      </a:r>
+                    </a:p>
+                  </a:txBody>
+                  <a:tcPr/>
+                </a:tc>
                 <a:tc>
                   <a:txBody>
                     <a:bodyPr/>
@@ -6789,7 +5287,7 @@
                           </a:solidFill>
                           <a:latin typeface="Calibri"/>
                         </a:rPr>
-                        <a:t>N/A</a:t>
+                        <a:t>Windows 8 Pro</a:t>
                       </a:r>
                     </a:p>
                   </a:txBody>
@@ -6807,7 +5305,7 @@
                           </a:solidFill>
                           <a:latin typeface="Calibri"/>
                         </a:rPr>
-                        <a:t>Mobile Intel® HM87 Express</a:t>
+                        <a:t>Windows 8 Pro</a:t>
                       </a:r>
                     </a:p>
                   </a:txBody>
@@ -6825,7 +5323,27 @@
                           </a:solidFill>
                           <a:latin typeface="Calibri"/>
                         </a:rPr>
-                        <a:t>N/A</a:t>
+                        <a:t>Windows 8 Pro or other operating systems available</a:t>
+                      </a:r>
+                    </a:p>
+                  </a:txBody>
+                  <a:tcPr/>
+                </a:tc>
+              </a:tr>
+              <a:tr h="548640">
+                <a:tc>
+                  <a:txBody>
+                    <a:bodyPr/>
+                    <a:lstStyle/>
+                    <a:p>
+                      <a:r>
+                        <a:rPr sz="1000" b="1">
+                          <a:solidFill>
+                            <a:srgbClr val="222222"/>
+                          </a:solidFill>
+                          <a:latin typeface="Calibri"/>
+                        </a:rPr>
+                        <a:t>Ports</a:t>
                       </a:r>
                     </a:p>
                   </a:txBody>
@@ -6843,14 +5361,50 @@
                           </a:solidFill>
                           <a:latin typeface="Calibri"/>
                         </a:rPr>
-                        <a:t>Intel® technology</a:t>
+                        <a:t>2 USB 3.0; 2 USB 2.0; 1 DisplayPort; 1 stereo microphone in; 1 stereo headphone/line-out; 1 1394a; 1 AC power; 1 RJ-45; 1 docking connector; 1 secondary battery connector; 1 VGA; 1 serial; 1 RJ-11 (optional)</a:t>
+                      </a:r>
+                    </a:p>
+                  </a:txBody>
+                  <a:tcPr/>
+                </a:tc>
+                <a:tc>
+                  <a:txBody>
+                    <a:bodyPr/>
+                    <a:lstStyle/>
+                    <a:p>
+                      <a:r>
+                        <a:rPr sz="900" b="0">
+                          <a:solidFill>
+                            <a:srgbClr val="222222"/>
+                          </a:solidFill>
+                          <a:latin typeface="Calibri"/>
+                        </a:rPr>
+                        <a:t>2 USB 3.0; 2 USB 2.0; 1 DisplayPort; 1 stereo microphone in; 1 stereo headphone/line-out; 1 1394a; 1 AC power; 1 RJ-45; 1 docking connector; 1 secondary battery connector; 1 VGA; 1 serial; 1 RJ-11 (optional)</a:t>
+                      </a:r>
+                    </a:p>
+                  </a:txBody>
+                  <a:tcPr/>
+                </a:tc>
+                <a:tc>
+                  <a:txBody>
+                    <a:bodyPr/>
+                    <a:lstStyle/>
+                    <a:p>
+                      <a:r>
+                        <a:rPr sz="900" b="0">
+                          <a:solidFill>
+                            <a:srgbClr val="222222"/>
+                          </a:solidFill>
+                          <a:latin typeface="Calibri"/>
+                        </a:rPr>
+                        <a:t>2 USB 3.0; 1 USB 3.0 charging; 1 DisplayPort 1.2; 1 VGA; 1 combo stereo headphone/mic jack; 1 AC power; 1 RJ-45; 1 side docking connector</a:t>
                       </a:r>
                     </a:p>
                   </a:txBody>
                   <a:tcPr/>
                 </a:tc>
               </a:tr>
-              <a:tr h="617220">
+              <a:tr h="548640">
                 <a:tc>
                   <a:txBody>
                     <a:bodyPr/>
@@ -6863,7 +5417,7 @@
                           </a:solidFill>
                           <a:latin typeface="Calibri"/>
                         </a:rPr>
-                        <a:t>Display</a:t>
+                        <a:t>Ram</a:t>
                       </a:r>
                     </a:p>
                   </a:txBody>
@@ -6881,7 +5435,7 @@
                           </a:solidFill>
                           <a:latin typeface="Calibri"/>
                         </a:rPr>
-                        <a:t>31.8 cm (12.5")</a:t>
+                        <a:t>Upgradeable to 16 GB</a:t>
                       </a:r>
                     </a:p>
                   </a:txBody>
@@ -6899,7 +5453,7 @@
                           </a:solidFill>
                           <a:latin typeface="Calibri"/>
                         </a:rPr>
-                        <a:t>35.6 cm (14")</a:t>
+                        <a:t>Upgradeable to 16 GB</a:t>
                       </a:r>
                     </a:p>
                   </a:txBody>
@@ -6917,7 +5471,27 @@
                           </a:solidFill>
                           <a:latin typeface="Calibri"/>
                         </a:rPr>
-                        <a:t>33.8 cm (13.3")</a:t>
+                        <a:t>Upgradeable to 16 GB</a:t>
+                      </a:r>
+                    </a:p>
+                  </a:txBody>
+                  <a:tcPr/>
+                </a:tc>
+              </a:tr>
+              <a:tr h="548640">
+                <a:tc>
+                  <a:txBody>
+                    <a:bodyPr/>
+                    <a:lstStyle/>
+                    <a:p>
+                      <a:r>
+                        <a:rPr sz="1000" b="1">
+                          <a:solidFill>
+                            <a:srgbClr val="222222"/>
+                          </a:solidFill>
+                          <a:latin typeface="Calibri"/>
+                        </a:rPr>
+                        <a:t>Weight</a:t>
                       </a:r>
                     </a:p>
                   </a:txBody>
@@ -6935,7 +5509,7 @@
                           </a:solidFill>
                           <a:latin typeface="Calibri"/>
                         </a:rPr>
-                        <a:t>39.6 cm (15.6")</a:t>
+                        <a:t>Starting at 2.0 kg</a:t>
                       </a:r>
                     </a:p>
                   </a:txBody>
@@ -6953,27 +5527,7 @@
                           </a:solidFill>
                           <a:latin typeface="Calibri"/>
                         </a:rPr>
-                        <a:t>39.6 cm (15.6")</a:t>
-                      </a:r>
-                    </a:p>
-                  </a:txBody>
-                  <a:tcPr/>
-                </a:tc>
-              </a:tr>
-              <a:tr h="617220">
-                <a:tc>
-                  <a:txBody>
-                    <a:bodyPr/>
-                    <a:lstStyle/>
-                    <a:p>
-                      <a:r>
-                        <a:rPr sz="1000" b="1">
-                          <a:solidFill>
-                            <a:srgbClr val="222222"/>
-                          </a:solidFill>
-                          <a:latin typeface="Calibri"/>
-                        </a:rPr>
-                        <a:t>Os</a:t>
+                        <a:t>Starting at 2.32 kg</a:t>
                       </a:r>
                     </a:p>
                   </a:txBody>
@@ -6991,409 +5545,7 @@
                           </a:solidFill>
                           <a:latin typeface="Calibri"/>
                         </a:rPr>
-                        <a:t>Windows 8 Pro or other operating systems available</a:t>
-                      </a:r>
-                    </a:p>
-                  </a:txBody>
-                  <a:tcPr/>
-                </a:tc>
-                <a:tc>
-                  <a:txBody>
-                    <a:bodyPr/>
-                    <a:lstStyle/>
-                    <a:p>
-                      <a:r>
-                        <a:rPr sz="900" b="0">
-                          <a:solidFill>
-                            <a:srgbClr val="222222"/>
-                          </a:solidFill>
-                          <a:latin typeface="Calibri"/>
-                        </a:rPr>
-                        <a:t>Windows 8 Pro or other operating systems available</a:t>
-                      </a:r>
-                    </a:p>
-                  </a:txBody>
-                  <a:tcPr/>
-                </a:tc>
-                <a:tc>
-                  <a:txBody>
-                    <a:bodyPr/>
-                    <a:lstStyle/>
-                    <a:p>
-                      <a:r>
-                        <a:rPr sz="900" b="0">
-                          <a:solidFill>
-                            <a:srgbClr val="222222"/>
-                          </a:solidFill>
-                          <a:latin typeface="Calibri"/>
-                        </a:rPr>
-                        <a:t>Windows 8 Pro or other operating systems available</a:t>
-                      </a:r>
-                    </a:p>
-                  </a:txBody>
-                  <a:tcPr/>
-                </a:tc>
-                <a:tc>
-                  <a:txBody>
-                    <a:bodyPr/>
-                    <a:lstStyle/>
-                    <a:p>
-                      <a:r>
-                        <a:rPr sz="900" b="0">
-                          <a:solidFill>
-                            <a:srgbClr val="222222"/>
-                          </a:solidFill>
-                          <a:latin typeface="Calibri"/>
-                        </a:rPr>
-                        <a:t>Windows 8 Pro or other operating systems available</a:t>
-                      </a:r>
-                    </a:p>
-                  </a:txBody>
-                  <a:tcPr/>
-                </a:tc>
-                <a:tc>
-                  <a:txBody>
-                    <a:bodyPr/>
-                    <a:lstStyle/>
-                    <a:p>
-                      <a:r>
-                        <a:rPr sz="900" b="0">
-                          <a:solidFill>
-                            <a:srgbClr val="222222"/>
-                          </a:solidFill>
-                          <a:latin typeface="Calibri"/>
-                        </a:rPr>
-                        <a:t>Windows 8.1</a:t>
-                      </a:r>
-                    </a:p>
-                  </a:txBody>
-                  <a:tcPr/>
-                </a:tc>
-              </a:tr>
-              <a:tr h="617220">
-                <a:tc>
-                  <a:txBody>
-                    <a:bodyPr/>
-                    <a:lstStyle/>
-                    <a:p>
-                      <a:r>
-                        <a:rPr sz="1000" b="1">
-                          <a:solidFill>
-                            <a:srgbClr val="222222"/>
-                          </a:solidFill>
-                          <a:latin typeface="Calibri"/>
-                        </a:rPr>
-                        <a:t>Ports</a:t>
-                      </a:r>
-                    </a:p>
-                  </a:txBody>
-                  <a:tcPr/>
-                </a:tc>
-                <a:tc>
-                  <a:txBody>
-                    <a:bodyPr/>
-                    <a:lstStyle/>
-                    <a:p>
-                      <a:r>
-                        <a:rPr sz="900" b="0">
-                          <a:solidFill>
-                            <a:srgbClr val="222222"/>
-                          </a:solidFill>
-                          <a:latin typeface="Calibri"/>
-                        </a:rPr>
-                        <a:t>1 Media Card Reader; 2 USB 3.0; 1 USB 3.0 charging; 1 DisplayPort 1.2; 1 VGA; 1 combo stereo headphone/mic jack; 1 AC power; 1 RJ-45; 1 side docking connector</a:t>
-                      </a:r>
-                    </a:p>
-                  </a:txBody>
-                  <a:tcPr/>
-                </a:tc>
-                <a:tc>
-                  <a:txBody>
-                    <a:bodyPr/>
-                    <a:lstStyle/>
-                    <a:p>
-                      <a:r>
-                        <a:rPr sz="900" b="0">
-                          <a:solidFill>
-                            <a:srgbClr val="222222"/>
-                          </a:solidFill>
-                          <a:latin typeface="Calibri"/>
-                        </a:rPr>
-                        <a:t>1 Media Card Reader; 2 USB 3.0; 1 USB 3.0 charging; 1 DisplayPort 1.2; 1 VGA; 1 combo stereo headphone/mic jack; 1 AC power; 1 RJ-45; 1 side docking connector</a:t>
-                      </a:r>
-                    </a:p>
-                  </a:txBody>
-                  <a:tcPr/>
-                </a:tc>
-                <a:tc>
-                  <a:txBody>
-                    <a:bodyPr/>
-                    <a:lstStyle/>
-                    <a:p>
-                      <a:r>
-                        <a:rPr sz="900" b="0">
-                          <a:solidFill>
-                            <a:srgbClr val="222222"/>
-                          </a:solidFill>
-                          <a:latin typeface="Calibri"/>
-                        </a:rPr>
-                        <a:t>2 USB 3.0; 2 USB 2.0; 1 HDMI; 1 stereo microphone in; 1 headphone/line-out; 1 RJ-45; 1 power; 1 VGA</a:t>
-                      </a:r>
-                    </a:p>
-                  </a:txBody>
-                  <a:tcPr/>
-                </a:tc>
-                <a:tc>
-                  <a:txBody>
-                    <a:bodyPr/>
-                    <a:lstStyle/>
-                    <a:p>
-                      <a:r>
-                        <a:rPr sz="900" b="0">
-                          <a:solidFill>
-                            <a:srgbClr val="222222"/>
-                          </a:solidFill>
-                          <a:latin typeface="Calibri"/>
-                        </a:rPr>
-                        <a:t>1 Media Card Reader; 3 USB 3.0; 1 USB 3.0 charging; 1 DisplayPort 1.2; 1 VGA; 1 combo stereo headphone/mic jack; 1 AC power; 1 RJ-45; 1 side docking connector</a:t>
-                      </a:r>
-                    </a:p>
-                  </a:txBody>
-                  <a:tcPr/>
-                </a:tc>
-                <a:tc>
-                  <a:txBody>
-                    <a:bodyPr/>
-                    <a:lstStyle/>
-                    <a:p>
-                      <a:r>
-                        <a:rPr sz="900" b="0">
-                          <a:solidFill>
-                            <a:srgbClr val="222222"/>
-                          </a:solidFill>
-                          <a:latin typeface="Calibri"/>
-                        </a:rPr>
-                        <a:t>1 USB 3.0; 2 USB 2.0; 1 HDMI; 1 VGA; 1 stereo microphone-in combo jack; 1 AC power; 1 RJ-45 (Ethernet)</a:t>
-                      </a:r>
-                    </a:p>
-                  </a:txBody>
-                  <a:tcPr/>
-                </a:tc>
-              </a:tr>
-              <a:tr h="617220">
-                <a:tc>
-                  <a:txBody>
-                    <a:bodyPr/>
-                    <a:lstStyle/>
-                    <a:p>
-                      <a:r>
-                        <a:rPr sz="1000" b="1">
-                          <a:solidFill>
-                            <a:srgbClr val="222222"/>
-                          </a:solidFill>
-                          <a:latin typeface="Calibri"/>
-                        </a:rPr>
-                        <a:t>Ram</a:t>
-                      </a:r>
-                    </a:p>
-                  </a:txBody>
-                  <a:tcPr/>
-                </a:tc>
-                <a:tc>
-                  <a:txBody>
-                    <a:bodyPr/>
-                    <a:lstStyle/>
-                    <a:p>
-                      <a:r>
-                        <a:rPr sz="900" b="0">
-                          <a:solidFill>
-                            <a:srgbClr val="222222"/>
-                          </a:solidFill>
-                          <a:latin typeface="Calibri"/>
-                        </a:rPr>
-                        <a:t>Upgradeable to 16 GB</a:t>
-                      </a:r>
-                    </a:p>
-                  </a:txBody>
-                  <a:tcPr/>
-                </a:tc>
-                <a:tc>
-                  <a:txBody>
-                    <a:bodyPr/>
-                    <a:lstStyle/>
-                    <a:p>
-                      <a:r>
-                        <a:rPr sz="900" b="0">
-                          <a:solidFill>
-                            <a:srgbClr val="222222"/>
-                          </a:solidFill>
-                          <a:latin typeface="Calibri"/>
-                        </a:rPr>
-                        <a:t>Upgradeable to 16 GB</a:t>
-                      </a:r>
-                    </a:p>
-                  </a:txBody>
-                  <a:tcPr/>
-                </a:tc>
-                <a:tc>
-                  <a:txBody>
-                    <a:bodyPr/>
-                    <a:lstStyle/>
-                    <a:p>
-                      <a:r>
-                        <a:rPr sz="900" b="0">
-                          <a:solidFill>
-                            <a:srgbClr val="222222"/>
-                          </a:solidFill>
-                          <a:latin typeface="Calibri"/>
-                        </a:rPr>
-                        <a:t>Upgradeable to 16 GB; 2 SODIMM</a:t>
-                      </a:r>
-                    </a:p>
-                  </a:txBody>
-                  <a:tcPr/>
-                </a:tc>
-                <a:tc>
-                  <a:txBody>
-                    <a:bodyPr/>
-                    <a:lstStyle/>
-                    <a:p>
-                      <a:r>
-                        <a:rPr sz="900" b="0">
-                          <a:solidFill>
-                            <a:srgbClr val="222222"/>
-                          </a:solidFill>
-                          <a:latin typeface="Calibri"/>
-                        </a:rPr>
-                        <a:t>Upgradeable to 16 GB</a:t>
-                      </a:r>
-                    </a:p>
-                  </a:txBody>
-                  <a:tcPr/>
-                </a:tc>
-                <a:tc>
-                  <a:txBody>
-                    <a:bodyPr/>
-                    <a:lstStyle/>
-                    <a:p>
-                      <a:r>
-                        <a:rPr sz="900" b="0">
-                          <a:solidFill>
-                            <a:srgbClr val="222222"/>
-                          </a:solidFill>
-                          <a:latin typeface="Calibri"/>
-                        </a:rPr>
-                        <a:t>Standard memory up to 8,192MB; 1 SODIMM</a:t>
-                      </a:r>
-                    </a:p>
-                  </a:txBody>
-                  <a:tcPr/>
-                </a:tc>
-              </a:tr>
-              <a:tr h="617220">
-                <a:tc>
-                  <a:txBody>
-                    <a:bodyPr/>
-                    <a:lstStyle/>
-                    <a:p>
-                      <a:r>
-                        <a:rPr sz="1000" b="1">
-                          <a:solidFill>
-                            <a:srgbClr val="222222"/>
-                          </a:solidFill>
-                          <a:latin typeface="Calibri"/>
-                        </a:rPr>
-                        <a:t>Weight</a:t>
-                      </a:r>
-                    </a:p>
-                  </a:txBody>
-                  <a:tcPr/>
-                </a:tc>
-                <a:tc>
-                  <a:txBody>
-                    <a:bodyPr/>
-                    <a:lstStyle/>
-                    <a:p>
-                      <a:r>
-                        <a:rPr sz="900" b="0">
-                          <a:solidFill>
-                            <a:srgbClr val="222222"/>
-                          </a:solidFill>
-                          <a:latin typeface="Calibri"/>
-                        </a:rPr>
                         <a:t>Starting at 1.33 kg</a:t>
-                      </a:r>
-                    </a:p>
-                  </a:txBody>
-                  <a:tcPr/>
-                </a:tc>
-                <a:tc>
-                  <a:txBody>
-                    <a:bodyPr/>
-                    <a:lstStyle/>
-                    <a:p>
-                      <a:r>
-                        <a:rPr sz="900" b="0">
-                          <a:solidFill>
-                            <a:srgbClr val="222222"/>
-                          </a:solidFill>
-                          <a:latin typeface="Calibri"/>
-                        </a:rPr>
-                        <a:t>Starting at 1.58 kg</a:t>
-                      </a:r>
-                    </a:p>
-                  </a:txBody>
-                  <a:tcPr/>
-                </a:tc>
-                <a:tc>
-                  <a:txBody>
-                    <a:bodyPr/>
-                    <a:lstStyle/>
-                    <a:p>
-                      <a:r>
-                        <a:rPr sz="900" b="0">
-                          <a:solidFill>
-                            <a:srgbClr val="222222"/>
-                          </a:solidFill>
-                          <a:latin typeface="Calibri"/>
-                        </a:rPr>
-                        <a:t>Starting at 1.5 kg</a:t>
-                      </a:r>
-                    </a:p>
-                  </a:txBody>
-                  <a:tcPr/>
-                </a:tc>
-                <a:tc>
-                  <a:txBody>
-                    <a:bodyPr/>
-                    <a:lstStyle/>
-                    <a:p>
-                      <a:r>
-                        <a:rPr sz="900" b="0">
-                          <a:solidFill>
-                            <a:srgbClr val="222222"/>
-                          </a:solidFill>
-                          <a:latin typeface="Calibri"/>
-                        </a:rPr>
-                        <a:t>Starting at 1.88 kg</a:t>
-                      </a:r>
-                    </a:p>
-                  </a:txBody>
-                  <a:tcPr/>
-                </a:tc>
-                <a:tc>
-                  <a:txBody>
-                    <a:bodyPr/>
-                    <a:lstStyle/>
-                    <a:p>
-                      <a:r>
-                        <a:rPr sz="900" b="0">
-                          <a:solidFill>
-                            <a:srgbClr val="222222"/>
-                          </a:solidFill>
-                          <a:latin typeface="Calibri"/>
-                        </a:rPr>
-                        <a:t>Starting at &lt; 2 kg (Non-Touch); Starting at &lt; 2.4 kg (Touch)</a:t>
                       </a:r>
                     </a:p>
                   </a:txBody>
@@ -7435,6 +5587,1401 @@
                 <a:latin typeface="Calibri"/>
               </a:rPr>
               <a:t>Comparison Across Recommended Products</a:t>
+            </a:r>
+          </a:p>
+        </p:txBody>
+      </p:sp>
+    </p:spTree>
+  </p:cSld>
+  <p:clrMapOvr>
+    <a:masterClrMapping/>
+  </p:clrMapOvr>
+</p:sld>
+</file>
+
+<file path=ppt/slides/slide7.xml><?xml version="1.0" encoding="utf-8"?>
+<p:sld xmlns:a="http://schemas.openxmlformats.org/drawingml/2006/main" xmlns:p="http://schemas.openxmlformats.org/presentationml/2006/main" xmlns:r="http://schemas.openxmlformats.org/officeDocument/2006/relationships">
+  <p:cSld>
+    <p:spTree>
+      <p:nvGrpSpPr>
+        <p:cNvPr id="1" name=""/>
+        <p:cNvGrpSpPr/>
+        <p:nvPr/>
+      </p:nvGrpSpPr>
+      <p:grpSpPr/>
+      <p:sp>
+        <p:nvSpPr>
+          <p:cNvPr id="2" name="TextBox 1"/>
+          <p:cNvSpPr txBox="1"/>
+          <p:nvPr/>
+        </p:nvSpPr>
+        <p:spPr>
+          <a:xfrm>
+            <a:off x="457200" y="182880"/>
+            <a:ext cx="8229600" cy="548640"/>
+          </a:xfrm>
+          <a:prstGeom prst="rect">
+            <a:avLst/>
+          </a:prstGeom>
+          <a:noFill/>
+        </p:spPr>
+        <p:txBody>
+          <a:bodyPr wrap="none">
+            <a:spAutoFit/>
+          </a:bodyPr>
+          <a:lstStyle/>
+          <a:p>
+            <a:pPr>
+              <a:defRPr sz="2800" b="1"/>
+            </a:pPr>
+            <a:r>
+              <a:t>Upsell Recommendations — Page 1</a:t>
+            </a:r>
+          </a:p>
+        </p:txBody>
+      </p:sp>
+      <p:sp>
+        <p:nvSpPr>
+          <p:cNvPr id="3" name="TextBox 2"/>
+          <p:cNvSpPr txBox="1"/>
+          <p:nvPr/>
+        </p:nvSpPr>
+        <p:spPr>
+          <a:xfrm>
+            <a:off x="457200" y="1097280"/>
+            <a:ext cx="2743200" cy="365760"/>
+          </a:xfrm>
+          <a:prstGeom prst="rect">
+            <a:avLst/>
+          </a:prstGeom>
+          <a:noFill/>
+        </p:spPr>
+        <p:txBody>
+          <a:bodyPr wrap="square">
+            <a:spAutoFit/>
+          </a:bodyPr>
+          <a:lstStyle/>
+          <a:p>
+            <a:pPr algn="ctr">
+              <a:defRPr sz="2200" b="1">
+                <a:solidFill>
+                  <a:srgbClr val="000000"/>
+                </a:solidFill>
+              </a:defRPr>
+            </a:pPr>
+            <a:r>
+              <a:t>Mouse</a:t>
+            </a:r>
+          </a:p>
+        </p:txBody>
+      </p:sp>
+      <p:pic>
+        <p:nvPicPr>
+          <p:cNvPr id="4" name="Picture 3" descr="page_4_img_4.png"/>
+          <p:cNvPicPr>
+            <a:picLocks noChangeAspect="1"/>
+          </p:cNvPicPr>
+          <p:nvPr/>
+        </p:nvPicPr>
+        <p:blipFill>
+          <a:blip r:embed="rId2"/>
+          <a:stretch>
+            <a:fillRect/>
+          </a:stretch>
+        </p:blipFill>
+        <p:spPr>
+          <a:xfrm>
+            <a:off x="1504950" y="1463040"/>
+            <a:ext cx="647700" cy="914400"/>
+          </a:xfrm>
+          <a:prstGeom prst="rect">
+            <a:avLst/>
+          </a:prstGeom>
+        </p:spPr>
+      </p:pic>
+      <p:sp>
+        <p:nvSpPr>
+          <p:cNvPr id="5" name="TextBox 4"/>
+          <p:cNvSpPr txBox="1"/>
+          <p:nvPr/>
+        </p:nvSpPr>
+        <p:spPr>
+          <a:xfrm>
+            <a:off x="457200" y="2377440"/>
+            <a:ext cx="2743200" cy="329184"/>
+          </a:xfrm>
+          <a:prstGeom prst="rect">
+            <a:avLst/>
+          </a:prstGeom>
+          <a:noFill/>
+        </p:spPr>
+        <p:txBody>
+          <a:bodyPr wrap="square">
+            <a:spAutoFit/>
+          </a:bodyPr>
+          <a:lstStyle/>
+          <a:p>
+            <a:pPr algn="ctr">
+              <a:defRPr sz="1400" b="1">
+                <a:solidFill>
+                  <a:srgbClr val="000000"/>
+                </a:solidFill>
+              </a:defRPr>
+            </a:pPr>
+            <a:r>
+              <a:t>HP X4000b Bluetooth Mouse</a:t>
+            </a:r>
+          </a:p>
+        </p:txBody>
+      </p:sp>
+      <p:sp>
+        <p:nvSpPr>
+          <p:cNvPr id="6" name="TextBox 5"/>
+          <p:cNvSpPr txBox="1"/>
+          <p:nvPr/>
+        </p:nvSpPr>
+        <p:spPr>
+          <a:xfrm>
+            <a:off x="457200" y="2706624"/>
+            <a:ext cx="2743200" cy="585216"/>
+          </a:xfrm>
+          <a:prstGeom prst="rect">
+            <a:avLst/>
+          </a:prstGeom>
+          <a:noFill/>
+        </p:spPr>
+        <p:txBody>
+          <a:bodyPr wrap="square">
+            <a:spAutoFit/>
+          </a:bodyPr>
+          <a:lstStyle/>
+          <a:p>
+            <a:pPr algn="l">
+              <a:defRPr sz="1100" b="0">
+                <a:solidFill>
+                  <a:srgbClr val="000000"/>
+                </a:solidFill>
+              </a:defRPr>
+            </a:pPr>
+            <a:r>
+              <a:t>Be more productive on the go with the sleek, stylish HP X4000b Bluetoo</a:t>
+            </a:r>
+          </a:p>
+        </p:txBody>
+      </p:sp>
+      <p:pic>
+        <p:nvPicPr>
+          <p:cNvPr id="7" name="Picture 6" descr="page_4_img_5.png"/>
+          <p:cNvPicPr>
+            <a:picLocks noChangeAspect="1"/>
+          </p:cNvPicPr>
+          <p:nvPr/>
+        </p:nvPicPr>
+        <p:blipFill>
+          <a:blip r:embed="rId3"/>
+          <a:stretch>
+            <a:fillRect/>
+          </a:stretch>
+        </p:blipFill>
+        <p:spPr>
+          <a:xfrm>
+            <a:off x="1521823" y="3291840"/>
+            <a:ext cx="613954" cy="914400"/>
+          </a:xfrm>
+          <a:prstGeom prst="rect">
+            <a:avLst/>
+          </a:prstGeom>
+        </p:spPr>
+      </p:pic>
+      <p:sp>
+        <p:nvSpPr>
+          <p:cNvPr id="8" name="TextBox 7"/>
+          <p:cNvSpPr txBox="1"/>
+          <p:nvPr/>
+        </p:nvSpPr>
+        <p:spPr>
+          <a:xfrm>
+            <a:off x="457200" y="4206240"/>
+            <a:ext cx="2743200" cy="329184"/>
+          </a:xfrm>
+          <a:prstGeom prst="rect">
+            <a:avLst/>
+          </a:prstGeom>
+          <a:noFill/>
+        </p:spPr>
+        <p:txBody>
+          <a:bodyPr wrap="square">
+            <a:spAutoFit/>
+          </a:bodyPr>
+          <a:lstStyle/>
+          <a:p>
+            <a:pPr algn="ctr">
+              <a:defRPr sz="1400" b="1">
+                <a:solidFill>
+                  <a:srgbClr val="000000"/>
+                </a:solidFill>
+              </a:defRPr>
+            </a:pPr>
+            <a:r>
+              <a:t>HP Bluetooth TTP Mouse</a:t>
+            </a:r>
+          </a:p>
+        </p:txBody>
+      </p:sp>
+      <p:sp>
+        <p:nvSpPr>
+          <p:cNvPr id="9" name="TextBox 8"/>
+          <p:cNvSpPr txBox="1"/>
+          <p:nvPr/>
+        </p:nvSpPr>
+        <p:spPr>
+          <a:xfrm>
+            <a:off x="457200" y="4535424"/>
+            <a:ext cx="2743200" cy="585216"/>
+          </a:xfrm>
+          <a:prstGeom prst="rect">
+            <a:avLst/>
+          </a:prstGeom>
+          <a:noFill/>
+        </p:spPr>
+        <p:txBody>
+          <a:bodyPr wrap="square">
+            <a:spAutoFit/>
+          </a:bodyPr>
+          <a:lstStyle/>
+          <a:p>
+            <a:pPr algn="l">
+              <a:defRPr sz="1100" b="0">
+                <a:solidFill>
+                  <a:srgbClr val="000000"/>
+                </a:solidFill>
+              </a:defRPr>
+            </a:pPr>
+          </a:p>
+        </p:txBody>
+      </p:sp>
+      <p:pic>
+        <p:nvPicPr>
+          <p:cNvPr id="10" name="Picture 9" descr="page_4_img_4.png"/>
+          <p:cNvPicPr>
+            <a:picLocks noChangeAspect="1"/>
+          </p:cNvPicPr>
+          <p:nvPr/>
+        </p:nvPicPr>
+        <p:blipFill>
+          <a:blip r:embed="rId2"/>
+          <a:stretch>
+            <a:fillRect/>
+          </a:stretch>
+        </p:blipFill>
+        <p:spPr>
+          <a:xfrm>
+            <a:off x="1504950" y="5120640"/>
+            <a:ext cx="647700" cy="914400"/>
+          </a:xfrm>
+          <a:prstGeom prst="rect">
+            <a:avLst/>
+          </a:prstGeom>
+        </p:spPr>
+      </p:pic>
+      <p:sp>
+        <p:nvSpPr>
+          <p:cNvPr id="11" name="TextBox 10"/>
+          <p:cNvSpPr txBox="1"/>
+          <p:nvPr/>
+        </p:nvSpPr>
+        <p:spPr>
+          <a:xfrm>
+            <a:off x="457200" y="6035040"/>
+            <a:ext cx="2743200" cy="329184"/>
+          </a:xfrm>
+          <a:prstGeom prst="rect">
+            <a:avLst/>
+          </a:prstGeom>
+          <a:noFill/>
+        </p:spPr>
+        <p:txBody>
+          <a:bodyPr wrap="square">
+            <a:spAutoFit/>
+          </a:bodyPr>
+          <a:lstStyle/>
+          <a:p>
+            <a:pPr algn="ctr">
+              <a:defRPr sz="1400" b="1">
+                <a:solidFill>
+                  <a:srgbClr val="000000"/>
+                </a:solidFill>
+              </a:defRPr>
+            </a:pPr>
+            <a:r>
+              <a:t>HP Mouse</a:t>
+            </a:r>
+          </a:p>
+        </p:txBody>
+      </p:sp>
+      <p:sp>
+        <p:nvSpPr>
+          <p:cNvPr id="12" name="TextBox 11"/>
+          <p:cNvSpPr txBox="1"/>
+          <p:nvPr/>
+        </p:nvSpPr>
+        <p:spPr>
+          <a:xfrm>
+            <a:off x="457200" y="6364224"/>
+            <a:ext cx="2743200" cy="585216"/>
+          </a:xfrm>
+          <a:prstGeom prst="rect">
+            <a:avLst/>
+          </a:prstGeom>
+          <a:noFill/>
+        </p:spPr>
+        <p:txBody>
+          <a:bodyPr wrap="square">
+            <a:spAutoFit/>
+          </a:bodyPr>
+          <a:lstStyle/>
+          <a:p>
+            <a:pPr algn="l">
+              <a:defRPr sz="1100" b="0">
+                <a:solidFill>
+                  <a:srgbClr val="000000"/>
+                </a:solidFill>
+              </a:defRPr>
+            </a:pPr>
+          </a:p>
+        </p:txBody>
+      </p:sp>
+      <p:sp>
+        <p:nvSpPr>
+          <p:cNvPr id="13" name="TextBox 12"/>
+          <p:cNvSpPr txBox="1"/>
+          <p:nvPr/>
+        </p:nvSpPr>
+        <p:spPr>
+          <a:xfrm>
+            <a:off x="3200400" y="1097280"/>
+            <a:ext cx="2743200" cy="365760"/>
+          </a:xfrm>
+          <a:prstGeom prst="rect">
+            <a:avLst/>
+          </a:prstGeom>
+          <a:noFill/>
+        </p:spPr>
+        <p:txBody>
+          <a:bodyPr wrap="square">
+            <a:spAutoFit/>
+          </a:bodyPr>
+          <a:lstStyle/>
+          <a:p>
+            <a:pPr algn="ctr">
+              <a:defRPr sz="2200" b="1">
+                <a:solidFill>
+                  <a:srgbClr val="000000"/>
+                </a:solidFill>
+              </a:defRPr>
+            </a:pPr>
+            <a:r>
+              <a:t>Keyboard</a:t>
+            </a:r>
+          </a:p>
+        </p:txBody>
+      </p:sp>
+      <p:pic>
+        <p:nvPicPr>
+          <p:cNvPr id="14" name="Picture 13" descr="page_10_img_5.png"/>
+          <p:cNvPicPr>
+            <a:picLocks noChangeAspect="1"/>
+          </p:cNvPicPr>
+          <p:nvPr/>
+        </p:nvPicPr>
+        <p:blipFill>
+          <a:blip r:embed="rId4"/>
+          <a:stretch>
+            <a:fillRect/>
+          </a:stretch>
+        </p:blipFill>
+        <p:spPr>
+          <a:xfrm>
+            <a:off x="3749040" y="1463040"/>
+            <a:ext cx="1645920" cy="914400"/>
+          </a:xfrm>
+          <a:prstGeom prst="rect">
+            <a:avLst/>
+          </a:prstGeom>
+        </p:spPr>
+      </p:pic>
+      <p:sp>
+        <p:nvSpPr>
+          <p:cNvPr id="15" name="TextBox 14"/>
+          <p:cNvSpPr txBox="1"/>
+          <p:nvPr/>
+        </p:nvSpPr>
+        <p:spPr>
+          <a:xfrm>
+            <a:off x="3200400" y="2377440"/>
+            <a:ext cx="2743200" cy="329184"/>
+          </a:xfrm>
+          <a:prstGeom prst="rect">
+            <a:avLst/>
+          </a:prstGeom>
+          <a:noFill/>
+        </p:spPr>
+        <p:txBody>
+          <a:bodyPr wrap="square">
+            <a:spAutoFit/>
+          </a:bodyPr>
+          <a:lstStyle/>
+          <a:p>
+            <a:pPr algn="ctr">
+              <a:defRPr sz="1400" b="1">
+                <a:solidFill>
+                  <a:srgbClr val="000000"/>
+                </a:solidFill>
+              </a:defRPr>
+            </a:pPr>
+            <a:r>
+              <a:t>HP Slim Bluetooth Keyboard</a:t>
+            </a:r>
+          </a:p>
+        </p:txBody>
+      </p:sp>
+      <p:sp>
+        <p:nvSpPr>
+          <p:cNvPr id="16" name="TextBox 15"/>
+          <p:cNvSpPr txBox="1"/>
+          <p:nvPr/>
+        </p:nvSpPr>
+        <p:spPr>
+          <a:xfrm>
+            <a:off x="3200400" y="2706624"/>
+            <a:ext cx="2743200" cy="585216"/>
+          </a:xfrm>
+          <a:prstGeom prst="rect">
+            <a:avLst/>
+          </a:prstGeom>
+          <a:noFill/>
+        </p:spPr>
+        <p:txBody>
+          <a:bodyPr wrap="square">
+            <a:spAutoFit/>
+          </a:bodyPr>
+          <a:lstStyle/>
+          <a:p>
+            <a:pPr algn="l">
+              <a:defRPr sz="1100" b="0">
+                <a:solidFill>
+                  <a:srgbClr val="000000"/>
+                </a:solidFill>
+              </a:defRPr>
+            </a:pPr>
+            <a:r>
+              <a:t>The HP Slim Bluetooth Keyboard is a thin and light wireless keyboard t</a:t>
+            </a:r>
+          </a:p>
+        </p:txBody>
+      </p:sp>
+      <p:sp>
+        <p:nvSpPr>
+          <p:cNvPr id="17" name="TextBox 16"/>
+          <p:cNvSpPr txBox="1"/>
+          <p:nvPr/>
+        </p:nvSpPr>
+        <p:spPr>
+          <a:xfrm>
+            <a:off x="5943600" y="1097280"/>
+            <a:ext cx="2743200" cy="365760"/>
+          </a:xfrm>
+          <a:prstGeom prst="rect">
+            <a:avLst/>
+          </a:prstGeom>
+          <a:noFill/>
+        </p:spPr>
+        <p:txBody>
+          <a:bodyPr wrap="square">
+            <a:spAutoFit/>
+          </a:bodyPr>
+          <a:lstStyle/>
+          <a:p>
+            <a:pPr algn="ctr">
+              <a:defRPr sz="2200" b="1">
+                <a:solidFill>
+                  <a:srgbClr val="000000"/>
+                </a:solidFill>
+              </a:defRPr>
+            </a:pPr>
+            <a:r>
+              <a:t>Backpack</a:t>
+            </a:r>
+          </a:p>
+        </p:txBody>
+      </p:sp>
+      <p:pic>
+        <p:nvPicPr>
+          <p:cNvPr id="18" name="Picture 17" descr="page_28_img_15.png"/>
+          <p:cNvPicPr>
+            <a:picLocks noChangeAspect="1"/>
+          </p:cNvPicPr>
+          <p:nvPr/>
+        </p:nvPicPr>
+        <p:blipFill>
+          <a:blip r:embed="rId5"/>
+          <a:stretch>
+            <a:fillRect/>
+          </a:stretch>
+        </p:blipFill>
+        <p:spPr>
+          <a:xfrm>
+            <a:off x="6927640" y="1463040"/>
+            <a:ext cx="775120" cy="914400"/>
+          </a:xfrm>
+          <a:prstGeom prst="rect">
+            <a:avLst/>
+          </a:prstGeom>
+        </p:spPr>
+      </p:pic>
+      <p:sp>
+        <p:nvSpPr>
+          <p:cNvPr id="19" name="TextBox 18"/>
+          <p:cNvSpPr txBox="1"/>
+          <p:nvPr/>
+        </p:nvSpPr>
+        <p:spPr>
+          <a:xfrm>
+            <a:off x="5943600" y="2377440"/>
+            <a:ext cx="2743200" cy="329184"/>
+          </a:xfrm>
+          <a:prstGeom prst="rect">
+            <a:avLst/>
+          </a:prstGeom>
+          <a:noFill/>
+        </p:spPr>
+        <p:txBody>
+          <a:bodyPr wrap="square">
+            <a:spAutoFit/>
+          </a:bodyPr>
+          <a:lstStyle/>
+          <a:p>
+            <a:pPr algn="ctr">
+              <a:defRPr sz="1400" b="1">
+                <a:solidFill>
+                  <a:srgbClr val="000000"/>
+                </a:solidFill>
+              </a:defRPr>
+            </a:pPr>
+            <a:r>
+              <a:t>HP Business Nylon Backpack</a:t>
+            </a:r>
+          </a:p>
+        </p:txBody>
+      </p:sp>
+      <p:sp>
+        <p:nvSpPr>
+          <p:cNvPr id="20" name="TextBox 19"/>
+          <p:cNvSpPr txBox="1"/>
+          <p:nvPr/>
+        </p:nvSpPr>
+        <p:spPr>
+          <a:xfrm>
+            <a:off x="5943600" y="2706624"/>
+            <a:ext cx="2743200" cy="585216"/>
+          </a:xfrm>
+          <a:prstGeom prst="rect">
+            <a:avLst/>
+          </a:prstGeom>
+          <a:noFill/>
+        </p:spPr>
+        <p:txBody>
+          <a:bodyPr wrap="square">
+            <a:spAutoFit/>
+          </a:bodyPr>
+          <a:lstStyle/>
+          <a:p>
+            <a:pPr algn="l">
+              <a:defRPr sz="1100" b="0">
+                <a:solidFill>
+                  <a:srgbClr val="000000"/>
+                </a:solidFill>
+              </a:defRPr>
+            </a:pPr>
+            <a:r>
+              <a:t>HP Business Nylon Backpack offers a sturdy, all-purpose backpack for m</a:t>
+            </a:r>
+          </a:p>
+        </p:txBody>
+      </p:sp>
+      <p:pic>
+        <p:nvPicPr>
+          <p:cNvPr id="21" name="Picture 20" descr="page_28_img_12.png"/>
+          <p:cNvPicPr>
+            <a:picLocks noChangeAspect="1"/>
+          </p:cNvPicPr>
+          <p:nvPr/>
+        </p:nvPicPr>
+        <p:blipFill>
+          <a:blip r:embed="rId6"/>
+          <a:stretch>
+            <a:fillRect/>
+          </a:stretch>
+        </p:blipFill>
+        <p:spPr>
+          <a:xfrm>
+            <a:off x="6861153" y="3291840"/>
+            <a:ext cx="908093" cy="914400"/>
+          </a:xfrm>
+          <a:prstGeom prst="rect">
+            <a:avLst/>
+          </a:prstGeom>
+        </p:spPr>
+      </p:pic>
+      <p:sp>
+        <p:nvSpPr>
+          <p:cNvPr id="22" name="TextBox 21"/>
+          <p:cNvSpPr txBox="1"/>
+          <p:nvPr/>
+        </p:nvSpPr>
+        <p:spPr>
+          <a:xfrm>
+            <a:off x="5943600" y="4206240"/>
+            <a:ext cx="2743200" cy="329184"/>
+          </a:xfrm>
+          <a:prstGeom prst="rect">
+            <a:avLst/>
+          </a:prstGeom>
+          <a:noFill/>
+        </p:spPr>
+        <p:txBody>
+          <a:bodyPr wrap="square">
+            <a:spAutoFit/>
+          </a:bodyPr>
+          <a:lstStyle/>
+          <a:p>
+            <a:pPr algn="ctr">
+              <a:defRPr sz="1400" b="1">
+                <a:solidFill>
+                  <a:srgbClr val="000000"/>
+                </a:solidFill>
+              </a:defRPr>
+            </a:pPr>
+            <a:r>
+              <a:t>HP Professional Backpack Case</a:t>
+            </a:r>
+          </a:p>
+        </p:txBody>
+      </p:sp>
+      <p:sp>
+        <p:nvSpPr>
+          <p:cNvPr id="23" name="TextBox 22"/>
+          <p:cNvSpPr txBox="1"/>
+          <p:nvPr/>
+        </p:nvSpPr>
+        <p:spPr>
+          <a:xfrm>
+            <a:off x="5943600" y="4535424"/>
+            <a:ext cx="2743200" cy="585216"/>
+          </a:xfrm>
+          <a:prstGeom prst="rect">
+            <a:avLst/>
+          </a:prstGeom>
+          <a:noFill/>
+        </p:spPr>
+        <p:txBody>
+          <a:bodyPr wrap="square">
+            <a:spAutoFit/>
+          </a:bodyPr>
+          <a:lstStyle/>
+          <a:p>
+            <a:pPr algn="l">
+              <a:defRPr sz="1100" b="0">
+                <a:solidFill>
+                  <a:srgbClr val="000000"/>
+                </a:solidFill>
+              </a:defRPr>
+            </a:pPr>
+            <a:r>
+              <a:t>Combining comfort and function, the HP Pro-fessional Backpack Case is </a:t>
+            </a:r>
+          </a:p>
+        </p:txBody>
+      </p:sp>
+      <p:pic>
+        <p:nvPicPr>
+          <p:cNvPr id="24" name="Picture 23" descr="page_28_img_6.png"/>
+          <p:cNvPicPr>
+            <a:picLocks noChangeAspect="1"/>
+          </p:cNvPicPr>
+          <p:nvPr/>
+        </p:nvPicPr>
+        <p:blipFill>
+          <a:blip r:embed="rId7"/>
+          <a:stretch>
+            <a:fillRect/>
+          </a:stretch>
+        </p:blipFill>
+        <p:spPr>
+          <a:xfrm>
+            <a:off x="6969125" y="5120640"/>
+            <a:ext cx="692150" cy="914400"/>
+          </a:xfrm>
+          <a:prstGeom prst="rect">
+            <a:avLst/>
+          </a:prstGeom>
+        </p:spPr>
+      </p:pic>
+      <p:sp>
+        <p:nvSpPr>
+          <p:cNvPr id="25" name="TextBox 24"/>
+          <p:cNvSpPr txBox="1"/>
+          <p:nvPr/>
+        </p:nvSpPr>
+        <p:spPr>
+          <a:xfrm>
+            <a:off x="5943600" y="6035040"/>
+            <a:ext cx="2743200" cy="329184"/>
+          </a:xfrm>
+          <a:prstGeom prst="rect">
+            <a:avLst/>
+          </a:prstGeom>
+          <a:noFill/>
+        </p:spPr>
+        <p:txBody>
+          <a:bodyPr wrap="square">
+            <a:spAutoFit/>
+          </a:bodyPr>
+          <a:lstStyle/>
+          <a:p>
+            <a:pPr algn="ctr">
+              <a:defRPr sz="1400" b="1">
+                <a:solidFill>
+                  <a:srgbClr val="000000"/>
+                </a:solidFill>
+              </a:defRPr>
+            </a:pPr>
+            <a:r>
+              <a:t>HP Essential Backpack</a:t>
+            </a:r>
+          </a:p>
+        </p:txBody>
+      </p:sp>
+      <p:sp>
+        <p:nvSpPr>
+          <p:cNvPr id="26" name="TextBox 25"/>
+          <p:cNvSpPr txBox="1"/>
+          <p:nvPr/>
+        </p:nvSpPr>
+        <p:spPr>
+          <a:xfrm>
+            <a:off x="5943600" y="6364224"/>
+            <a:ext cx="2743200" cy="585216"/>
+          </a:xfrm>
+          <a:prstGeom prst="rect">
+            <a:avLst/>
+          </a:prstGeom>
+          <a:noFill/>
+        </p:spPr>
+        <p:txBody>
+          <a:bodyPr wrap="square">
+            <a:spAutoFit/>
+          </a:bodyPr>
+          <a:lstStyle/>
+          <a:p>
+            <a:pPr algn="l">
+              <a:defRPr sz="1100" b="0">
+                <a:solidFill>
+                  <a:srgbClr val="000000"/>
+                </a:solidFill>
+              </a:defRPr>
+            </a:pPr>
+            <a:r>
+              <a:t>The HP Essential Backpack is a great notebook carrying solution for bo</a:t>
+            </a:r>
+          </a:p>
+        </p:txBody>
+      </p:sp>
+    </p:spTree>
+  </p:cSld>
+  <p:clrMapOvr>
+    <a:masterClrMapping/>
+  </p:clrMapOvr>
+</p:sld>
+</file>
+
+<file path=ppt/slides/slide8.xml><?xml version="1.0" encoding="utf-8"?>
+<p:sld xmlns:a="http://schemas.openxmlformats.org/drawingml/2006/main" xmlns:p="http://schemas.openxmlformats.org/presentationml/2006/main" xmlns:r="http://schemas.openxmlformats.org/officeDocument/2006/relationships">
+  <p:cSld>
+    <p:spTree>
+      <p:nvGrpSpPr>
+        <p:cNvPr id="1" name=""/>
+        <p:cNvGrpSpPr/>
+        <p:nvPr/>
+      </p:nvGrpSpPr>
+      <p:grpSpPr/>
+      <p:sp>
+        <p:nvSpPr>
+          <p:cNvPr id="2" name="TextBox 1"/>
+          <p:cNvSpPr txBox="1"/>
+          <p:nvPr/>
+        </p:nvSpPr>
+        <p:spPr>
+          <a:xfrm>
+            <a:off x="457200" y="182880"/>
+            <a:ext cx="8229600" cy="548640"/>
+          </a:xfrm>
+          <a:prstGeom prst="rect">
+            <a:avLst/>
+          </a:prstGeom>
+          <a:noFill/>
+        </p:spPr>
+        <p:txBody>
+          <a:bodyPr wrap="none">
+            <a:spAutoFit/>
+          </a:bodyPr>
+          <a:lstStyle/>
+          <a:p>
+            <a:pPr>
+              <a:defRPr sz="2800" b="1"/>
+            </a:pPr>
+            <a:r>
+              <a:t>Upsell Recommendations — Page 2</a:t>
+            </a:r>
+          </a:p>
+        </p:txBody>
+      </p:sp>
+      <p:sp>
+        <p:nvSpPr>
+          <p:cNvPr id="3" name="TextBox 2"/>
+          <p:cNvSpPr txBox="1"/>
+          <p:nvPr/>
+        </p:nvSpPr>
+        <p:spPr>
+          <a:xfrm>
+            <a:off x="457200" y="1097280"/>
+            <a:ext cx="2743200" cy="365760"/>
+          </a:xfrm>
+          <a:prstGeom prst="rect">
+            <a:avLst/>
+          </a:prstGeom>
+          <a:noFill/>
+        </p:spPr>
+        <p:txBody>
+          <a:bodyPr wrap="square">
+            <a:spAutoFit/>
+          </a:bodyPr>
+          <a:lstStyle/>
+          <a:p>
+            <a:pPr algn="ctr">
+              <a:defRPr sz="2200" b="1">
+                <a:solidFill>
+                  <a:srgbClr val="000000"/>
+                </a:solidFill>
+              </a:defRPr>
+            </a:pPr>
+            <a:r>
+              <a:t>Sleeve</a:t>
+            </a:r>
+          </a:p>
+        </p:txBody>
+      </p:sp>
+      <p:pic>
+        <p:nvPicPr>
+          <p:cNvPr id="4" name="Picture 3" descr="page_28_img_9.png"/>
+          <p:cNvPicPr>
+            <a:picLocks noChangeAspect="1"/>
+          </p:cNvPicPr>
+          <p:nvPr/>
+        </p:nvPicPr>
+        <p:blipFill>
+          <a:blip r:embed="rId2"/>
+          <a:stretch>
+            <a:fillRect/>
+          </a:stretch>
+        </p:blipFill>
+        <p:spPr>
+          <a:xfrm>
+            <a:off x="1272487" y="1463040"/>
+            <a:ext cx="1112626" cy="914400"/>
+          </a:xfrm>
+          <a:prstGeom prst="rect">
+            <a:avLst/>
+          </a:prstGeom>
+        </p:spPr>
+      </p:pic>
+      <p:sp>
+        <p:nvSpPr>
+          <p:cNvPr id="5" name="TextBox 4"/>
+          <p:cNvSpPr txBox="1"/>
+          <p:nvPr/>
+        </p:nvSpPr>
+        <p:spPr>
+          <a:xfrm>
+            <a:off x="457200" y="2377440"/>
+            <a:ext cx="2743200" cy="329184"/>
+          </a:xfrm>
+          <a:prstGeom prst="rect">
+            <a:avLst/>
+          </a:prstGeom>
+          <a:noFill/>
+        </p:spPr>
+        <p:txBody>
+          <a:bodyPr wrap="square">
+            <a:spAutoFit/>
+          </a:bodyPr>
+          <a:lstStyle/>
+          <a:p>
+            <a:pPr algn="ctr">
+              <a:defRPr sz="1400" b="1">
+                <a:solidFill>
+                  <a:srgbClr val="000000"/>
+                </a:solidFill>
+              </a:defRPr>
+            </a:pPr>
+            <a:r>
+              <a:t>HP ElitePad Case</a:t>
+            </a:r>
+          </a:p>
+        </p:txBody>
+      </p:sp>
+      <p:sp>
+        <p:nvSpPr>
+          <p:cNvPr id="6" name="TextBox 5"/>
+          <p:cNvSpPr txBox="1"/>
+          <p:nvPr/>
+        </p:nvSpPr>
+        <p:spPr>
+          <a:xfrm>
+            <a:off x="457200" y="2706624"/>
+            <a:ext cx="2743200" cy="585216"/>
+          </a:xfrm>
+          <a:prstGeom prst="rect">
+            <a:avLst/>
+          </a:prstGeom>
+          <a:noFill/>
+        </p:spPr>
+        <p:txBody>
+          <a:bodyPr wrap="square">
+            <a:spAutoFit/>
+          </a:bodyPr>
+          <a:lstStyle/>
+          <a:p>
+            <a:pPr algn="l">
+              <a:defRPr sz="1100" b="0">
+                <a:solidFill>
+                  <a:srgbClr val="000000"/>
+                </a:solidFill>
+              </a:defRPr>
+            </a:pPr>
+            <a:r>
+              <a:t>Sophistication. Durability. We've got you covered. Carry your HP Elite</a:t>
+            </a:r>
+          </a:p>
+        </p:txBody>
+      </p:sp>
+      <p:pic>
+        <p:nvPicPr>
+          <p:cNvPr id="7" name="Picture 6" descr="page_28_img_10.png"/>
+          <p:cNvPicPr>
+            <a:picLocks noChangeAspect="1"/>
+          </p:cNvPicPr>
+          <p:nvPr/>
+        </p:nvPicPr>
+        <p:blipFill>
+          <a:blip r:embed="rId3"/>
+          <a:stretch>
+            <a:fillRect/>
+          </a:stretch>
+        </p:blipFill>
+        <p:spPr>
+          <a:xfrm>
+            <a:off x="1113046" y="3291840"/>
+            <a:ext cx="1431508" cy="914400"/>
+          </a:xfrm>
+          <a:prstGeom prst="rect">
+            <a:avLst/>
+          </a:prstGeom>
+        </p:spPr>
+      </p:pic>
+      <p:sp>
+        <p:nvSpPr>
+          <p:cNvPr id="8" name="TextBox 7"/>
+          <p:cNvSpPr txBox="1"/>
+          <p:nvPr/>
+        </p:nvSpPr>
+        <p:spPr>
+          <a:xfrm>
+            <a:off x="457200" y="4206240"/>
+            <a:ext cx="2743200" cy="329184"/>
+          </a:xfrm>
+          <a:prstGeom prst="rect">
+            <a:avLst/>
+          </a:prstGeom>
+          <a:noFill/>
+        </p:spPr>
+        <p:txBody>
+          <a:bodyPr wrap="square">
+            <a:spAutoFit/>
+          </a:bodyPr>
+          <a:lstStyle/>
+          <a:p>
+            <a:pPr algn="ctr">
+              <a:defRPr sz="1400" b="1">
+                <a:solidFill>
+                  <a:srgbClr val="000000"/>
+                </a:solidFill>
+              </a:defRPr>
+            </a:pPr>
+            <a:r>
+              <a:t>HP ElitePad Rugged Case</a:t>
+            </a:r>
+          </a:p>
+        </p:txBody>
+      </p:sp>
+      <p:sp>
+        <p:nvSpPr>
+          <p:cNvPr id="9" name="TextBox 8"/>
+          <p:cNvSpPr txBox="1"/>
+          <p:nvPr/>
+        </p:nvSpPr>
+        <p:spPr>
+          <a:xfrm>
+            <a:off x="457200" y="4535424"/>
+            <a:ext cx="2743200" cy="585216"/>
+          </a:xfrm>
+          <a:prstGeom prst="rect">
+            <a:avLst/>
+          </a:prstGeom>
+          <a:noFill/>
+        </p:spPr>
+        <p:txBody>
+          <a:bodyPr wrap="square">
+            <a:spAutoFit/>
+          </a:bodyPr>
+          <a:lstStyle/>
+          <a:p>
+            <a:pPr algn="l">
+              <a:defRPr sz="1100" b="0">
+                <a:solidFill>
+                  <a:srgbClr val="000000"/>
+                </a:solidFill>
+              </a:defRPr>
+            </a:pPr>
+            <a:r>
+              <a:t>Help protect your HP ElitePad when you work with a business rugged env</a:t>
+            </a:r>
+          </a:p>
+        </p:txBody>
+      </p:sp>
+      <p:sp>
+        <p:nvSpPr>
+          <p:cNvPr id="10" name="TextBox 9"/>
+          <p:cNvSpPr txBox="1"/>
+          <p:nvPr/>
+        </p:nvSpPr>
+        <p:spPr>
+          <a:xfrm>
+            <a:off x="3200400" y="1097280"/>
+            <a:ext cx="2743200" cy="365760"/>
+          </a:xfrm>
+          <a:prstGeom prst="rect">
+            <a:avLst/>
+          </a:prstGeom>
+          <a:noFill/>
+        </p:spPr>
+        <p:txBody>
+          <a:bodyPr wrap="square">
+            <a:spAutoFit/>
+          </a:bodyPr>
+          <a:lstStyle/>
+          <a:p>
+            <a:pPr algn="ctr">
+              <a:defRPr sz="2200" b="1">
+                <a:solidFill>
+                  <a:srgbClr val="000000"/>
+                </a:solidFill>
+              </a:defRPr>
+            </a:pPr>
+            <a:r>
+              <a:t>Docking Station</a:t>
+            </a:r>
+          </a:p>
+        </p:txBody>
+      </p:sp>
+      <p:pic>
+        <p:nvPicPr>
+          <p:cNvPr id="11" name="Picture 10" descr="page_10_img_4.png"/>
+          <p:cNvPicPr>
+            <a:picLocks noChangeAspect="1"/>
+          </p:cNvPicPr>
+          <p:nvPr/>
+        </p:nvPicPr>
+        <p:blipFill>
+          <a:blip r:embed="rId4"/>
+          <a:stretch>
+            <a:fillRect/>
+          </a:stretch>
+        </p:blipFill>
+        <p:spPr>
+          <a:xfrm>
+            <a:off x="3763736" y="1463040"/>
+            <a:ext cx="1616528" cy="914400"/>
+          </a:xfrm>
+          <a:prstGeom prst="rect">
+            <a:avLst/>
+          </a:prstGeom>
+        </p:spPr>
+      </p:pic>
+      <p:sp>
+        <p:nvSpPr>
+          <p:cNvPr id="12" name="TextBox 11"/>
+          <p:cNvSpPr txBox="1"/>
+          <p:nvPr/>
+        </p:nvSpPr>
+        <p:spPr>
+          <a:xfrm>
+            <a:off x="3200400" y="2377440"/>
+            <a:ext cx="2743200" cy="329184"/>
+          </a:xfrm>
+          <a:prstGeom prst="rect">
+            <a:avLst/>
+          </a:prstGeom>
+          <a:noFill/>
+        </p:spPr>
+        <p:txBody>
+          <a:bodyPr wrap="square">
+            <a:spAutoFit/>
+          </a:bodyPr>
+          <a:lstStyle/>
+          <a:p>
+            <a:pPr algn="ctr">
+              <a:defRPr sz="1400" b="1">
+                <a:solidFill>
+                  <a:srgbClr val="000000"/>
+                </a:solidFill>
+              </a:defRPr>
+            </a:pPr>
+            <a:r>
+              <a:t>HP ElitePad Productivity Jacket</a:t>
+            </a:r>
+          </a:p>
+        </p:txBody>
+      </p:sp>
+      <p:sp>
+        <p:nvSpPr>
+          <p:cNvPr id="13" name="TextBox 12"/>
+          <p:cNvSpPr txBox="1"/>
+          <p:nvPr/>
+        </p:nvSpPr>
+        <p:spPr>
+          <a:xfrm>
+            <a:off x="3200400" y="2706624"/>
+            <a:ext cx="2743200" cy="585216"/>
+          </a:xfrm>
+          <a:prstGeom prst="rect">
+            <a:avLst/>
+          </a:prstGeom>
+          <a:noFill/>
+        </p:spPr>
+        <p:txBody>
+          <a:bodyPr wrap="square">
+            <a:spAutoFit/>
+          </a:bodyPr>
+          <a:lstStyle/>
+          <a:p>
+            <a:pPr algn="l">
+              <a:defRPr sz="1100" b="0">
+                <a:solidFill>
+                  <a:srgbClr val="000000"/>
+                </a:solidFill>
+              </a:defRPr>
+            </a:pPr>
+            <a:r>
+              <a:t>Expand your potential by choosing from a complete suite of thoughtfull</a:t>
+            </a:r>
+          </a:p>
+        </p:txBody>
+      </p:sp>
+      <p:pic>
+        <p:nvPicPr>
+          <p:cNvPr id="14" name="Picture 13" descr="page_28_img_18.png"/>
+          <p:cNvPicPr>
+            <a:picLocks noChangeAspect="1"/>
+          </p:cNvPicPr>
+          <p:nvPr/>
+        </p:nvPicPr>
+        <p:blipFill>
+          <a:blip r:embed="rId5"/>
+          <a:stretch>
+            <a:fillRect/>
+          </a:stretch>
+        </p:blipFill>
+        <p:spPr>
+          <a:xfrm>
+            <a:off x="3709639" y="3291840"/>
+            <a:ext cx="1724721" cy="914400"/>
+          </a:xfrm>
+          <a:prstGeom prst="rect">
+            <a:avLst/>
+          </a:prstGeom>
+        </p:spPr>
+      </p:pic>
+      <p:sp>
+        <p:nvSpPr>
+          <p:cNvPr id="15" name="TextBox 14"/>
+          <p:cNvSpPr txBox="1"/>
+          <p:nvPr/>
+        </p:nvSpPr>
+        <p:spPr>
+          <a:xfrm>
+            <a:off x="3200400" y="4206240"/>
+            <a:ext cx="2743200" cy="329184"/>
+          </a:xfrm>
+          <a:prstGeom prst="rect">
+            <a:avLst/>
+          </a:prstGeom>
+          <a:noFill/>
+        </p:spPr>
+        <p:txBody>
+          <a:bodyPr wrap="square">
+            <a:spAutoFit/>
+          </a:bodyPr>
+          <a:lstStyle/>
+          <a:p>
+            <a:pPr algn="ctr">
+              <a:defRPr sz="1400" b="1">
+                <a:solidFill>
+                  <a:srgbClr val="000000"/>
+                </a:solidFill>
+              </a:defRPr>
+            </a:pPr>
+            <a:r>
+              <a:t>HP 2012 230W Advanced Docking Station</a:t>
+            </a:r>
+          </a:p>
+        </p:txBody>
+      </p:sp>
+      <p:sp>
+        <p:nvSpPr>
+          <p:cNvPr id="16" name="TextBox 15"/>
+          <p:cNvSpPr txBox="1"/>
+          <p:nvPr/>
+        </p:nvSpPr>
+        <p:spPr>
+          <a:xfrm>
+            <a:off x="3200400" y="4535424"/>
+            <a:ext cx="2743200" cy="585216"/>
+          </a:xfrm>
+          <a:prstGeom prst="rect">
+            <a:avLst/>
+          </a:prstGeom>
+          <a:noFill/>
+        </p:spPr>
+        <p:txBody>
+          <a:bodyPr wrap="square">
+            <a:spAutoFit/>
+          </a:bodyPr>
+          <a:lstStyle/>
+          <a:p>
+            <a:pPr algn="l">
+              <a:defRPr sz="1100" b="0">
+                <a:solidFill>
+                  <a:srgbClr val="000000"/>
+                </a:solidFill>
+              </a:defRPr>
+            </a:pPr>
+            <a:r>
+              <a:t>HP offers a full line of docking stations designed exclusively for sel</a:t>
+            </a:r>
+          </a:p>
+        </p:txBody>
+      </p:sp>
+      <p:pic>
+        <p:nvPicPr>
+          <p:cNvPr id="17" name="Picture 16" descr="page_28_img_4.png"/>
+          <p:cNvPicPr>
+            <a:picLocks noChangeAspect="1"/>
+          </p:cNvPicPr>
+          <p:nvPr/>
+        </p:nvPicPr>
+        <p:blipFill>
+          <a:blip r:embed="rId6"/>
+          <a:stretch>
+            <a:fillRect/>
+          </a:stretch>
+        </p:blipFill>
+        <p:spPr>
+          <a:xfrm>
+            <a:off x="3863009" y="5120640"/>
+            <a:ext cx="1417982" cy="914400"/>
+          </a:xfrm>
+          <a:prstGeom prst="rect">
+            <a:avLst/>
+          </a:prstGeom>
+        </p:spPr>
+      </p:pic>
+      <p:sp>
+        <p:nvSpPr>
+          <p:cNvPr id="18" name="TextBox 17"/>
+          <p:cNvSpPr txBox="1"/>
+          <p:nvPr/>
+        </p:nvSpPr>
+        <p:spPr>
+          <a:xfrm>
+            <a:off x="3200400" y="6035040"/>
+            <a:ext cx="2743200" cy="329184"/>
+          </a:xfrm>
+          <a:prstGeom prst="rect">
+            <a:avLst/>
+          </a:prstGeom>
+          <a:noFill/>
+        </p:spPr>
+        <p:txBody>
+          <a:bodyPr wrap="square">
+            <a:spAutoFit/>
+          </a:bodyPr>
+          <a:lstStyle/>
+          <a:p>
+            <a:pPr algn="ctr">
+              <a:defRPr sz="1400" b="1">
+                <a:solidFill>
+                  <a:srgbClr val="000000"/>
+                </a:solidFill>
+              </a:defRPr>
+            </a:pPr>
+            <a:r>
+              <a:t>HP 2012 230W Docking Station</a:t>
+            </a:r>
+          </a:p>
+        </p:txBody>
+      </p:sp>
+      <p:sp>
+        <p:nvSpPr>
+          <p:cNvPr id="19" name="TextBox 18"/>
+          <p:cNvSpPr txBox="1"/>
+          <p:nvPr/>
+        </p:nvSpPr>
+        <p:spPr>
+          <a:xfrm>
+            <a:off x="3200400" y="6364224"/>
+            <a:ext cx="2743200" cy="585216"/>
+          </a:xfrm>
+          <a:prstGeom prst="rect">
+            <a:avLst/>
+          </a:prstGeom>
+          <a:noFill/>
+        </p:spPr>
+        <p:txBody>
+          <a:bodyPr wrap="square">
+            <a:spAutoFit/>
+          </a:bodyPr>
+          <a:lstStyle/>
+          <a:p>
+            <a:pPr algn="l">
+              <a:defRPr sz="1100" b="0">
+                <a:solidFill>
+                  <a:srgbClr val="000000"/>
+                </a:solidFill>
+              </a:defRPr>
+            </a:pPr>
+            <a:r>
+              <a:t>HP offers a full line of docking stations designed exclusively for sel</a:t>
             </a:r>
           </a:p>
         </p:txBody>
@@ -7465,8 +7012,8 @@
         </p:nvSpPr>
         <p:spPr>
           <a:xfrm>
-            <a:off x="457200" y="182880"/>
-            <a:ext cx="8229600" cy="548640"/>
+            <a:off x="548640" y="1280160"/>
+            <a:ext cx="8229600" cy="3200400"/>
           </a:xfrm>
           <a:prstGeom prst="rect">
             <a:avLst/>
@@ -7479,11 +7026,14 @@
           </a:bodyPr>
           <a:lstStyle/>
           <a:p>
-            <a:pPr>
-              <a:defRPr sz="2800" b="1"/>
-            </a:pPr>
-            <a:r>
-              <a:t>Upsell Recommendations — Page 1</a:t>
+            <a:r>
+              <a:rPr sz="1800" b="0">
+                <a:solidFill>
+                  <a:srgbClr val="222222"/>
+                </a:solidFill>
+                <a:latin typeface="Calibri"/>
+              </a:rPr>
+              <a:t>Recommended next steps</a:t>
             </a:r>
           </a:p>
         </p:txBody>
@@ -7496,8 +7046,8 @@
         </p:nvSpPr>
         <p:spPr>
           <a:xfrm>
-            <a:off x="457200" y="1097280"/>
-            <a:ext cx="2743200" cy="365760"/>
+            <a:off x="548640" y="6400800"/>
+            <a:ext cx="8229600" cy="365760"/>
           </a:xfrm>
           <a:prstGeom prst="rect">
             <a:avLst/>
@@ -7505,842 +7055,20 @@
           <a:noFill/>
         </p:spPr>
         <p:txBody>
-          <a:bodyPr wrap="square">
+          <a:bodyPr wrap="none">
             <a:spAutoFit/>
           </a:bodyPr>
           <a:lstStyle/>
           <a:p>
-            <a:pPr algn="ctr">
-              <a:defRPr sz="2200" b="1">
-                <a:solidFill>
-                  <a:srgbClr val="000000"/>
-                </a:solidFill>
-              </a:defRPr>
-            </a:pPr>
-            <a:r>
-              <a:t>Bag</a:t>
-            </a:r>
-          </a:p>
-        </p:txBody>
-      </p:sp>
-      <p:pic>
-        <p:nvPicPr>
-          <p:cNvPr id="4" name="Picture 3" descr="page_28_img_11.png"/>
-          <p:cNvPicPr>
-            <a:picLocks noChangeAspect="1"/>
-          </p:cNvPicPr>
-          <p:nvPr/>
-        </p:nvPicPr>
-        <p:blipFill>
-          <a:blip r:embed="rId2"/>
-          <a:stretch>
-            <a:fillRect/>
-          </a:stretch>
-        </p:blipFill>
-        <p:spPr>
-          <a:xfrm>
-            <a:off x="1427356" y="1463040"/>
-            <a:ext cx="802887" cy="914400"/>
-          </a:xfrm>
-          <a:prstGeom prst="rect">
-            <a:avLst/>
-          </a:prstGeom>
-        </p:spPr>
-      </p:pic>
-      <p:sp>
-        <p:nvSpPr>
-          <p:cNvPr id="5" name="TextBox 4"/>
-          <p:cNvSpPr txBox="1"/>
-          <p:nvPr/>
-        </p:nvSpPr>
-        <p:spPr>
-          <a:xfrm>
-            <a:off x="457200" y="2377440"/>
-            <a:ext cx="2743200" cy="329184"/>
-          </a:xfrm>
-          <a:prstGeom prst="rect">
-            <a:avLst/>
-          </a:prstGeom>
-          <a:noFill/>
-        </p:spPr>
-        <p:txBody>
-          <a:bodyPr wrap="square">
-            <a:spAutoFit/>
-          </a:bodyPr>
-          <a:lstStyle/>
-          <a:p>
-            <a:pPr algn="ctr">
-              <a:defRPr sz="1400" b="1">
-                <a:solidFill>
-                  <a:srgbClr val="000000"/>
-                </a:solidFill>
-              </a:defRPr>
-            </a:pPr>
-            <a:r>
-              <a:t>HP Business Top Load Case</a:t>
-            </a:r>
-          </a:p>
-        </p:txBody>
-      </p:sp>
-      <p:sp>
-        <p:nvSpPr>
-          <p:cNvPr id="6" name="TextBox 5"/>
-          <p:cNvSpPr txBox="1"/>
-          <p:nvPr/>
-        </p:nvSpPr>
-        <p:spPr>
-          <a:xfrm>
-            <a:off x="457200" y="2706624"/>
-            <a:ext cx="2743200" cy="585216"/>
-          </a:xfrm>
-          <a:prstGeom prst="rect">
-            <a:avLst/>
-          </a:prstGeom>
-          <a:noFill/>
-        </p:spPr>
-        <p:txBody>
-          <a:bodyPr wrap="square">
-            <a:spAutoFit/>
-          </a:bodyPr>
-          <a:lstStyle/>
-          <a:p>
-            <a:pPr algn="l">
-              <a:defRPr sz="1100" b="0">
-                <a:solidFill>
-                  <a:srgbClr val="000000"/>
-                </a:solidFill>
-              </a:defRPr>
-            </a:pPr>
-            <a:r>
-              <a:t>Comfortably carry your notebook and everyday accessories in the stylis</a:t>
-            </a:r>
-          </a:p>
-        </p:txBody>
-      </p:sp>
-      <p:pic>
-        <p:nvPicPr>
-          <p:cNvPr id="7" name="Picture 6" descr="page_10_img_6.png"/>
-          <p:cNvPicPr>
-            <a:picLocks noChangeAspect="1"/>
-          </p:cNvPicPr>
-          <p:nvPr/>
-        </p:nvPicPr>
-        <p:blipFill>
-          <a:blip r:embed="rId3"/>
-          <a:stretch>
-            <a:fillRect/>
-          </a:stretch>
-        </p:blipFill>
-        <p:spPr>
-          <a:xfrm>
-            <a:off x="1219200" y="3291840"/>
-            <a:ext cx="1219200" cy="914400"/>
-          </a:xfrm>
-          <a:prstGeom prst="rect">
-            <a:avLst/>
-          </a:prstGeom>
-        </p:spPr>
-      </p:pic>
-      <p:sp>
-        <p:nvSpPr>
-          <p:cNvPr id="8" name="TextBox 7"/>
-          <p:cNvSpPr txBox="1"/>
-          <p:nvPr/>
-        </p:nvSpPr>
-        <p:spPr>
-          <a:xfrm>
-            <a:off x="457200" y="4206240"/>
-            <a:ext cx="2743200" cy="329184"/>
-          </a:xfrm>
-          <a:prstGeom prst="rect">
-            <a:avLst/>
-          </a:prstGeom>
-          <a:noFill/>
-        </p:spPr>
-        <p:txBody>
-          <a:bodyPr wrap="square">
-            <a:spAutoFit/>
-          </a:bodyPr>
-          <a:lstStyle/>
-          <a:p>
-            <a:pPr algn="ctr">
-              <a:defRPr sz="1400" b="1">
-                <a:solidFill>
-                  <a:srgbClr val="000000"/>
-                </a:solidFill>
-              </a:defRPr>
-            </a:pPr>
-            <a:r>
-              <a:t>HP Business 4 Wheel Roller Case</a:t>
-            </a:r>
-          </a:p>
-        </p:txBody>
-      </p:sp>
-      <p:sp>
-        <p:nvSpPr>
-          <p:cNvPr id="9" name="TextBox 8"/>
-          <p:cNvSpPr txBox="1"/>
-          <p:nvPr/>
-        </p:nvSpPr>
-        <p:spPr>
-          <a:xfrm>
-            <a:off x="457200" y="4535424"/>
-            <a:ext cx="2743200" cy="585216"/>
-          </a:xfrm>
-          <a:prstGeom prst="rect">
-            <a:avLst/>
-          </a:prstGeom>
-          <a:noFill/>
-        </p:spPr>
-        <p:txBody>
-          <a:bodyPr wrap="square">
-            <a:spAutoFit/>
-          </a:bodyPr>
-          <a:lstStyle/>
-          <a:p>
-            <a:pPr algn="l">
-              <a:defRPr sz="1100" b="0">
-                <a:solidFill>
-                  <a:srgbClr val="000000"/>
-                </a:solidFill>
-              </a:defRPr>
-            </a:pPr>
-            <a:r>
-              <a:t>Carry your notebook and all the essentials you need for a day at the o</a:t>
-            </a:r>
-          </a:p>
-        </p:txBody>
-      </p:sp>
-      <p:pic>
-        <p:nvPicPr>
-          <p:cNvPr id="10" name="Picture 9" descr="page_28_img_5.png"/>
-          <p:cNvPicPr>
-            <a:picLocks noChangeAspect="1"/>
-          </p:cNvPicPr>
-          <p:nvPr/>
-        </p:nvPicPr>
-        <p:blipFill>
-          <a:blip r:embed="rId4"/>
-          <a:stretch>
-            <a:fillRect/>
-          </a:stretch>
-        </p:blipFill>
-        <p:spPr>
-          <a:xfrm>
-            <a:off x="1316477" y="5120640"/>
-            <a:ext cx="1024646" cy="914400"/>
-          </a:xfrm>
-          <a:prstGeom prst="rect">
-            <a:avLst/>
-          </a:prstGeom>
-        </p:spPr>
-      </p:pic>
-      <p:sp>
-        <p:nvSpPr>
-          <p:cNvPr id="11" name="TextBox 10"/>
-          <p:cNvSpPr txBox="1"/>
-          <p:nvPr/>
-        </p:nvSpPr>
-        <p:spPr>
-          <a:xfrm>
-            <a:off x="457200" y="6035040"/>
-            <a:ext cx="2743200" cy="329184"/>
-          </a:xfrm>
-          <a:prstGeom prst="rect">
-            <a:avLst/>
-          </a:prstGeom>
-          <a:noFill/>
-        </p:spPr>
-        <p:txBody>
-          <a:bodyPr wrap="square">
-            <a:spAutoFit/>
-          </a:bodyPr>
-          <a:lstStyle/>
-          <a:p>
-            <a:pPr algn="ctr">
-              <a:defRPr sz="1400" b="1">
-                <a:solidFill>
-                  <a:srgbClr val="000000"/>
-                </a:solidFill>
-              </a:defRPr>
-            </a:pPr>
-            <a:r>
-              <a:t>HP Essential Messenger Case</a:t>
-            </a:r>
-          </a:p>
-        </p:txBody>
-      </p:sp>
-      <p:sp>
-        <p:nvSpPr>
-          <p:cNvPr id="12" name="TextBox 11"/>
-          <p:cNvSpPr txBox="1"/>
-          <p:nvPr/>
-        </p:nvSpPr>
-        <p:spPr>
-          <a:xfrm>
-            <a:off x="457200" y="6364224"/>
-            <a:ext cx="2743200" cy="585216"/>
-          </a:xfrm>
-          <a:prstGeom prst="rect">
-            <a:avLst/>
-          </a:prstGeom>
-          <a:noFill/>
-        </p:spPr>
-        <p:txBody>
-          <a:bodyPr wrap="square">
-            <a:spAutoFit/>
-          </a:bodyPr>
-          <a:lstStyle/>
-          <a:p>
-            <a:pPr algn="l">
-              <a:defRPr sz="1100" b="0">
-                <a:solidFill>
-                  <a:srgbClr val="000000"/>
-                </a:solidFill>
-              </a:defRPr>
-            </a:pPr>
-            <a:r>
-              <a:t>The HP Essential Messenger Case is a messenger style carrying case des</a:t>
-            </a:r>
-          </a:p>
-        </p:txBody>
-      </p:sp>
-      <p:sp>
-        <p:nvSpPr>
-          <p:cNvPr id="13" name="TextBox 12"/>
-          <p:cNvSpPr txBox="1"/>
-          <p:nvPr/>
-        </p:nvSpPr>
-        <p:spPr>
-          <a:xfrm>
-            <a:off x="3200400" y="1097280"/>
-            <a:ext cx="2743200" cy="365760"/>
-          </a:xfrm>
-          <a:prstGeom prst="rect">
-            <a:avLst/>
-          </a:prstGeom>
-          <a:noFill/>
-        </p:spPr>
-        <p:txBody>
-          <a:bodyPr wrap="square">
-            <a:spAutoFit/>
-          </a:bodyPr>
-          <a:lstStyle/>
-          <a:p>
-            <a:pPr algn="ctr">
-              <a:defRPr sz="2200" b="1">
-                <a:solidFill>
-                  <a:srgbClr val="000000"/>
-                </a:solidFill>
-              </a:defRPr>
-            </a:pPr>
-            <a:r>
-              <a:t>Backpack</a:t>
-            </a:r>
-          </a:p>
-        </p:txBody>
-      </p:sp>
-      <p:pic>
-        <p:nvPicPr>
-          <p:cNvPr id="14" name="Picture 13" descr="page_28_img_6.png"/>
-          <p:cNvPicPr>
-            <a:picLocks noChangeAspect="1"/>
-          </p:cNvPicPr>
-          <p:nvPr/>
-        </p:nvPicPr>
-        <p:blipFill>
-          <a:blip r:embed="rId5"/>
-          <a:stretch>
-            <a:fillRect/>
-          </a:stretch>
-        </p:blipFill>
-        <p:spPr>
-          <a:xfrm>
-            <a:off x="4225925" y="1463040"/>
-            <a:ext cx="692150" cy="914400"/>
-          </a:xfrm>
-          <a:prstGeom prst="rect">
-            <a:avLst/>
-          </a:prstGeom>
-        </p:spPr>
-      </p:pic>
-      <p:sp>
-        <p:nvSpPr>
-          <p:cNvPr id="15" name="TextBox 14"/>
-          <p:cNvSpPr txBox="1"/>
-          <p:nvPr/>
-        </p:nvSpPr>
-        <p:spPr>
-          <a:xfrm>
-            <a:off x="3200400" y="2377440"/>
-            <a:ext cx="2743200" cy="329184"/>
-          </a:xfrm>
-          <a:prstGeom prst="rect">
-            <a:avLst/>
-          </a:prstGeom>
-          <a:noFill/>
-        </p:spPr>
-        <p:txBody>
-          <a:bodyPr wrap="square">
-            <a:spAutoFit/>
-          </a:bodyPr>
-          <a:lstStyle/>
-          <a:p>
-            <a:pPr algn="ctr">
-              <a:defRPr sz="1400" b="1">
-                <a:solidFill>
-                  <a:srgbClr val="000000"/>
-                </a:solidFill>
-              </a:defRPr>
-            </a:pPr>
-            <a:r>
-              <a:t>HP Essential Backpack</a:t>
-            </a:r>
-          </a:p>
-        </p:txBody>
-      </p:sp>
-      <p:sp>
-        <p:nvSpPr>
-          <p:cNvPr id="16" name="TextBox 15"/>
-          <p:cNvSpPr txBox="1"/>
-          <p:nvPr/>
-        </p:nvSpPr>
-        <p:spPr>
-          <a:xfrm>
-            <a:off x="3200400" y="2706624"/>
-            <a:ext cx="2743200" cy="585216"/>
-          </a:xfrm>
-          <a:prstGeom prst="rect">
-            <a:avLst/>
-          </a:prstGeom>
-          <a:noFill/>
-        </p:spPr>
-        <p:txBody>
-          <a:bodyPr wrap="square">
-            <a:spAutoFit/>
-          </a:bodyPr>
-          <a:lstStyle/>
-          <a:p>
-            <a:pPr algn="l">
-              <a:defRPr sz="1100" b="0">
-                <a:solidFill>
-                  <a:srgbClr val="000000"/>
-                </a:solidFill>
-              </a:defRPr>
-            </a:pPr>
-            <a:r>
-              <a:t>The HP Essential Backpack is a great notebook carrying solution for bo</a:t>
-            </a:r>
-          </a:p>
-        </p:txBody>
-      </p:sp>
-      <p:pic>
-        <p:nvPicPr>
-          <p:cNvPr id="17" name="Picture 16" descr="page_28_img_12.png"/>
-          <p:cNvPicPr>
-            <a:picLocks noChangeAspect="1"/>
-          </p:cNvPicPr>
-          <p:nvPr/>
-        </p:nvPicPr>
-        <p:blipFill>
-          <a:blip r:embed="rId6"/>
-          <a:stretch>
-            <a:fillRect/>
-          </a:stretch>
-        </p:blipFill>
-        <p:spPr>
-          <a:xfrm>
-            <a:off x="4117953" y="3291840"/>
-            <a:ext cx="908093" cy="914400"/>
-          </a:xfrm>
-          <a:prstGeom prst="rect">
-            <a:avLst/>
-          </a:prstGeom>
-        </p:spPr>
-      </p:pic>
-      <p:sp>
-        <p:nvSpPr>
-          <p:cNvPr id="18" name="TextBox 17"/>
-          <p:cNvSpPr txBox="1"/>
-          <p:nvPr/>
-        </p:nvSpPr>
-        <p:spPr>
-          <a:xfrm>
-            <a:off x="3200400" y="4206240"/>
-            <a:ext cx="2743200" cy="329184"/>
-          </a:xfrm>
-          <a:prstGeom prst="rect">
-            <a:avLst/>
-          </a:prstGeom>
-          <a:noFill/>
-        </p:spPr>
-        <p:txBody>
-          <a:bodyPr wrap="square">
-            <a:spAutoFit/>
-          </a:bodyPr>
-          <a:lstStyle/>
-          <a:p>
-            <a:pPr algn="ctr">
-              <a:defRPr sz="1400" b="1">
-                <a:solidFill>
-                  <a:srgbClr val="000000"/>
-                </a:solidFill>
-              </a:defRPr>
-            </a:pPr>
-            <a:r>
-              <a:t>HP Professional Backpack Case</a:t>
-            </a:r>
-          </a:p>
-        </p:txBody>
-      </p:sp>
-      <p:sp>
-        <p:nvSpPr>
-          <p:cNvPr id="19" name="TextBox 18"/>
-          <p:cNvSpPr txBox="1"/>
-          <p:nvPr/>
-        </p:nvSpPr>
-        <p:spPr>
-          <a:xfrm>
-            <a:off x="3200400" y="4535424"/>
-            <a:ext cx="2743200" cy="585216"/>
-          </a:xfrm>
-          <a:prstGeom prst="rect">
-            <a:avLst/>
-          </a:prstGeom>
-          <a:noFill/>
-        </p:spPr>
-        <p:txBody>
-          <a:bodyPr wrap="square">
-            <a:spAutoFit/>
-          </a:bodyPr>
-          <a:lstStyle/>
-          <a:p>
-            <a:pPr algn="l">
-              <a:defRPr sz="1100" b="0">
-                <a:solidFill>
-                  <a:srgbClr val="000000"/>
-                </a:solidFill>
-              </a:defRPr>
-            </a:pPr>
-            <a:r>
-              <a:t>Combining comfort and function, the HP Professional Backpack Case is d</a:t>
-            </a:r>
-          </a:p>
-        </p:txBody>
-      </p:sp>
-      <p:pic>
-        <p:nvPicPr>
-          <p:cNvPr id="20" name="Picture 19" descr="page_28_img_15.png"/>
-          <p:cNvPicPr>
-            <a:picLocks noChangeAspect="1"/>
-          </p:cNvPicPr>
-          <p:nvPr/>
-        </p:nvPicPr>
-        <p:blipFill>
-          <a:blip r:embed="rId7"/>
-          <a:stretch>
-            <a:fillRect/>
-          </a:stretch>
-        </p:blipFill>
-        <p:spPr>
-          <a:xfrm>
-            <a:off x="4184440" y="5120640"/>
-            <a:ext cx="775120" cy="914400"/>
-          </a:xfrm>
-          <a:prstGeom prst="rect">
-            <a:avLst/>
-          </a:prstGeom>
-        </p:spPr>
-      </p:pic>
-      <p:sp>
-        <p:nvSpPr>
-          <p:cNvPr id="21" name="TextBox 20"/>
-          <p:cNvSpPr txBox="1"/>
-          <p:nvPr/>
-        </p:nvSpPr>
-        <p:spPr>
-          <a:xfrm>
-            <a:off x="3200400" y="6035040"/>
-            <a:ext cx="2743200" cy="329184"/>
-          </a:xfrm>
-          <a:prstGeom prst="rect">
-            <a:avLst/>
-          </a:prstGeom>
-          <a:noFill/>
-        </p:spPr>
-        <p:txBody>
-          <a:bodyPr wrap="square">
-            <a:spAutoFit/>
-          </a:bodyPr>
-          <a:lstStyle/>
-          <a:p>
-            <a:pPr algn="ctr">
-              <a:defRPr sz="1400" b="1">
-                <a:solidFill>
-                  <a:srgbClr val="000000"/>
-                </a:solidFill>
-              </a:defRPr>
-            </a:pPr>
-            <a:r>
-              <a:t>HP Business Nylon Backpack</a:t>
-            </a:r>
-          </a:p>
-        </p:txBody>
-      </p:sp>
-      <p:sp>
-        <p:nvSpPr>
-          <p:cNvPr id="22" name="TextBox 21"/>
-          <p:cNvSpPr txBox="1"/>
-          <p:nvPr/>
-        </p:nvSpPr>
-        <p:spPr>
-          <a:xfrm>
-            <a:off x="3200400" y="6364224"/>
-            <a:ext cx="2743200" cy="585216"/>
-          </a:xfrm>
-          <a:prstGeom prst="rect">
-            <a:avLst/>
-          </a:prstGeom>
-          <a:noFill/>
-        </p:spPr>
-        <p:txBody>
-          <a:bodyPr wrap="square">
-            <a:spAutoFit/>
-          </a:bodyPr>
-          <a:lstStyle/>
-          <a:p>
-            <a:pPr algn="l">
-              <a:defRPr sz="1100" b="0">
-                <a:solidFill>
-                  <a:srgbClr val="000000"/>
-                </a:solidFill>
-              </a:defRPr>
-            </a:pPr>
-            <a:r>
-              <a:t>HP Business Nylon Backpack offers a sturdy, all-purpose backpack for m</a:t>
-            </a:r>
-          </a:p>
-        </p:txBody>
-      </p:sp>
-      <p:sp>
-        <p:nvSpPr>
-          <p:cNvPr id="23" name="TextBox 22"/>
-          <p:cNvSpPr txBox="1"/>
-          <p:nvPr/>
-        </p:nvSpPr>
-        <p:spPr>
-          <a:xfrm>
-            <a:off x="5943600" y="1097280"/>
-            <a:ext cx="2743200" cy="365760"/>
-          </a:xfrm>
-          <a:prstGeom prst="rect">
-            <a:avLst/>
-          </a:prstGeom>
-          <a:noFill/>
-        </p:spPr>
-        <p:txBody>
-          <a:bodyPr wrap="square">
-            <a:spAutoFit/>
-          </a:bodyPr>
-          <a:lstStyle/>
-          <a:p>
-            <a:pPr algn="ctr">
-              <a:defRPr sz="2200" b="1">
-                <a:solidFill>
-                  <a:srgbClr val="000000"/>
-                </a:solidFill>
-              </a:defRPr>
-            </a:pPr>
-            <a:r>
-              <a:t>Sleeve</a:t>
-            </a:r>
-          </a:p>
-        </p:txBody>
-      </p:sp>
-      <p:pic>
-        <p:nvPicPr>
-          <p:cNvPr id="24" name="Picture 23" descr="page_28_img_9.png"/>
-          <p:cNvPicPr>
-            <a:picLocks noChangeAspect="1"/>
-          </p:cNvPicPr>
-          <p:nvPr/>
-        </p:nvPicPr>
-        <p:blipFill>
-          <a:blip r:embed="rId8"/>
-          <a:stretch>
-            <a:fillRect/>
-          </a:stretch>
-        </p:blipFill>
-        <p:spPr>
-          <a:xfrm>
-            <a:off x="6758887" y="1463040"/>
-            <a:ext cx="1112626" cy="914400"/>
-          </a:xfrm>
-          <a:prstGeom prst="rect">
-            <a:avLst/>
-          </a:prstGeom>
-        </p:spPr>
-      </p:pic>
-      <p:sp>
-        <p:nvSpPr>
-          <p:cNvPr id="25" name="TextBox 24"/>
-          <p:cNvSpPr txBox="1"/>
-          <p:nvPr/>
-        </p:nvSpPr>
-        <p:spPr>
-          <a:xfrm>
-            <a:off x="5943600" y="2377440"/>
-            <a:ext cx="2743200" cy="329184"/>
-          </a:xfrm>
-          <a:prstGeom prst="rect">
-            <a:avLst/>
-          </a:prstGeom>
-          <a:noFill/>
-        </p:spPr>
-        <p:txBody>
-          <a:bodyPr wrap="square">
-            <a:spAutoFit/>
-          </a:bodyPr>
-          <a:lstStyle/>
-          <a:p>
-            <a:pPr algn="ctr">
-              <a:defRPr sz="1400" b="1">
-                <a:solidFill>
-                  <a:srgbClr val="000000"/>
-                </a:solidFill>
-              </a:defRPr>
-            </a:pPr>
-            <a:r>
-              <a:t>HP ElitePad Case</a:t>
-            </a:r>
-          </a:p>
-        </p:txBody>
-      </p:sp>
-      <p:sp>
-        <p:nvSpPr>
-          <p:cNvPr id="26" name="TextBox 25"/>
-          <p:cNvSpPr txBox="1"/>
-          <p:nvPr/>
-        </p:nvSpPr>
-        <p:spPr>
-          <a:xfrm>
-            <a:off x="5943600" y="2706624"/>
-            <a:ext cx="2743200" cy="585216"/>
-          </a:xfrm>
-          <a:prstGeom prst="rect">
-            <a:avLst/>
-          </a:prstGeom>
-          <a:noFill/>
-        </p:spPr>
-        <p:txBody>
-          <a:bodyPr wrap="square">
-            <a:spAutoFit/>
-          </a:bodyPr>
-          <a:lstStyle/>
-          <a:p>
-            <a:pPr algn="l">
-              <a:defRPr sz="1100" b="0">
-                <a:solidFill>
-                  <a:srgbClr val="000000"/>
-                </a:solidFill>
-              </a:defRPr>
-            </a:pPr>
-            <a:r>
-              <a:t>Sophistication. Durability. We've got you covered. Carry your HP Elite</a:t>
-            </a:r>
-          </a:p>
-        </p:txBody>
-      </p:sp>
-      <p:pic>
-        <p:nvPicPr>
-          <p:cNvPr id="27" name="Picture 26" descr="page_28_img_10.png"/>
-          <p:cNvPicPr>
-            <a:picLocks noChangeAspect="1"/>
-          </p:cNvPicPr>
-          <p:nvPr/>
-        </p:nvPicPr>
-        <p:blipFill>
-          <a:blip r:embed="rId9"/>
-          <a:stretch>
-            <a:fillRect/>
-          </a:stretch>
-        </p:blipFill>
-        <p:spPr>
-          <a:xfrm>
-            <a:off x="6599446" y="3291840"/>
-            <a:ext cx="1431508" cy="914400"/>
-          </a:xfrm>
-          <a:prstGeom prst="rect">
-            <a:avLst/>
-          </a:prstGeom>
-        </p:spPr>
-      </p:pic>
-      <p:sp>
-        <p:nvSpPr>
-          <p:cNvPr id="28" name="TextBox 27"/>
-          <p:cNvSpPr txBox="1"/>
-          <p:nvPr/>
-        </p:nvSpPr>
-        <p:spPr>
-          <a:xfrm>
-            <a:off x="5943600" y="4206240"/>
-            <a:ext cx="2743200" cy="329184"/>
-          </a:xfrm>
-          <a:prstGeom prst="rect">
-            <a:avLst/>
-          </a:prstGeom>
-          <a:noFill/>
-        </p:spPr>
-        <p:txBody>
-          <a:bodyPr wrap="square">
-            <a:spAutoFit/>
-          </a:bodyPr>
-          <a:lstStyle/>
-          <a:p>
-            <a:pPr algn="ctr">
-              <a:defRPr sz="1400" b="1">
-                <a:solidFill>
-                  <a:srgbClr val="000000"/>
-                </a:solidFill>
-              </a:defRPr>
-            </a:pPr>
-            <a:r>
-              <a:t>HP ElitePad Rugged Case</a:t>
-            </a:r>
-          </a:p>
-        </p:txBody>
-      </p:sp>
-      <p:sp>
-        <p:nvSpPr>
-          <p:cNvPr id="29" name="TextBox 28"/>
-          <p:cNvSpPr txBox="1"/>
-          <p:nvPr/>
-        </p:nvSpPr>
-        <p:spPr>
-          <a:xfrm>
-            <a:off x="5943600" y="4535424"/>
-            <a:ext cx="2743200" cy="585216"/>
-          </a:xfrm>
-          <a:prstGeom prst="rect">
-            <a:avLst/>
-          </a:prstGeom>
-          <a:noFill/>
-        </p:spPr>
-        <p:txBody>
-          <a:bodyPr wrap="square">
-            <a:spAutoFit/>
-          </a:bodyPr>
-          <a:lstStyle/>
-          <a:p>
-            <a:pPr algn="l">
-              <a:defRPr sz="1100" b="0">
-                <a:solidFill>
-                  <a:srgbClr val="000000"/>
-                </a:solidFill>
-              </a:defRPr>
-            </a:pPr>
-            <a:r>
-              <a:t>Help protect your HP ElitePad from bumps and drops in busy, high-traff</a:t>
+            <a:pPr algn="l"/>
+            <a:r>
+              <a:rPr sz="900" b="0">
+                <a:solidFill>
+                  <a:srgbClr val="787878"/>
+                </a:solidFill>
+                <a:latin typeface="Calibri"/>
+              </a:rPr>
+              <a:t>Thank You — HP Sales Team</a:t>
             </a:r>
           </a:p>
         </p:txBody>
